--- a/output/wordlabs-encourage-3day.pptx
+++ b/output/wordlabs-encourage-3day.pptx
@@ -5622,7 +5622,7 @@
                 <a:ea typeface="Trebuchet MS" pitchFamily="34" charset="-122"/>
                 <a:cs typeface="Trebuchet MS" pitchFamily="34" charset="-120"/>
               </a:rPr>
-              <a:t>0</a:t>
+              <a:t>1</a:t>
             </a:r>
             <a:pPr algn="ctr" indent="0" marL="0">
               <a:buNone/>
@@ -6071,7 +6071,7 @@
                 <a:ea typeface="Calibri" pitchFamily="34" charset="-122"/>
                 <a:cs typeface="Calibri" pitchFamily="34" charset="-120"/>
               </a:rPr>
-              <a:t> helped Sam feel </a:t>
+              <a:t> helped the student feel </a:t>
             </a:r>
             <a:pPr algn="l" indent="0" marL="0">
               <a:buNone/>
@@ -6102,7 +6102,7 @@
                 <a:ea typeface="Calibri" pitchFamily="34" charset="-122"/>
                 <a:cs typeface="Calibri" pitchFamily="34" charset="-120"/>
               </a:rPr>
-              <a:t> enough to try the difficult maths problem.</a:t>
+              <a:t> to keep trying.</a:t>
             </a:r>
             <a:endParaRPr lang="en-US" sz="1800" dirty="0"/>
           </a:p>
@@ -7972,7 +7972,7 @@
                 <a:ea typeface="Calibri" pitchFamily="34" charset="-122"/>
                 <a:cs typeface="Calibri" pitchFamily="34" charset="-120"/>
               </a:rPr>
-              <a:t>bravery from the heart</a:t>
+              <a:t>bravery, heart</a:t>
             </a:r>
             <a:endParaRPr lang="en-US" sz="850" dirty="0"/>
           </a:p>
@@ -8084,7 +8084,7 @@
                 <a:ea typeface="Calibri" pitchFamily="34" charset="-122"/>
                 <a:cs typeface="Calibri" pitchFamily="34" charset="-120"/>
               </a:rPr>
-              <a:t>the result or state of</a:t>
+              <a:t>result or action (makes a noun)</a:t>
             </a:r>
             <a:endParaRPr lang="en-US" sz="850" dirty="0"/>
           </a:p>
@@ -9069,7 +9069,7 @@
                 <a:ea typeface="Calibri" pitchFamily="34" charset="-122"/>
                 <a:cs typeface="Calibri" pitchFamily="34" charset="-120"/>
               </a:rPr>
-              <a:t>bravery from the heart</a:t>
+              <a:t>bravery, heart</a:t>
             </a:r>
             <a:endParaRPr lang="en-US" sz="850" dirty="0"/>
           </a:p>
@@ -9181,7 +9181,7 @@
                 <a:ea typeface="Calibri" pitchFamily="34" charset="-122"/>
                 <a:cs typeface="Calibri" pitchFamily="34" charset="-120"/>
               </a:rPr>
-              <a:t>the result or state of</a:t>
+              <a:t>result or action (makes a noun)</a:t>
             </a:r>
             <a:endParaRPr lang="en-US" sz="850" dirty="0"/>
           </a:p>
@@ -10508,7 +10508,7 @@
                 <a:ea typeface="Calibri" pitchFamily="34" charset="-122"/>
                 <a:cs typeface="Calibri" pitchFamily="34" charset="-120"/>
               </a:rPr>
-              <a:t>bravery from the heart</a:t>
+              <a:t>bravery, heart</a:t>
             </a:r>
             <a:endParaRPr lang="en-US" sz="850" dirty="0"/>
           </a:p>
@@ -10620,7 +10620,7 @@
                 <a:ea typeface="Calibri" pitchFamily="34" charset="-122"/>
                 <a:cs typeface="Calibri" pitchFamily="34" charset="-120"/>
               </a:rPr>
-              <a:t>the result or state of</a:t>
+              <a:t>result or action (makes a noun)</a:t>
             </a:r>
             <a:endParaRPr lang="en-US" sz="850" dirty="0"/>
           </a:p>
@@ -13539,7 +13539,7 @@
                 <a:ea typeface="Calibri" pitchFamily="34" charset="-122"/>
                 <a:cs typeface="Calibri" pitchFamily="34" charset="-120"/>
               </a:rPr>
-              <a:t>bravery from the heart</a:t>
+              <a:t>bravery, heart</a:t>
             </a:r>
             <a:endParaRPr lang="en-US" sz="850" dirty="0"/>
           </a:p>
@@ -13651,7 +13651,7 @@
                 <a:ea typeface="Calibri" pitchFamily="34" charset="-122"/>
                 <a:cs typeface="Calibri" pitchFamily="34" charset="-120"/>
               </a:rPr>
-              <a:t>in the past</a:t>
+              <a:t>past tense</a:t>
             </a:r>
             <a:endParaRPr lang="en-US" sz="850" dirty="0"/>
           </a:p>
@@ -13659,7 +13659,46 @@
       </p:sp>
       <p:sp>
         <p:nvSpPr>
-          <p:cNvPr id="25" name="Shape 23"/>
+          <p:cNvPr id="25" name="Text 23"/>
+          <p:cNvSpPr/>
+          <p:nvPr/>
+        </p:nvSpPr>
+        <p:spPr>
+          <a:xfrm>
+            <a:off x="6519672" y="2752344"/>
+            <a:ext cx="1828800" cy="182880"/>
+          </a:xfrm>
+          <a:prstGeom prst="rect">
+            <a:avLst/>
+          </a:prstGeom>
+          <a:noFill/>
+          <a:ln/>
+        </p:spPr>
+        <p:txBody>
+          <a:bodyPr wrap="square" lIns="0" tIns="0" rIns="0" bIns="0" rtlCol="0" anchor="t"/>
+          <a:lstStyle/>
+          <a:p>
+            <a:pPr algn="ctr" indent="0" marL="0">
+              <a:buNone/>
+            </a:pPr>
+            <a:r>
+              <a:rPr lang="en-US" sz="700" i="1" dirty="0">
+                <a:solidFill>
+                  <a:srgbClr val="94A3B8"/>
+                </a:solidFill>
+                <a:latin typeface="Calibri" pitchFamily="34" charset="0"/>
+                <a:ea typeface="Calibri" pitchFamily="34" charset="-122"/>
+                <a:cs typeface="Calibri" pitchFamily="34" charset="-120"/>
+              </a:rPr>
+              <a:t>'e' dropped before vowel suffix</a:t>
+            </a:r>
+            <a:endParaRPr lang="en-US" sz="700" dirty="0"/>
+          </a:p>
+        </p:txBody>
+      </p:sp>
+      <p:sp>
+        <p:nvSpPr>
+          <p:cNvPr id="26" name="Shape 24"/>
           <p:cNvSpPr/>
           <p:nvPr/>
         </p:nvSpPr>
@@ -13686,7 +13725,7 @@
       </p:sp>
       <p:sp>
         <p:nvSpPr>
-          <p:cNvPr id="26" name="Text 24"/>
+          <p:cNvPr id="27" name="Text 25"/>
           <p:cNvSpPr/>
           <p:nvPr/>
         </p:nvSpPr>
@@ -13725,7 +13764,7 @@
       </p:sp>
       <p:sp>
         <p:nvSpPr>
-          <p:cNvPr id="27" name="Shape 25"/>
+          <p:cNvPr id="28" name="Shape 26"/>
           <p:cNvSpPr/>
           <p:nvPr/>
         </p:nvSpPr>
@@ -13752,7 +13791,7 @@
       </p:sp>
       <p:sp>
         <p:nvSpPr>
-          <p:cNvPr id="28" name="Text 26"/>
+          <p:cNvPr id="29" name="Text 27"/>
           <p:cNvSpPr/>
           <p:nvPr/>
         </p:nvSpPr>
@@ -13791,7 +13830,7 @@
       </p:sp>
       <p:sp>
         <p:nvSpPr>
-          <p:cNvPr id="29" name="Shape 27"/>
+          <p:cNvPr id="30" name="Shape 28"/>
           <p:cNvSpPr/>
           <p:nvPr/>
         </p:nvSpPr>
@@ -13818,7 +13857,7 @@
       </p:sp>
       <p:sp>
         <p:nvSpPr>
-          <p:cNvPr id="30" name="Text 28"/>
+          <p:cNvPr id="31" name="Text 29"/>
           <p:cNvSpPr/>
           <p:nvPr/>
         </p:nvSpPr>
@@ -13857,7 +13896,7 @@
       </p:sp>
       <p:sp>
         <p:nvSpPr>
-          <p:cNvPr id="31" name="Shape 29"/>
+          <p:cNvPr id="32" name="Shape 30"/>
           <p:cNvSpPr/>
           <p:nvPr/>
         </p:nvSpPr>
@@ -13884,7 +13923,7 @@
       </p:sp>
       <p:sp>
         <p:nvSpPr>
-          <p:cNvPr id="32" name="Text 30"/>
+          <p:cNvPr id="33" name="Text 31"/>
           <p:cNvSpPr/>
           <p:nvPr/>
         </p:nvSpPr>
@@ -14636,7 +14675,7 @@
                 <a:ea typeface="Calibri" pitchFamily="34" charset="-122"/>
                 <a:cs typeface="Calibri" pitchFamily="34" charset="-120"/>
               </a:rPr>
-              <a:t>bravery from the heart</a:t>
+              <a:t>bravery, heart</a:t>
             </a:r>
             <a:endParaRPr lang="en-US" sz="850" dirty="0"/>
           </a:p>
@@ -14748,7 +14787,7 @@
                 <a:ea typeface="Calibri" pitchFamily="34" charset="-122"/>
                 <a:cs typeface="Calibri" pitchFamily="34" charset="-120"/>
               </a:rPr>
-              <a:t>in the past</a:t>
+              <a:t>past tense</a:t>
             </a:r>
             <a:endParaRPr lang="en-US" sz="850" dirty="0"/>
           </a:p>
@@ -14756,7 +14795,46 @@
       </p:sp>
       <p:sp>
         <p:nvSpPr>
-          <p:cNvPr id="25" name="Shape 23"/>
+          <p:cNvPr id="25" name="Text 23"/>
+          <p:cNvSpPr/>
+          <p:nvPr/>
+        </p:nvSpPr>
+        <p:spPr>
+          <a:xfrm>
+            <a:off x="6519672" y="2752344"/>
+            <a:ext cx="1828800" cy="182880"/>
+          </a:xfrm>
+          <a:prstGeom prst="rect">
+            <a:avLst/>
+          </a:prstGeom>
+          <a:noFill/>
+          <a:ln/>
+        </p:spPr>
+        <p:txBody>
+          <a:bodyPr wrap="square" lIns="0" tIns="0" rIns="0" bIns="0" rtlCol="0" anchor="t"/>
+          <a:lstStyle/>
+          <a:p>
+            <a:pPr algn="ctr" indent="0" marL="0">
+              <a:buNone/>
+            </a:pPr>
+            <a:r>
+              <a:rPr lang="en-US" sz="700" i="1" dirty="0">
+                <a:solidFill>
+                  <a:srgbClr val="94A3B8"/>
+                </a:solidFill>
+                <a:latin typeface="Calibri" pitchFamily="34" charset="0"/>
+                <a:ea typeface="Calibri" pitchFamily="34" charset="-122"/>
+                <a:cs typeface="Calibri" pitchFamily="34" charset="-120"/>
+              </a:rPr>
+              <a:t>'e' dropped before vowel suffix</a:t>
+            </a:r>
+            <a:endParaRPr lang="en-US" sz="700" dirty="0"/>
+          </a:p>
+        </p:txBody>
+      </p:sp>
+      <p:sp>
+        <p:nvSpPr>
+          <p:cNvPr id="26" name="Shape 24"/>
           <p:cNvSpPr/>
           <p:nvPr/>
         </p:nvSpPr>
@@ -14783,7 +14861,7 @@
       </p:sp>
       <p:sp>
         <p:nvSpPr>
-          <p:cNvPr id="26" name="Text 24"/>
+          <p:cNvPr id="27" name="Text 25"/>
           <p:cNvSpPr/>
           <p:nvPr/>
         </p:nvSpPr>
@@ -14822,7 +14900,7 @@
       </p:sp>
       <p:sp>
         <p:nvSpPr>
-          <p:cNvPr id="27" name="Shape 25"/>
+          <p:cNvPr id="28" name="Shape 26"/>
           <p:cNvSpPr/>
           <p:nvPr/>
         </p:nvSpPr>
@@ -14849,7 +14927,7 @@
       </p:sp>
       <p:sp>
         <p:nvSpPr>
-          <p:cNvPr id="28" name="Shape 26"/>
+          <p:cNvPr id="29" name="Shape 27"/>
           <p:cNvSpPr/>
           <p:nvPr/>
         </p:nvSpPr>
@@ -14876,7 +14954,7 @@
       </p:sp>
       <p:sp>
         <p:nvSpPr>
-          <p:cNvPr id="29" name="Text 27"/>
+          <p:cNvPr id="30" name="Text 28"/>
           <p:cNvSpPr/>
           <p:nvPr/>
         </p:nvSpPr>
@@ -14915,7 +14993,7 @@
       </p:sp>
       <p:sp>
         <p:nvSpPr>
-          <p:cNvPr id="30" name="Text 28"/>
+          <p:cNvPr id="31" name="Text 29"/>
           <p:cNvSpPr/>
           <p:nvPr/>
         </p:nvSpPr>
@@ -14954,7 +15032,7 @@
       </p:sp>
       <p:sp>
         <p:nvSpPr>
-          <p:cNvPr id="31" name="Shape 29"/>
+          <p:cNvPr id="32" name="Shape 30"/>
           <p:cNvSpPr/>
           <p:nvPr/>
         </p:nvSpPr>
@@ -14981,7 +15059,7 @@
       </p:sp>
       <p:sp>
         <p:nvSpPr>
-          <p:cNvPr id="32" name="Text 30"/>
+          <p:cNvPr id="33" name="Text 31"/>
           <p:cNvSpPr/>
           <p:nvPr/>
         </p:nvSpPr>
@@ -15020,7 +15098,7 @@
       </p:sp>
       <p:sp>
         <p:nvSpPr>
-          <p:cNvPr id="33" name="Text 31"/>
+          <p:cNvPr id="34" name="Text 32"/>
           <p:cNvSpPr/>
           <p:nvPr/>
         </p:nvSpPr>
@@ -15059,7 +15137,7 @@
       </p:sp>
       <p:sp>
         <p:nvSpPr>
-          <p:cNvPr id="34" name="Shape 32"/>
+          <p:cNvPr id="35" name="Shape 33"/>
           <p:cNvSpPr/>
           <p:nvPr/>
         </p:nvSpPr>
@@ -15086,7 +15164,7 @@
       </p:sp>
       <p:sp>
         <p:nvSpPr>
-          <p:cNvPr id="35" name="Text 33"/>
+          <p:cNvPr id="36" name="Text 34"/>
           <p:cNvSpPr/>
           <p:nvPr/>
         </p:nvSpPr>
@@ -15125,7 +15203,7 @@
       </p:sp>
       <p:sp>
         <p:nvSpPr>
-          <p:cNvPr id="36" name="Shape 34"/>
+          <p:cNvPr id="37" name="Shape 35"/>
           <p:cNvSpPr/>
           <p:nvPr/>
         </p:nvSpPr>
@@ -15152,7 +15230,7 @@
       </p:sp>
       <p:sp>
         <p:nvSpPr>
-          <p:cNvPr id="37" name="Text 35"/>
+          <p:cNvPr id="38" name="Text 36"/>
           <p:cNvSpPr/>
           <p:nvPr/>
         </p:nvSpPr>
@@ -15191,7 +15269,7 @@
       </p:sp>
       <p:sp>
         <p:nvSpPr>
-          <p:cNvPr id="38" name="Shape 36"/>
+          <p:cNvPr id="39" name="Shape 37"/>
           <p:cNvSpPr/>
           <p:nvPr/>
         </p:nvSpPr>
@@ -15218,7 +15296,7 @@
       </p:sp>
       <p:sp>
         <p:nvSpPr>
-          <p:cNvPr id="39" name="Text 37"/>
+          <p:cNvPr id="40" name="Text 38"/>
           <p:cNvSpPr/>
           <p:nvPr/>
         </p:nvSpPr>
@@ -16235,7 +16313,7 @@
                 <a:ea typeface="Calibri" pitchFamily="34" charset="-122"/>
                 <a:cs typeface="Calibri" pitchFamily="34" charset="-120"/>
               </a:rPr>
-              <a:t>bravery from the heart</a:t>
+              <a:t>bravery, heart</a:t>
             </a:r>
             <a:endParaRPr lang="en-US" sz="850" dirty="0"/>
           </a:p>
@@ -16347,7 +16425,7 @@
                 <a:ea typeface="Calibri" pitchFamily="34" charset="-122"/>
                 <a:cs typeface="Calibri" pitchFamily="34" charset="-120"/>
               </a:rPr>
-              <a:t>in the past</a:t>
+              <a:t>past tense</a:t>
             </a:r>
             <a:endParaRPr lang="en-US" sz="850" dirty="0"/>
           </a:p>
@@ -16355,7 +16433,46 @@
       </p:sp>
       <p:sp>
         <p:nvSpPr>
-          <p:cNvPr id="25" name="Shape 23"/>
+          <p:cNvPr id="25" name="Text 23"/>
+          <p:cNvSpPr/>
+          <p:nvPr/>
+        </p:nvSpPr>
+        <p:spPr>
+          <a:xfrm>
+            <a:off x="6519672" y="2752344"/>
+            <a:ext cx="1828800" cy="182880"/>
+          </a:xfrm>
+          <a:prstGeom prst="rect">
+            <a:avLst/>
+          </a:prstGeom>
+          <a:noFill/>
+          <a:ln/>
+        </p:spPr>
+        <p:txBody>
+          <a:bodyPr wrap="square" lIns="0" tIns="0" rIns="0" bIns="0" rtlCol="0" anchor="t"/>
+          <a:lstStyle/>
+          <a:p>
+            <a:pPr algn="ctr" indent="0" marL="0">
+              <a:buNone/>
+            </a:pPr>
+            <a:r>
+              <a:rPr lang="en-US" sz="700" i="1" dirty="0">
+                <a:solidFill>
+                  <a:srgbClr val="94A3B8"/>
+                </a:solidFill>
+                <a:latin typeface="Calibri" pitchFamily="34" charset="0"/>
+                <a:ea typeface="Calibri" pitchFamily="34" charset="-122"/>
+                <a:cs typeface="Calibri" pitchFamily="34" charset="-120"/>
+              </a:rPr>
+              <a:t>'e' dropped before vowel suffix</a:t>
+            </a:r>
+            <a:endParaRPr lang="en-US" sz="700" dirty="0"/>
+          </a:p>
+        </p:txBody>
+      </p:sp>
+      <p:sp>
+        <p:nvSpPr>
+          <p:cNvPr id="26" name="Shape 24"/>
           <p:cNvSpPr/>
           <p:nvPr/>
         </p:nvSpPr>
@@ -16382,7 +16499,7 @@
       </p:sp>
       <p:sp>
         <p:nvSpPr>
-          <p:cNvPr id="26" name="Text 24"/>
+          <p:cNvPr id="27" name="Text 25"/>
           <p:cNvSpPr/>
           <p:nvPr/>
         </p:nvSpPr>
@@ -16421,7 +16538,7 @@
       </p:sp>
       <p:sp>
         <p:nvSpPr>
-          <p:cNvPr id="27" name="Shape 25"/>
+          <p:cNvPr id="28" name="Shape 26"/>
           <p:cNvSpPr/>
           <p:nvPr/>
         </p:nvSpPr>
@@ -16448,7 +16565,7 @@
       </p:sp>
       <p:sp>
         <p:nvSpPr>
-          <p:cNvPr id="28" name="Shape 26"/>
+          <p:cNvPr id="29" name="Shape 27"/>
           <p:cNvSpPr/>
           <p:nvPr/>
         </p:nvSpPr>
@@ -16475,7 +16592,7 @@
       </p:sp>
       <p:sp>
         <p:nvSpPr>
-          <p:cNvPr id="29" name="Text 27"/>
+          <p:cNvPr id="30" name="Text 28"/>
           <p:cNvSpPr/>
           <p:nvPr/>
         </p:nvSpPr>
@@ -16514,7 +16631,7 @@
       </p:sp>
       <p:sp>
         <p:nvSpPr>
-          <p:cNvPr id="30" name="Text 28"/>
+          <p:cNvPr id="31" name="Text 29"/>
           <p:cNvSpPr/>
           <p:nvPr/>
         </p:nvSpPr>
@@ -16553,7 +16670,7 @@
       </p:sp>
       <p:sp>
         <p:nvSpPr>
-          <p:cNvPr id="31" name="Shape 29"/>
+          <p:cNvPr id="32" name="Shape 30"/>
           <p:cNvSpPr/>
           <p:nvPr/>
         </p:nvSpPr>
@@ -16580,7 +16697,7 @@
       </p:sp>
       <p:sp>
         <p:nvSpPr>
-          <p:cNvPr id="32" name="Text 30"/>
+          <p:cNvPr id="33" name="Text 31"/>
           <p:cNvSpPr/>
           <p:nvPr/>
         </p:nvSpPr>
@@ -16619,7 +16736,7 @@
       </p:sp>
       <p:sp>
         <p:nvSpPr>
-          <p:cNvPr id="33" name="Text 31"/>
+          <p:cNvPr id="34" name="Text 32"/>
           <p:cNvSpPr/>
           <p:nvPr/>
         </p:nvSpPr>
@@ -16658,7 +16775,7 @@
       </p:sp>
       <p:sp>
         <p:nvSpPr>
-          <p:cNvPr id="34" name="Shape 32"/>
+          <p:cNvPr id="35" name="Shape 33"/>
           <p:cNvSpPr/>
           <p:nvPr/>
         </p:nvSpPr>
@@ -16685,7 +16802,7 @@
       </p:sp>
       <p:sp>
         <p:nvSpPr>
-          <p:cNvPr id="35" name="Text 33"/>
+          <p:cNvPr id="36" name="Text 34"/>
           <p:cNvSpPr/>
           <p:nvPr/>
         </p:nvSpPr>
@@ -16724,7 +16841,7 @@
       </p:sp>
       <p:sp>
         <p:nvSpPr>
-          <p:cNvPr id="36" name="Shape 34"/>
+          <p:cNvPr id="37" name="Shape 35"/>
           <p:cNvSpPr/>
           <p:nvPr/>
         </p:nvSpPr>
@@ -16751,7 +16868,7 @@
       </p:sp>
       <p:sp>
         <p:nvSpPr>
-          <p:cNvPr id="37" name="Text 35"/>
+          <p:cNvPr id="38" name="Text 36"/>
           <p:cNvSpPr/>
           <p:nvPr/>
         </p:nvSpPr>
@@ -16790,7 +16907,7 @@
       </p:sp>
       <p:sp>
         <p:nvSpPr>
-          <p:cNvPr id="38" name="Shape 36"/>
+          <p:cNvPr id="39" name="Shape 37"/>
           <p:cNvSpPr/>
           <p:nvPr/>
         </p:nvSpPr>
@@ -16817,7 +16934,7 @@
       </p:sp>
       <p:sp>
         <p:nvSpPr>
-          <p:cNvPr id="39" name="Shape 37"/>
+          <p:cNvPr id="40" name="Shape 38"/>
           <p:cNvSpPr/>
           <p:nvPr/>
         </p:nvSpPr>
@@ -16844,7 +16961,7 @@
       </p:sp>
       <p:sp>
         <p:nvSpPr>
-          <p:cNvPr id="40" name="Text 38"/>
+          <p:cNvPr id="41" name="Text 39"/>
           <p:cNvSpPr/>
           <p:nvPr/>
         </p:nvSpPr>
@@ -16883,7 +17000,7 @@
       </p:sp>
       <p:sp>
         <p:nvSpPr>
-          <p:cNvPr id="41" name="Shape 39"/>
+          <p:cNvPr id="42" name="Shape 40"/>
           <p:cNvSpPr/>
           <p:nvPr/>
         </p:nvSpPr>
@@ -16910,7 +17027,7 @@
       </p:sp>
       <p:sp>
         <p:nvSpPr>
-          <p:cNvPr id="42" name="Text 40"/>
+          <p:cNvPr id="43" name="Text 41"/>
           <p:cNvSpPr/>
           <p:nvPr/>
         </p:nvSpPr>
@@ -16949,7 +17066,7 @@
       </p:sp>
       <p:sp>
         <p:nvSpPr>
-          <p:cNvPr id="43" name="Shape 41"/>
+          <p:cNvPr id="44" name="Shape 42"/>
           <p:cNvSpPr/>
           <p:nvPr/>
         </p:nvSpPr>
@@ -16976,7 +17093,7 @@
       </p:sp>
       <p:sp>
         <p:nvSpPr>
-          <p:cNvPr id="44" name="Text 42"/>
+          <p:cNvPr id="45" name="Text 43"/>
           <p:cNvSpPr/>
           <p:nvPr/>
         </p:nvSpPr>
@@ -17015,7 +17132,7 @@
       </p:sp>
       <p:sp>
         <p:nvSpPr>
-          <p:cNvPr id="45" name="Text 43"/>
+          <p:cNvPr id="46" name="Text 44"/>
           <p:cNvSpPr/>
           <p:nvPr/>
         </p:nvSpPr>
@@ -17054,7 +17171,7 @@
       </p:sp>
       <p:sp>
         <p:nvSpPr>
-          <p:cNvPr id="46" name="Shape 44"/>
+          <p:cNvPr id="47" name="Shape 45"/>
           <p:cNvSpPr/>
           <p:nvPr/>
         </p:nvSpPr>
@@ -17081,7 +17198,7 @@
       </p:sp>
       <p:sp>
         <p:nvSpPr>
-          <p:cNvPr id="47" name="Text 45"/>
+          <p:cNvPr id="48" name="Text 46"/>
           <p:cNvSpPr/>
           <p:nvPr/>
         </p:nvSpPr>
@@ -17120,7 +17237,7 @@
       </p:sp>
       <p:sp>
         <p:nvSpPr>
-          <p:cNvPr id="48" name="Shape 46"/>
+          <p:cNvPr id="49" name="Shape 47"/>
           <p:cNvSpPr/>
           <p:nvPr/>
         </p:nvSpPr>
@@ -17147,7 +17264,7 @@
       </p:sp>
       <p:sp>
         <p:nvSpPr>
-          <p:cNvPr id="49" name="Text 47"/>
+          <p:cNvPr id="50" name="Text 48"/>
           <p:cNvSpPr/>
           <p:nvPr/>
         </p:nvSpPr>
@@ -17186,7 +17303,7 @@
       </p:sp>
       <p:sp>
         <p:nvSpPr>
-          <p:cNvPr id="50" name="Shape 48"/>
+          <p:cNvPr id="51" name="Shape 49"/>
           <p:cNvSpPr/>
           <p:nvPr/>
         </p:nvSpPr>
@@ -17213,7 +17330,7 @@
       </p:sp>
       <p:sp>
         <p:nvSpPr>
-          <p:cNvPr id="51" name="Text 49"/>
+          <p:cNvPr id="52" name="Text 50"/>
           <p:cNvSpPr/>
           <p:nvPr/>
         </p:nvSpPr>
@@ -17252,7 +17369,7 @@
       </p:sp>
       <p:sp>
         <p:nvSpPr>
-          <p:cNvPr id="52" name="Shape 50"/>
+          <p:cNvPr id="53" name="Shape 51"/>
           <p:cNvSpPr/>
           <p:nvPr/>
         </p:nvSpPr>
@@ -17279,7 +17396,7 @@
       </p:sp>
       <p:sp>
         <p:nvSpPr>
-          <p:cNvPr id="53" name="Text 51"/>
+          <p:cNvPr id="54" name="Text 52"/>
           <p:cNvSpPr/>
           <p:nvPr/>
         </p:nvSpPr>
@@ -17318,7 +17435,7 @@
       </p:sp>
       <p:sp>
         <p:nvSpPr>
-          <p:cNvPr id="54" name="Text 52"/>
+          <p:cNvPr id="55" name="Text 53"/>
           <p:cNvSpPr/>
           <p:nvPr/>
         </p:nvSpPr>
@@ -17357,7 +17474,7 @@
       </p:sp>
       <p:sp>
         <p:nvSpPr>
-          <p:cNvPr id="55" name="Shape 53"/>
+          <p:cNvPr id="56" name="Shape 54"/>
           <p:cNvSpPr/>
           <p:nvPr/>
         </p:nvSpPr>
@@ -17384,7 +17501,7 @@
       </p:sp>
       <p:sp>
         <p:nvSpPr>
-          <p:cNvPr id="56" name="Text 54"/>
+          <p:cNvPr id="57" name="Text 55"/>
           <p:cNvSpPr/>
           <p:nvPr/>
         </p:nvSpPr>
@@ -18323,7 +18440,7 @@
                 <a:ea typeface="Trebuchet MS" pitchFamily="34" charset="-122"/>
                 <a:cs typeface="Trebuchet MS" pitchFamily="34" charset="-120"/>
               </a:rPr>
-              <a:t>1</a:t>
+              <a:t>2</a:t>
             </a:r>
             <a:pPr algn="ctr" indent="0" marL="0">
               <a:buNone/>
@@ -18337,7 +18454,7 @@
                 <a:ea typeface="Trebuchet MS" pitchFamily="34" charset="-122"/>
                 <a:cs typeface="Trebuchet MS" pitchFamily="34" charset="-120"/>
               </a:rPr>
-              <a:t>  punctuation mark</a:t>
+              <a:t>  punctuation marks</a:t>
             </a:r>
             <a:endParaRPr lang="en-US" sz="2800" dirty="0"/>
           </a:p>
@@ -18741,7 +18858,7 @@
                 <a:ea typeface="Calibri" pitchFamily="34" charset="-122"/>
                 <a:cs typeface="Calibri" pitchFamily="34" charset="-120"/>
               </a:rPr>
-              <a:t>Although the coach spoke </a:t>
+              <a:t>The </a:t>
             </a:r>
             <a:pPr algn="l" indent="0" marL="0">
               <a:buNone/>
@@ -18758,7 +18875,7 @@
                 <a:ea typeface="Calibri" pitchFamily="34" charset="-122"/>
                 <a:cs typeface="Calibri" pitchFamily="34" charset="-120"/>
               </a:rPr>
-              <a:t>encouragingly</a:t>
+              <a:t>encouraging</a:t>
             </a:r>
             <a:pPr algn="l" indent="0" marL="0">
               <a:buNone/>
@@ -18772,7 +18889,7 @@
                 <a:ea typeface="Calibri" pitchFamily="34" charset="-122"/>
                 <a:cs typeface="Calibri" pitchFamily="34" charset="-120"/>
               </a:rPr>
-              <a:t>, some players still needed extra </a:t>
+              <a:t> coach spoke </a:t>
             </a:r>
             <a:pPr algn="l" indent="0" marL="0">
               <a:buNone/>
@@ -18789,7 +18906,7 @@
                 <a:ea typeface="Calibri" pitchFamily="34" charset="-122"/>
                 <a:cs typeface="Calibri" pitchFamily="34" charset="-120"/>
               </a:rPr>
-              <a:t>encouragement</a:t>
+              <a:t>encouragingly</a:t>
             </a:r>
             <a:pPr algn="l" indent="0" marL="0">
               <a:buNone/>
@@ -18803,7 +18920,7 @@
                 <a:ea typeface="Calibri" pitchFamily="34" charset="-122"/>
                 <a:cs typeface="Calibri" pitchFamily="34" charset="-120"/>
               </a:rPr>
-              <a:t> to overcome their </a:t>
+              <a:t>, inspiring every </a:t>
             </a:r>
             <a:pPr algn="l" indent="0" marL="0">
               <a:buNone/>
@@ -18820,7 +18937,7 @@
                 <a:ea typeface="Calibri" pitchFamily="34" charset="-122"/>
                 <a:cs typeface="Calibri" pitchFamily="34" charset="-120"/>
               </a:rPr>
-              <a:t>discouragement</a:t>
+              <a:t>encourager</a:t>
             </a:r>
             <a:pPr algn="l" indent="0" marL="0">
               <a:buNone/>
@@ -18834,7 +18951,7 @@
                 <a:ea typeface="Calibri" pitchFamily="34" charset="-122"/>
                 <a:cs typeface="Calibri" pitchFamily="34" charset="-120"/>
               </a:rPr>
-              <a:t>.</a:t>
+              <a:t> in the room.</a:t>
             </a:r>
             <a:endParaRPr lang="en-US" sz="1800" dirty="0"/>
           </a:p>
@@ -18989,7 +19106,7 @@
                 <a:ea typeface="Trebuchet MS" pitchFamily="34" charset="-122"/>
                 <a:cs typeface="Trebuchet MS" pitchFamily="34" charset="-120"/>
               </a:rPr>
-              <a:t>encouragingly</a:t>
+              <a:t>encouraging</a:t>
             </a:r>
             <a:endParaRPr lang="en-US" sz="1400" dirty="0"/>
           </a:p>
@@ -19117,7 +19234,7 @@
                 <a:ea typeface="Trebuchet MS" pitchFamily="34" charset="-122"/>
                 <a:cs typeface="Trebuchet MS" pitchFamily="34" charset="-120"/>
               </a:rPr>
-              <a:t>encouragement</a:t>
+              <a:t>encouragingly</a:t>
             </a:r>
             <a:endParaRPr lang="en-US" sz="1400" dirty="0"/>
           </a:p>
@@ -19245,7 +19362,7 @@
                 <a:ea typeface="Trebuchet MS" pitchFamily="34" charset="-122"/>
                 <a:cs typeface="Trebuchet MS" pitchFamily="34" charset="-120"/>
               </a:rPr>
-              <a:t>discouragement</a:t>
+              <a:t>encourager</a:t>
             </a:r>
             <a:endParaRPr lang="en-US" sz="1400" dirty="0"/>
           </a:p>
@@ -19715,7 +19832,7 @@
                 <a:ea typeface="Trebuchet MS" pitchFamily="34" charset="-122"/>
                 <a:cs typeface="Trebuchet MS" pitchFamily="34" charset="-120"/>
               </a:rPr>
-              <a:t>encouragingly</a:t>
+              <a:t>encouraging</a:t>
             </a:r>
             <a:endParaRPr lang="en-US" sz="2800" dirty="0"/>
           </a:p>
@@ -20542,7 +20659,7 @@
                 <a:ea typeface="Trebuchet MS" pitchFamily="34" charset="-122"/>
                 <a:cs typeface="Trebuchet MS" pitchFamily="34" charset="-120"/>
               </a:rPr>
-              <a:t>encouragingly</a:t>
+              <a:t>encouraging</a:t>
             </a:r>
             <a:endParaRPr lang="en-US" sz="2800" dirty="0"/>
           </a:p>
@@ -20622,8 +20739,8 @@
         </p:nvSpPr>
         <p:spPr>
           <a:xfrm>
-            <a:off x="1989734" y="2258568"/>
-            <a:ext cx="1581912" cy="292608"/>
+            <a:off x="2221992" y="2258568"/>
+            <a:ext cx="1828800" cy="292608"/>
           </a:xfrm>
           <a:prstGeom prst="rect">
             <a:avLst>
@@ -20656,8 +20773,8 @@
         </p:nvSpPr>
         <p:spPr>
           <a:xfrm>
-            <a:off x="1989734" y="2258568"/>
-            <a:ext cx="1581912" cy="292608"/>
+            <a:off x="2221992" y="2258568"/>
+            <a:ext cx="1828800" cy="292608"/>
           </a:xfrm>
           <a:prstGeom prst="rect">
             <a:avLst/>
@@ -20695,8 +20812,8 @@
         </p:nvSpPr>
         <p:spPr>
           <a:xfrm>
-            <a:off x="1989734" y="2569464"/>
-            <a:ext cx="1581912" cy="201168"/>
+            <a:off x="2221992" y="2569464"/>
+            <a:ext cx="1828800" cy="201168"/>
           </a:xfrm>
           <a:prstGeom prst="rect">
             <a:avLst/>
@@ -20734,8 +20851,8 @@
         </p:nvSpPr>
         <p:spPr>
           <a:xfrm>
-            <a:off x="3659429" y="2258568"/>
-            <a:ext cx="1581912" cy="292608"/>
+            <a:off x="4370832" y="2258568"/>
+            <a:ext cx="1828800" cy="292608"/>
           </a:xfrm>
           <a:prstGeom prst="rect">
             <a:avLst>
@@ -20768,8 +20885,8 @@
         </p:nvSpPr>
         <p:spPr>
           <a:xfrm>
-            <a:off x="3659429" y="2258568"/>
-            <a:ext cx="1581912" cy="292608"/>
+            <a:off x="4370832" y="2258568"/>
+            <a:ext cx="1828800" cy="292608"/>
           </a:xfrm>
           <a:prstGeom prst="rect">
             <a:avLst/>
@@ -20807,8 +20924,8 @@
         </p:nvSpPr>
         <p:spPr>
           <a:xfrm>
-            <a:off x="3659429" y="2569464"/>
-            <a:ext cx="1581912" cy="201168"/>
+            <a:off x="4370832" y="2569464"/>
+            <a:ext cx="1828800" cy="201168"/>
           </a:xfrm>
           <a:prstGeom prst="rect">
             <a:avLst/>
@@ -20832,7 +20949,7 @@
                 <a:ea typeface="Calibri" pitchFamily="34" charset="-122"/>
                 <a:cs typeface="Calibri" pitchFamily="34" charset="-120"/>
               </a:rPr>
-              <a:t>bravery from the heart</a:t>
+              <a:t>bravery, heart</a:t>
             </a:r>
             <a:endParaRPr lang="en-US" sz="850" dirty="0"/>
           </a:p>
@@ -20846,8 +20963,8 @@
         </p:nvSpPr>
         <p:spPr>
           <a:xfrm>
-            <a:off x="5329123" y="2258568"/>
-            <a:ext cx="1581912" cy="292608"/>
+            <a:off x="6519672" y="2258568"/>
+            <a:ext cx="1828800" cy="292608"/>
           </a:xfrm>
           <a:prstGeom prst="rect">
             <a:avLst>
@@ -20880,8 +20997,8 @@
         </p:nvSpPr>
         <p:spPr>
           <a:xfrm>
-            <a:off x="5329123" y="2258568"/>
-            <a:ext cx="1581912" cy="292608"/>
+            <a:off x="6519672" y="2258568"/>
+            <a:ext cx="1828800" cy="292608"/>
           </a:xfrm>
           <a:prstGeom prst="rect">
             <a:avLst/>
@@ -20919,8 +21036,8 @@
         </p:nvSpPr>
         <p:spPr>
           <a:xfrm>
-            <a:off x="5329123" y="2569464"/>
-            <a:ext cx="1581912" cy="201168"/>
+            <a:off x="6519672" y="2569464"/>
+            <a:ext cx="1828800" cy="201168"/>
           </a:xfrm>
           <a:prstGeom prst="rect">
             <a:avLst/>
@@ -20944,7 +21061,7 @@
                 <a:ea typeface="Calibri" pitchFamily="34" charset="-122"/>
                 <a:cs typeface="Calibri" pitchFamily="34" charset="-120"/>
               </a:rPr>
-              <a:t>in the process of</a:t>
+              <a:t>happening now (present participle)</a:t>
             </a:r>
             <a:endParaRPr lang="en-US" sz="850" dirty="0"/>
           </a:p>
@@ -20952,130 +21069,189 @@
       </p:sp>
       <p:sp>
         <p:nvSpPr>
-          <p:cNvPr id="25" name="Shape 23"/>
-          <p:cNvSpPr/>
-          <p:nvPr/>
-        </p:nvSpPr>
-        <p:spPr>
-          <a:xfrm>
-            <a:off x="6998818" y="2258568"/>
-            <a:ext cx="1581912" cy="292608"/>
+          <p:cNvPr id="25" name="Text 23"/>
+          <p:cNvSpPr/>
+          <p:nvPr/>
+        </p:nvSpPr>
+        <p:spPr>
+          <a:xfrm>
+            <a:off x="6519672" y="2752344"/>
+            <a:ext cx="1828800" cy="182880"/>
+          </a:xfrm>
+          <a:prstGeom prst="rect">
+            <a:avLst/>
+          </a:prstGeom>
+          <a:noFill/>
+          <a:ln/>
+        </p:spPr>
+        <p:txBody>
+          <a:bodyPr wrap="square" lIns="0" tIns="0" rIns="0" bIns="0" rtlCol="0" anchor="t"/>
+          <a:lstStyle/>
+          <a:p>
+            <a:pPr algn="ctr" indent="0" marL="0">
+              <a:buNone/>
+            </a:pPr>
+            <a:r>
+              <a:rPr lang="en-US" sz="700" i="1" dirty="0">
+                <a:solidFill>
+                  <a:srgbClr val="94A3B8"/>
+                </a:solidFill>
+                <a:latin typeface="Calibri" pitchFamily="34" charset="0"/>
+                <a:ea typeface="Calibri" pitchFamily="34" charset="-122"/>
+                <a:cs typeface="Calibri" pitchFamily="34" charset="-120"/>
+              </a:rPr>
+              <a:t>'e' dropped before vowel suffix</a:t>
+            </a:r>
+            <a:endParaRPr lang="en-US" sz="700" dirty="0"/>
+          </a:p>
+        </p:txBody>
+      </p:sp>
+      <p:sp>
+        <p:nvSpPr>
+          <p:cNvPr id="26" name="Shape 24"/>
+          <p:cNvSpPr/>
+          <p:nvPr/>
+        </p:nvSpPr>
+        <p:spPr>
+          <a:xfrm>
+            <a:off x="365760" y="3273552"/>
+            <a:ext cx="1371600" cy="658368"/>
           </a:xfrm>
           <a:prstGeom prst="rect">
             <a:avLst>
-              <a:gd name="adj" fmla="val 25000"/>
+              <a:gd name="adj" fmla="val 8333"/>
             </a:avLst>
           </a:prstGeom>
           <a:solidFill>
-            <a:srgbClr val="FCE7F3"/>
-          </a:solidFill>
-          <a:ln w="19050">
-            <a:solidFill>
-              <a:srgbClr val="DB2777"/>
-            </a:solidFill>
-            <a:prstDash val="solid"/>
-          </a:ln>
-          <a:effectLst>
-            <a:outerShdw sx="100000" sy="100000" kx="0" ky="0" algn="bl" rotWithShape="0" blurRad="101600" dist="38100" dir="8100000">
-              <a:srgbClr val="000000">
-                <a:alpha val="12000"/>
-              </a:srgbClr>
-            </a:outerShdw>
-          </a:effectLst>
-        </p:spPr>
-      </p:sp>
-      <p:sp>
-        <p:nvSpPr>
-          <p:cNvPr id="26" name="Text 24"/>
-          <p:cNvSpPr/>
-          <p:nvPr/>
-        </p:nvSpPr>
-        <p:spPr>
-          <a:xfrm>
-            <a:off x="6998818" y="2258568"/>
-            <a:ext cx="1581912" cy="292608"/>
-          </a:xfrm>
-          <a:prstGeom prst="rect">
-            <a:avLst/>
-          </a:prstGeom>
-          <a:noFill/>
-          <a:ln/>
-        </p:spPr>
-        <p:txBody>
-          <a:bodyPr wrap="square" lIns="0" tIns="0" rIns="0" bIns="0" rtlCol="0" anchor="ctr"/>
-          <a:lstStyle/>
-          <a:p>
-            <a:pPr algn="ctr" indent="0" marL="0">
-              <a:buNone/>
-            </a:pPr>
-            <a:r>
-              <a:rPr lang="en-US" sz="1300" b="1" dirty="0">
-                <a:solidFill>
-                  <a:srgbClr val="9D174D"/>
+            <a:srgbClr val="E2E8F0"/>
+          </a:solidFill>
+          <a:ln w="12700">
+            <a:solidFill>
+              <a:srgbClr val="E2E8F0"/>
+            </a:solidFill>
+            <a:prstDash val="solid"/>
+          </a:ln>
+        </p:spPr>
+      </p:sp>
+      <p:sp>
+        <p:nvSpPr>
+          <p:cNvPr id="27" name="Text 25"/>
+          <p:cNvSpPr/>
+          <p:nvPr/>
+        </p:nvSpPr>
+        <p:spPr>
+          <a:xfrm>
+            <a:off x="365760" y="3273552"/>
+            <a:ext cx="1371600" cy="658368"/>
+          </a:xfrm>
+          <a:prstGeom prst="rect">
+            <a:avLst/>
+          </a:prstGeom>
+          <a:noFill/>
+          <a:ln/>
+        </p:spPr>
+        <p:txBody>
+          <a:bodyPr wrap="square" lIns="0" tIns="0" rIns="0" bIns="0" rtlCol="0" anchor="ctr"/>
+          <a:lstStyle/>
+          <a:p>
+            <a:pPr algn="ctr" indent="0" marL="0">
+              <a:buNone/>
+            </a:pPr>
+            <a:r>
+              <a:rPr lang="en-US" sz="1100" b="1" dirty="0">
+                <a:solidFill>
+                  <a:srgbClr val="475569"/>
                 </a:solidFill>
                 <a:latin typeface="Trebuchet MS" pitchFamily="34" charset="0"/>
                 <a:ea typeface="Trebuchet MS" pitchFamily="34" charset="-122"/>
                 <a:cs typeface="Trebuchet MS" pitchFamily="34" charset="-120"/>
               </a:rPr>
-              <a:t>ly</a:t>
-            </a:r>
-            <a:endParaRPr lang="en-US" sz="1300" dirty="0"/>
-          </a:p>
-        </p:txBody>
-      </p:sp>
-      <p:sp>
-        <p:nvSpPr>
-          <p:cNvPr id="27" name="Text 25"/>
-          <p:cNvSpPr/>
-          <p:nvPr/>
-        </p:nvSpPr>
-        <p:spPr>
-          <a:xfrm>
-            <a:off x="6998818" y="2569464"/>
-            <a:ext cx="1581912" cy="201168"/>
-          </a:xfrm>
-          <a:prstGeom prst="rect">
-            <a:avLst/>
-          </a:prstGeom>
-          <a:noFill/>
-          <a:ln/>
-        </p:spPr>
-        <p:txBody>
-          <a:bodyPr wrap="square" lIns="0" tIns="0" rIns="0" bIns="0" rtlCol="0" anchor="t"/>
-          <a:lstStyle/>
-          <a:p>
-            <a:pPr algn="ctr" indent="0" marL="0">
-              <a:buNone/>
-            </a:pPr>
-            <a:r>
-              <a:rPr lang="en-US" sz="850" dirty="0">
-                <a:solidFill>
-                  <a:srgbClr val="475569"/>
+              <a:t>Syllables</a:t>
+            </a:r>
+            <a:endParaRPr lang="en-US" sz="1100" dirty="0"/>
+          </a:p>
+        </p:txBody>
+      </p:sp>
+      <p:sp>
+        <p:nvSpPr>
+          <p:cNvPr id="28" name="Shape 26"/>
+          <p:cNvSpPr/>
+          <p:nvPr/>
+        </p:nvSpPr>
+        <p:spPr>
+          <a:xfrm>
+            <a:off x="1874520" y="3273552"/>
+            <a:ext cx="6903720" cy="658368"/>
+          </a:xfrm>
+          <a:prstGeom prst="rect">
+            <a:avLst>
+              <a:gd name="adj" fmla="val 8333"/>
+            </a:avLst>
+          </a:prstGeom>
+          <a:solidFill>
+            <a:srgbClr val="F8FAFC"/>
+          </a:solidFill>
+          <a:ln w="12700">
+            <a:solidFill>
+              <a:srgbClr val="E2E8F0"/>
+            </a:solidFill>
+            <a:prstDash val="dash"/>
+          </a:ln>
+        </p:spPr>
+      </p:sp>
+      <p:sp>
+        <p:nvSpPr>
+          <p:cNvPr id="29" name="Text 27"/>
+          <p:cNvSpPr/>
+          <p:nvPr/>
+        </p:nvSpPr>
+        <p:spPr>
+          <a:xfrm>
+            <a:off x="1874520" y="3273552"/>
+            <a:ext cx="6903720" cy="658368"/>
+          </a:xfrm>
+          <a:prstGeom prst="rect">
+            <a:avLst/>
+          </a:prstGeom>
+          <a:noFill/>
+          <a:ln/>
+        </p:spPr>
+        <p:txBody>
+          <a:bodyPr wrap="square" rtlCol="0" anchor="ctr"/>
+          <a:lstStyle/>
+          <a:p>
+            <a:pPr algn="ctr" indent="0" marL="0">
+              <a:buNone/>
+            </a:pPr>
+            <a:r>
+              <a:rPr lang="en-US" sz="1100" i="1" dirty="0">
+                <a:solidFill>
+                  <a:srgbClr val="CBD5E1"/>
                 </a:solidFill>
                 <a:latin typeface="Calibri" pitchFamily="34" charset="0"/>
                 <a:ea typeface="Calibri" pitchFamily="34" charset="-122"/>
                 <a:cs typeface="Calibri" pitchFamily="34" charset="-120"/>
               </a:rPr>
-              <a:t>in that way</a:t>
-            </a:r>
-            <a:endParaRPr lang="en-US" sz="850" dirty="0"/>
-          </a:p>
-        </p:txBody>
-      </p:sp>
-      <p:sp>
-        <p:nvSpPr>
-          <p:cNvPr id="28" name="Shape 26"/>
-          <p:cNvSpPr/>
-          <p:nvPr/>
-        </p:nvSpPr>
-        <p:spPr>
-          <a:xfrm>
-            <a:off x="365760" y="3273552"/>
-            <a:ext cx="1371600" cy="658368"/>
+              <a:t>Write here...</a:t>
+            </a:r>
+            <a:endParaRPr lang="en-US" sz="1100" dirty="0"/>
+          </a:p>
+        </p:txBody>
+      </p:sp>
+      <p:sp>
+        <p:nvSpPr>
+          <p:cNvPr id="30" name="Shape 28"/>
+          <p:cNvSpPr/>
+          <p:nvPr/>
+        </p:nvSpPr>
+        <p:spPr>
+          <a:xfrm>
+            <a:off x="365760" y="4096512"/>
+            <a:ext cx="1371600" cy="804672"/>
           </a:xfrm>
           <a:prstGeom prst="rect">
             <a:avLst>
-              <a:gd name="adj" fmla="val 8333"/>
+              <a:gd name="adj" fmla="val 6818"/>
             </a:avLst>
           </a:prstGeom>
           <a:solidFill>
@@ -21091,14 +21267,14 @@
       </p:sp>
       <p:sp>
         <p:nvSpPr>
-          <p:cNvPr id="29" name="Text 27"/>
-          <p:cNvSpPr/>
-          <p:nvPr/>
-        </p:nvSpPr>
-        <p:spPr>
-          <a:xfrm>
-            <a:off x="365760" y="3273552"/>
-            <a:ext cx="1371600" cy="658368"/>
+          <p:cNvPr id="31" name="Text 29"/>
+          <p:cNvSpPr/>
+          <p:nvPr/>
+        </p:nvSpPr>
+        <p:spPr>
+          <a:xfrm>
+            <a:off x="365760" y="4096512"/>
+            <a:ext cx="1371600" cy="804672"/>
           </a:xfrm>
           <a:prstGeom prst="rect">
             <a:avLst/>
@@ -21122,7 +21298,7 @@
                 <a:ea typeface="Trebuchet MS" pitchFamily="34" charset="-122"/>
                 <a:cs typeface="Trebuchet MS" pitchFamily="34" charset="-120"/>
               </a:rPr>
-              <a:t>Syllables</a:t>
+              <a:t>Phonemes</a:t>
             </a:r>
             <a:endParaRPr lang="en-US" sz="1100" dirty="0"/>
           </a:p>
@@ -21130,80 +21306,14 @@
       </p:sp>
       <p:sp>
         <p:nvSpPr>
-          <p:cNvPr id="30" name="Shape 28"/>
-          <p:cNvSpPr/>
-          <p:nvPr/>
-        </p:nvSpPr>
-        <p:spPr>
-          <a:xfrm>
-            <a:off x="1874520" y="3273552"/>
-            <a:ext cx="6903720" cy="658368"/>
-          </a:xfrm>
-          <a:prstGeom prst="rect">
-            <a:avLst>
-              <a:gd name="adj" fmla="val 8333"/>
-            </a:avLst>
-          </a:prstGeom>
-          <a:solidFill>
-            <a:srgbClr val="F8FAFC"/>
-          </a:solidFill>
-          <a:ln w="12700">
-            <a:solidFill>
-              <a:srgbClr val="E2E8F0"/>
-            </a:solidFill>
-            <a:prstDash val="dash"/>
-          </a:ln>
-        </p:spPr>
-      </p:sp>
-      <p:sp>
-        <p:nvSpPr>
-          <p:cNvPr id="31" name="Text 29"/>
-          <p:cNvSpPr/>
-          <p:nvPr/>
-        </p:nvSpPr>
-        <p:spPr>
-          <a:xfrm>
-            <a:off x="1874520" y="3273552"/>
-            <a:ext cx="6903720" cy="658368"/>
-          </a:xfrm>
-          <a:prstGeom prst="rect">
-            <a:avLst/>
-          </a:prstGeom>
-          <a:noFill/>
-          <a:ln/>
-        </p:spPr>
-        <p:txBody>
-          <a:bodyPr wrap="square" rtlCol="0" anchor="ctr"/>
-          <a:lstStyle/>
-          <a:p>
-            <a:pPr algn="ctr" indent="0" marL="0">
-              <a:buNone/>
-            </a:pPr>
-            <a:r>
-              <a:rPr lang="en-US" sz="1100" i="1" dirty="0">
-                <a:solidFill>
-                  <a:srgbClr val="CBD5E1"/>
-                </a:solidFill>
-                <a:latin typeface="Calibri" pitchFamily="34" charset="0"/>
-                <a:ea typeface="Calibri" pitchFamily="34" charset="-122"/>
-                <a:cs typeface="Calibri" pitchFamily="34" charset="-120"/>
-              </a:rPr>
-              <a:t>Write here...</a:t>
-            </a:r>
-            <a:endParaRPr lang="en-US" sz="1100" dirty="0"/>
-          </a:p>
-        </p:txBody>
-      </p:sp>
-      <p:sp>
-        <p:nvSpPr>
           <p:cNvPr id="32" name="Shape 30"/>
           <p:cNvSpPr/>
           <p:nvPr/>
         </p:nvSpPr>
         <p:spPr>
           <a:xfrm>
-            <a:off x="365760" y="4096512"/>
-            <a:ext cx="1371600" cy="804672"/>
+            <a:off x="1874520" y="4096512"/>
+            <a:ext cx="6903720" cy="804672"/>
           </a:xfrm>
           <a:prstGeom prst="rect">
             <a:avLst>
@@ -21211,85 +21321,19 @@
             </a:avLst>
           </a:prstGeom>
           <a:solidFill>
-            <a:srgbClr val="E2E8F0"/>
+            <a:srgbClr val="F8FAFC"/>
           </a:solidFill>
           <a:ln w="12700">
             <a:solidFill>
               <a:srgbClr val="E2E8F0"/>
             </a:solidFill>
-            <a:prstDash val="solid"/>
+            <a:prstDash val="dash"/>
           </a:ln>
         </p:spPr>
       </p:sp>
       <p:sp>
         <p:nvSpPr>
           <p:cNvPr id="33" name="Text 31"/>
-          <p:cNvSpPr/>
-          <p:nvPr/>
-        </p:nvSpPr>
-        <p:spPr>
-          <a:xfrm>
-            <a:off x="365760" y="4096512"/>
-            <a:ext cx="1371600" cy="804672"/>
-          </a:xfrm>
-          <a:prstGeom prst="rect">
-            <a:avLst/>
-          </a:prstGeom>
-          <a:noFill/>
-          <a:ln/>
-        </p:spPr>
-        <p:txBody>
-          <a:bodyPr wrap="square" lIns="0" tIns="0" rIns="0" bIns="0" rtlCol="0" anchor="ctr"/>
-          <a:lstStyle/>
-          <a:p>
-            <a:pPr algn="ctr" indent="0" marL="0">
-              <a:buNone/>
-            </a:pPr>
-            <a:r>
-              <a:rPr lang="en-US" sz="1100" b="1" dirty="0">
-                <a:solidFill>
-                  <a:srgbClr val="475569"/>
-                </a:solidFill>
-                <a:latin typeface="Trebuchet MS" pitchFamily="34" charset="0"/>
-                <a:ea typeface="Trebuchet MS" pitchFamily="34" charset="-122"/>
-                <a:cs typeface="Trebuchet MS" pitchFamily="34" charset="-120"/>
-              </a:rPr>
-              <a:t>Phonemes</a:t>
-            </a:r>
-            <a:endParaRPr lang="en-US" sz="1100" dirty="0"/>
-          </a:p>
-        </p:txBody>
-      </p:sp>
-      <p:sp>
-        <p:nvSpPr>
-          <p:cNvPr id="34" name="Shape 32"/>
-          <p:cNvSpPr/>
-          <p:nvPr/>
-        </p:nvSpPr>
-        <p:spPr>
-          <a:xfrm>
-            <a:off x="1874520" y="4096512"/>
-            <a:ext cx="6903720" cy="804672"/>
-          </a:xfrm>
-          <a:prstGeom prst="rect">
-            <a:avLst>
-              <a:gd name="adj" fmla="val 6818"/>
-            </a:avLst>
-          </a:prstGeom>
-          <a:solidFill>
-            <a:srgbClr val="F8FAFC"/>
-          </a:solidFill>
-          <a:ln w="12700">
-            <a:solidFill>
-              <a:srgbClr val="E2E8F0"/>
-            </a:solidFill>
-            <a:prstDash val="dash"/>
-          </a:ln>
-        </p:spPr>
-      </p:sp>
-      <p:sp>
-        <p:nvSpPr>
-          <p:cNvPr id="35" name="Text 33"/>
           <p:cNvSpPr/>
           <p:nvPr/>
         </p:nvSpPr>
@@ -21751,7 +21795,7 @@
                 <a:ea typeface="Trebuchet MS" pitchFamily="34" charset="-122"/>
                 <a:cs typeface="Trebuchet MS" pitchFamily="34" charset="-120"/>
               </a:rPr>
-              <a:t>encouragingly</a:t>
+              <a:t>encouraging</a:t>
             </a:r>
             <a:endParaRPr lang="en-US" sz="2800" dirty="0"/>
           </a:p>
@@ -21831,8 +21875,8 @@
         </p:nvSpPr>
         <p:spPr>
           <a:xfrm>
-            <a:off x="1989734" y="2258568"/>
-            <a:ext cx="1581912" cy="292608"/>
+            <a:off x="2221992" y="2258568"/>
+            <a:ext cx="1828800" cy="292608"/>
           </a:xfrm>
           <a:prstGeom prst="rect">
             <a:avLst>
@@ -21865,8 +21909,8 @@
         </p:nvSpPr>
         <p:spPr>
           <a:xfrm>
-            <a:off x="1989734" y="2258568"/>
-            <a:ext cx="1581912" cy="292608"/>
+            <a:off x="2221992" y="2258568"/>
+            <a:ext cx="1828800" cy="292608"/>
           </a:xfrm>
           <a:prstGeom prst="rect">
             <a:avLst/>
@@ -21904,8 +21948,8 @@
         </p:nvSpPr>
         <p:spPr>
           <a:xfrm>
-            <a:off x="1989734" y="2569464"/>
-            <a:ext cx="1581912" cy="201168"/>
+            <a:off x="2221992" y="2569464"/>
+            <a:ext cx="1828800" cy="201168"/>
           </a:xfrm>
           <a:prstGeom prst="rect">
             <a:avLst/>
@@ -21943,8 +21987,8 @@
         </p:nvSpPr>
         <p:spPr>
           <a:xfrm>
-            <a:off x="3659429" y="2258568"/>
-            <a:ext cx="1581912" cy="292608"/>
+            <a:off x="4370832" y="2258568"/>
+            <a:ext cx="1828800" cy="292608"/>
           </a:xfrm>
           <a:prstGeom prst="rect">
             <a:avLst>
@@ -21977,8 +22021,8 @@
         </p:nvSpPr>
         <p:spPr>
           <a:xfrm>
-            <a:off x="3659429" y="2258568"/>
-            <a:ext cx="1581912" cy="292608"/>
+            <a:off x="4370832" y="2258568"/>
+            <a:ext cx="1828800" cy="292608"/>
           </a:xfrm>
           <a:prstGeom prst="rect">
             <a:avLst/>
@@ -22016,8 +22060,8 @@
         </p:nvSpPr>
         <p:spPr>
           <a:xfrm>
-            <a:off x="3659429" y="2569464"/>
-            <a:ext cx="1581912" cy="201168"/>
+            <a:off x="4370832" y="2569464"/>
+            <a:ext cx="1828800" cy="201168"/>
           </a:xfrm>
           <a:prstGeom prst="rect">
             <a:avLst/>
@@ -22041,7 +22085,7 @@
                 <a:ea typeface="Calibri" pitchFamily="34" charset="-122"/>
                 <a:cs typeface="Calibri" pitchFamily="34" charset="-120"/>
               </a:rPr>
-              <a:t>bravery from the heart</a:t>
+              <a:t>bravery, heart</a:t>
             </a:r>
             <a:endParaRPr lang="en-US" sz="850" dirty="0"/>
           </a:p>
@@ -22055,8 +22099,8 @@
         </p:nvSpPr>
         <p:spPr>
           <a:xfrm>
-            <a:off x="5329123" y="2258568"/>
-            <a:ext cx="1581912" cy="292608"/>
+            <a:off x="6519672" y="2258568"/>
+            <a:ext cx="1828800" cy="292608"/>
           </a:xfrm>
           <a:prstGeom prst="rect">
             <a:avLst>
@@ -22089,8 +22133,8 @@
         </p:nvSpPr>
         <p:spPr>
           <a:xfrm>
-            <a:off x="5329123" y="2258568"/>
-            <a:ext cx="1581912" cy="292608"/>
+            <a:off x="6519672" y="2258568"/>
+            <a:ext cx="1828800" cy="292608"/>
           </a:xfrm>
           <a:prstGeom prst="rect">
             <a:avLst/>
@@ -22128,8 +22172,8 @@
         </p:nvSpPr>
         <p:spPr>
           <a:xfrm>
-            <a:off x="5329123" y="2569464"/>
-            <a:ext cx="1581912" cy="201168"/>
+            <a:off x="6519672" y="2569464"/>
+            <a:ext cx="1828800" cy="201168"/>
           </a:xfrm>
           <a:prstGeom prst="rect">
             <a:avLst/>
@@ -22153,7 +22197,7 @@
                 <a:ea typeface="Calibri" pitchFamily="34" charset="-122"/>
                 <a:cs typeface="Calibri" pitchFamily="34" charset="-120"/>
               </a:rPr>
-              <a:t>in the process of</a:t>
+              <a:t>happening now (present participle)</a:t>
             </a:r>
             <a:endParaRPr lang="en-US" sz="850" dirty="0"/>
           </a:p>
@@ -22161,113 +22205,106 @@
       </p:sp>
       <p:sp>
         <p:nvSpPr>
-          <p:cNvPr id="25" name="Shape 23"/>
-          <p:cNvSpPr/>
-          <p:nvPr/>
-        </p:nvSpPr>
-        <p:spPr>
-          <a:xfrm>
-            <a:off x="6998818" y="2258568"/>
-            <a:ext cx="1581912" cy="292608"/>
+          <p:cNvPr id="25" name="Text 23"/>
+          <p:cNvSpPr/>
+          <p:nvPr/>
+        </p:nvSpPr>
+        <p:spPr>
+          <a:xfrm>
+            <a:off x="6519672" y="2752344"/>
+            <a:ext cx="1828800" cy="182880"/>
+          </a:xfrm>
+          <a:prstGeom prst="rect">
+            <a:avLst/>
+          </a:prstGeom>
+          <a:noFill/>
+          <a:ln/>
+        </p:spPr>
+        <p:txBody>
+          <a:bodyPr wrap="square" lIns="0" tIns="0" rIns="0" bIns="0" rtlCol="0" anchor="t"/>
+          <a:lstStyle/>
+          <a:p>
+            <a:pPr algn="ctr" indent="0" marL="0">
+              <a:buNone/>
+            </a:pPr>
+            <a:r>
+              <a:rPr lang="en-US" sz="700" i="1" dirty="0">
+                <a:solidFill>
+                  <a:srgbClr val="94A3B8"/>
+                </a:solidFill>
+                <a:latin typeface="Calibri" pitchFamily="34" charset="0"/>
+                <a:ea typeface="Calibri" pitchFamily="34" charset="-122"/>
+                <a:cs typeface="Calibri" pitchFamily="34" charset="-120"/>
+              </a:rPr>
+              <a:t>'e' dropped before vowel suffix</a:t>
+            </a:r>
+            <a:endParaRPr lang="en-US" sz="700" dirty="0"/>
+          </a:p>
+        </p:txBody>
+      </p:sp>
+      <p:sp>
+        <p:nvSpPr>
+          <p:cNvPr id="26" name="Shape 24"/>
+          <p:cNvSpPr/>
+          <p:nvPr/>
+        </p:nvSpPr>
+        <p:spPr>
+          <a:xfrm>
+            <a:off x="365760" y="3273552"/>
+            <a:ext cx="1371600" cy="658368"/>
           </a:xfrm>
           <a:prstGeom prst="rect">
             <a:avLst>
-              <a:gd name="adj" fmla="val 25000"/>
+              <a:gd name="adj" fmla="val 8333"/>
             </a:avLst>
           </a:prstGeom>
           <a:solidFill>
-            <a:srgbClr val="FCE7F3"/>
-          </a:solidFill>
-          <a:ln w="19050">
-            <a:solidFill>
-              <a:srgbClr val="DB2777"/>
-            </a:solidFill>
-            <a:prstDash val="solid"/>
-          </a:ln>
-          <a:effectLst>
-            <a:outerShdw sx="100000" sy="100000" kx="0" ky="0" algn="bl" rotWithShape="0" blurRad="101600" dist="38100" dir="8100000">
-              <a:srgbClr val="000000">
-                <a:alpha val="12000"/>
-              </a:srgbClr>
-            </a:outerShdw>
-          </a:effectLst>
-        </p:spPr>
-      </p:sp>
-      <p:sp>
-        <p:nvSpPr>
-          <p:cNvPr id="26" name="Text 24"/>
-          <p:cNvSpPr/>
-          <p:nvPr/>
-        </p:nvSpPr>
-        <p:spPr>
-          <a:xfrm>
-            <a:off x="6998818" y="2258568"/>
-            <a:ext cx="1581912" cy="292608"/>
-          </a:xfrm>
-          <a:prstGeom prst="rect">
-            <a:avLst/>
-          </a:prstGeom>
-          <a:noFill/>
-          <a:ln/>
-        </p:spPr>
-        <p:txBody>
-          <a:bodyPr wrap="square" lIns="0" tIns="0" rIns="0" bIns="0" rtlCol="0" anchor="ctr"/>
-          <a:lstStyle/>
-          <a:p>
-            <a:pPr algn="ctr" indent="0" marL="0">
-              <a:buNone/>
-            </a:pPr>
-            <a:r>
-              <a:rPr lang="en-US" sz="1300" b="1" dirty="0">
-                <a:solidFill>
-                  <a:srgbClr val="9D174D"/>
+            <a:srgbClr val="E2E8F0"/>
+          </a:solidFill>
+          <a:ln w="12700">
+            <a:solidFill>
+              <a:srgbClr val="E2E8F0"/>
+            </a:solidFill>
+            <a:prstDash val="solid"/>
+          </a:ln>
+        </p:spPr>
+      </p:sp>
+      <p:sp>
+        <p:nvSpPr>
+          <p:cNvPr id="27" name="Text 25"/>
+          <p:cNvSpPr/>
+          <p:nvPr/>
+        </p:nvSpPr>
+        <p:spPr>
+          <a:xfrm>
+            <a:off x="365760" y="3273552"/>
+            <a:ext cx="1371600" cy="658368"/>
+          </a:xfrm>
+          <a:prstGeom prst="rect">
+            <a:avLst/>
+          </a:prstGeom>
+          <a:noFill/>
+          <a:ln/>
+        </p:spPr>
+        <p:txBody>
+          <a:bodyPr wrap="square" lIns="0" tIns="0" rIns="0" bIns="0" rtlCol="0" anchor="ctr"/>
+          <a:lstStyle/>
+          <a:p>
+            <a:pPr algn="ctr" indent="0" marL="0">
+              <a:buNone/>
+            </a:pPr>
+            <a:r>
+              <a:rPr lang="en-US" sz="1100" b="1" dirty="0">
+                <a:solidFill>
+                  <a:srgbClr val="475569"/>
                 </a:solidFill>
                 <a:latin typeface="Trebuchet MS" pitchFamily="34" charset="0"/>
                 <a:ea typeface="Trebuchet MS" pitchFamily="34" charset="-122"/>
                 <a:cs typeface="Trebuchet MS" pitchFamily="34" charset="-120"/>
               </a:rPr>
-              <a:t>ly</a:t>
-            </a:r>
-            <a:endParaRPr lang="en-US" sz="1300" dirty="0"/>
-          </a:p>
-        </p:txBody>
-      </p:sp>
-      <p:sp>
-        <p:nvSpPr>
-          <p:cNvPr id="27" name="Text 25"/>
-          <p:cNvSpPr/>
-          <p:nvPr/>
-        </p:nvSpPr>
-        <p:spPr>
-          <a:xfrm>
-            <a:off x="6998818" y="2569464"/>
-            <a:ext cx="1581912" cy="201168"/>
-          </a:xfrm>
-          <a:prstGeom prst="rect">
-            <a:avLst/>
-          </a:prstGeom>
-          <a:noFill/>
-          <a:ln/>
-        </p:spPr>
-        <p:txBody>
-          <a:bodyPr wrap="square" lIns="0" tIns="0" rIns="0" bIns="0" rtlCol="0" anchor="t"/>
-          <a:lstStyle/>
-          <a:p>
-            <a:pPr algn="ctr" indent="0" marL="0">
-              <a:buNone/>
-            </a:pPr>
-            <a:r>
-              <a:rPr lang="en-US" sz="850" dirty="0">
-                <a:solidFill>
-                  <a:srgbClr val="475569"/>
-                </a:solidFill>
-                <a:latin typeface="Calibri" pitchFamily="34" charset="0"/>
-                <a:ea typeface="Calibri" pitchFamily="34" charset="-122"/>
-                <a:cs typeface="Calibri" pitchFamily="34" charset="-120"/>
-              </a:rPr>
-              <a:t>in that way</a:t>
-            </a:r>
-            <a:endParaRPr lang="en-US" sz="850" dirty="0"/>
+              <a:t>Syllables</a:t>
+            </a:r>
+            <a:endParaRPr lang="en-US" sz="1100" dirty="0"/>
           </a:p>
         </p:txBody>
       </p:sp>
@@ -22279,8 +22316,8 @@
         </p:nvSpPr>
         <p:spPr>
           <a:xfrm>
-            <a:off x="365760" y="3273552"/>
-            <a:ext cx="1371600" cy="658368"/>
+            <a:off x="1874520" y="3273552"/>
+            <a:ext cx="6903720" cy="658368"/>
           </a:xfrm>
           <a:prstGeom prst="rect">
             <a:avLst>
@@ -22288,92 +22325,131 @@
             </a:avLst>
           </a:prstGeom>
           <a:solidFill>
-            <a:srgbClr val="E2E8F0"/>
-          </a:solidFill>
-          <a:ln w="12700">
-            <a:solidFill>
-              <a:srgbClr val="E2E8F0"/>
-            </a:solidFill>
-            <a:prstDash val="solid"/>
-          </a:ln>
-        </p:spPr>
-      </p:sp>
-      <p:sp>
-        <p:nvSpPr>
-          <p:cNvPr id="29" name="Text 27"/>
-          <p:cNvSpPr/>
-          <p:nvPr/>
-        </p:nvSpPr>
-        <p:spPr>
-          <a:xfrm>
-            <a:off x="365760" y="3273552"/>
-            <a:ext cx="1371600" cy="658368"/>
-          </a:xfrm>
-          <a:prstGeom prst="rect">
-            <a:avLst/>
-          </a:prstGeom>
-          <a:noFill/>
-          <a:ln/>
-        </p:spPr>
-        <p:txBody>
-          <a:bodyPr wrap="square" lIns="0" tIns="0" rIns="0" bIns="0" rtlCol="0" anchor="ctr"/>
-          <a:lstStyle/>
-          <a:p>
-            <a:pPr algn="ctr" indent="0" marL="0">
-              <a:buNone/>
-            </a:pPr>
-            <a:r>
-              <a:rPr lang="en-US" sz="1100" b="1" dirty="0">
-                <a:solidFill>
-                  <a:srgbClr val="475569"/>
+            <a:srgbClr val="CCFBF1"/>
+          </a:solidFill>
+          <a:ln w="12700">
+            <a:solidFill>
+              <a:srgbClr val="0D9488"/>
+            </a:solidFill>
+            <a:prstDash val="solid"/>
+          </a:ln>
+        </p:spPr>
+      </p:sp>
+      <p:sp>
+        <p:nvSpPr>
+          <p:cNvPr id="29" name="Shape 27"/>
+          <p:cNvSpPr/>
+          <p:nvPr/>
+        </p:nvSpPr>
+        <p:spPr>
+          <a:xfrm>
+            <a:off x="1975104" y="3364992"/>
+            <a:ext cx="1554480" cy="475488"/>
+          </a:xfrm>
+          <a:prstGeom prst="rect">
+            <a:avLst>
+              <a:gd name="adj" fmla="val 9615"/>
+            </a:avLst>
+          </a:prstGeom>
+          <a:solidFill>
+            <a:srgbClr val="FFFFFF"/>
+          </a:solidFill>
+          <a:ln w="12700">
+            <a:solidFill>
+              <a:srgbClr val="0D9488"/>
+            </a:solidFill>
+            <a:prstDash val="solid"/>
+          </a:ln>
+        </p:spPr>
+      </p:sp>
+      <p:sp>
+        <p:nvSpPr>
+          <p:cNvPr id="30" name="Text 28"/>
+          <p:cNvSpPr/>
+          <p:nvPr/>
+        </p:nvSpPr>
+        <p:spPr>
+          <a:xfrm>
+            <a:off x="1975104" y="3364992"/>
+            <a:ext cx="1554480" cy="475488"/>
+          </a:xfrm>
+          <a:prstGeom prst="rect">
+            <a:avLst/>
+          </a:prstGeom>
+          <a:noFill/>
+          <a:ln/>
+        </p:spPr>
+        <p:txBody>
+          <a:bodyPr wrap="square" lIns="0" tIns="0" rIns="0" bIns="0" rtlCol="0" anchor="ctr"/>
+          <a:lstStyle/>
+          <a:p>
+            <a:pPr algn="ctr" indent="0" marL="0">
+              <a:buNone/>
+            </a:pPr>
+            <a:r>
+              <a:rPr lang="en-US" sz="1400" b="1" dirty="0">
+                <a:solidFill>
+                  <a:srgbClr val="0D9488"/>
                 </a:solidFill>
                 <a:latin typeface="Trebuchet MS" pitchFamily="34" charset="0"/>
                 <a:ea typeface="Trebuchet MS" pitchFamily="34" charset="-122"/>
                 <a:cs typeface="Trebuchet MS" pitchFamily="34" charset="-120"/>
               </a:rPr>
-              <a:t>Syllables</a:t>
-            </a:r>
-            <a:endParaRPr lang="en-US" sz="1100" dirty="0"/>
-          </a:p>
-        </p:txBody>
-      </p:sp>
-      <p:sp>
-        <p:nvSpPr>
-          <p:cNvPr id="30" name="Shape 28"/>
-          <p:cNvSpPr/>
-          <p:nvPr/>
-        </p:nvSpPr>
-        <p:spPr>
-          <a:xfrm>
-            <a:off x="1874520" y="3273552"/>
-            <a:ext cx="6903720" cy="658368"/>
-          </a:xfrm>
-          <a:prstGeom prst="rect">
-            <a:avLst>
-              <a:gd name="adj" fmla="val 8333"/>
-            </a:avLst>
-          </a:prstGeom>
-          <a:solidFill>
-            <a:srgbClr val="CCFBF1"/>
-          </a:solidFill>
-          <a:ln w="12700">
-            <a:solidFill>
-              <a:srgbClr val="0D9488"/>
-            </a:solidFill>
-            <a:prstDash val="solid"/>
-          </a:ln>
-        </p:spPr>
-      </p:sp>
-      <p:sp>
-        <p:nvSpPr>
-          <p:cNvPr id="31" name="Shape 29"/>
-          <p:cNvSpPr/>
-          <p:nvPr/>
-        </p:nvSpPr>
-        <p:spPr>
-          <a:xfrm>
-            <a:off x="1978152" y="3364992"/>
-            <a:ext cx="1225296" cy="475488"/>
+              <a:t>en</a:t>
+            </a:r>
+            <a:endParaRPr lang="en-US" sz="1400" dirty="0"/>
+          </a:p>
+        </p:txBody>
+      </p:sp>
+      <p:sp>
+        <p:nvSpPr>
+          <p:cNvPr id="31" name="Text 29"/>
+          <p:cNvSpPr/>
+          <p:nvPr/>
+        </p:nvSpPr>
+        <p:spPr>
+          <a:xfrm>
+            <a:off x="3529584" y="3364992"/>
+            <a:ext cx="73152" cy="475488"/>
+          </a:xfrm>
+          <a:prstGeom prst="rect">
+            <a:avLst/>
+          </a:prstGeom>
+          <a:noFill/>
+          <a:ln/>
+        </p:spPr>
+        <p:txBody>
+          <a:bodyPr wrap="square" lIns="0" tIns="0" rIns="0" bIns="0" rtlCol="0" anchor="ctr"/>
+          <a:lstStyle/>
+          <a:p>
+            <a:pPr algn="ctr" indent="0" marL="0">
+              <a:buNone/>
+            </a:pPr>
+            <a:r>
+              <a:rPr lang="en-US" sz="1600" b="1" dirty="0">
+                <a:solidFill>
+                  <a:srgbClr val="0D9488"/>
+                </a:solidFill>
+                <a:latin typeface="Trebuchet MS" pitchFamily="34" charset="0"/>
+                <a:ea typeface="Trebuchet MS" pitchFamily="34" charset="-122"/>
+                <a:cs typeface="Trebuchet MS" pitchFamily="34" charset="-120"/>
+              </a:rPr>
+              <a:t>·</a:t>
+            </a:r>
+            <a:endParaRPr lang="en-US" sz="1600" dirty="0"/>
+          </a:p>
+        </p:txBody>
+      </p:sp>
+      <p:sp>
+        <p:nvSpPr>
+          <p:cNvPr id="32" name="Shape 30"/>
+          <p:cNvSpPr/>
+          <p:nvPr/>
+        </p:nvSpPr>
+        <p:spPr>
+          <a:xfrm>
+            <a:off x="3602736" y="3364992"/>
+            <a:ext cx="1554480" cy="475488"/>
           </a:xfrm>
           <a:prstGeom prst="rect">
             <a:avLst>
@@ -22393,14 +22469,14 @@
       </p:sp>
       <p:sp>
         <p:nvSpPr>
-          <p:cNvPr id="32" name="Text 30"/>
-          <p:cNvSpPr/>
-          <p:nvPr/>
-        </p:nvSpPr>
-        <p:spPr>
-          <a:xfrm>
-            <a:off x="1978152" y="3364992"/>
-            <a:ext cx="1225296" cy="475488"/>
+          <p:cNvPr id="33" name="Text 31"/>
+          <p:cNvSpPr/>
+          <p:nvPr/>
+        </p:nvSpPr>
+        <p:spPr>
+          <a:xfrm>
+            <a:off x="3602736" y="3364992"/>
+            <a:ext cx="1554480" cy="475488"/>
           </a:xfrm>
           <a:prstGeom prst="rect">
             <a:avLst/>
@@ -22424,7 +22500,7 @@
                 <a:ea typeface="Trebuchet MS" pitchFamily="34" charset="-122"/>
                 <a:cs typeface="Trebuchet MS" pitchFamily="34" charset="-120"/>
               </a:rPr>
-              <a:t>en</a:t>
+              <a:t>cour</a:t>
             </a:r>
             <a:endParaRPr lang="en-US" sz="1400" dirty="0"/>
           </a:p>
@@ -22432,14 +22508,14 @@
       </p:sp>
       <p:sp>
         <p:nvSpPr>
-          <p:cNvPr id="33" name="Text 31"/>
-          <p:cNvSpPr/>
-          <p:nvPr/>
-        </p:nvSpPr>
-        <p:spPr>
-          <a:xfrm>
-            <a:off x="3203448" y="3364992"/>
-            <a:ext cx="76200" cy="475488"/>
+          <p:cNvPr id="34" name="Text 32"/>
+          <p:cNvSpPr/>
+          <p:nvPr/>
+        </p:nvSpPr>
+        <p:spPr>
+          <a:xfrm>
+            <a:off x="5157216" y="3364992"/>
+            <a:ext cx="73152" cy="475488"/>
           </a:xfrm>
           <a:prstGeom prst="rect">
             <a:avLst/>
@@ -22471,14 +22547,14 @@
       </p:sp>
       <p:sp>
         <p:nvSpPr>
-          <p:cNvPr id="34" name="Shape 32"/>
-          <p:cNvSpPr/>
-          <p:nvPr/>
-        </p:nvSpPr>
-        <p:spPr>
-          <a:xfrm>
-            <a:off x="3279648" y="3364992"/>
-            <a:ext cx="1225296" cy="475488"/>
+          <p:cNvPr id="35" name="Shape 33"/>
+          <p:cNvSpPr/>
+          <p:nvPr/>
+        </p:nvSpPr>
+        <p:spPr>
+          <a:xfrm>
+            <a:off x="5230368" y="3364992"/>
+            <a:ext cx="1554480" cy="475488"/>
           </a:xfrm>
           <a:prstGeom prst="rect">
             <a:avLst>
@@ -22498,14 +22574,14 @@
       </p:sp>
       <p:sp>
         <p:nvSpPr>
-          <p:cNvPr id="35" name="Text 33"/>
-          <p:cNvSpPr/>
-          <p:nvPr/>
-        </p:nvSpPr>
-        <p:spPr>
-          <a:xfrm>
-            <a:off x="3279648" y="3364992"/>
-            <a:ext cx="1225296" cy="475488"/>
+          <p:cNvPr id="36" name="Text 34"/>
+          <p:cNvSpPr/>
+          <p:nvPr/>
+        </p:nvSpPr>
+        <p:spPr>
+          <a:xfrm>
+            <a:off x="5230368" y="3364992"/>
+            <a:ext cx="1554480" cy="475488"/>
           </a:xfrm>
           <a:prstGeom prst="rect">
             <a:avLst/>
@@ -22529,7 +22605,7 @@
                 <a:ea typeface="Trebuchet MS" pitchFamily="34" charset="-122"/>
                 <a:cs typeface="Trebuchet MS" pitchFamily="34" charset="-120"/>
               </a:rPr>
-              <a:t>cour</a:t>
+              <a:t>ag</a:t>
             </a:r>
             <a:endParaRPr lang="en-US" sz="1400" dirty="0"/>
           </a:p>
@@ -22537,14 +22613,14 @@
       </p:sp>
       <p:sp>
         <p:nvSpPr>
-          <p:cNvPr id="36" name="Text 34"/>
-          <p:cNvSpPr/>
-          <p:nvPr/>
-        </p:nvSpPr>
-        <p:spPr>
-          <a:xfrm>
-            <a:off x="4504944" y="3364992"/>
-            <a:ext cx="76200" cy="475488"/>
+          <p:cNvPr id="37" name="Text 35"/>
+          <p:cNvSpPr/>
+          <p:nvPr/>
+        </p:nvSpPr>
+        <p:spPr>
+          <a:xfrm>
+            <a:off x="6784848" y="3364992"/>
+            <a:ext cx="73152" cy="475488"/>
           </a:xfrm>
           <a:prstGeom prst="rect">
             <a:avLst/>
@@ -22576,14 +22652,14 @@
       </p:sp>
       <p:sp>
         <p:nvSpPr>
-          <p:cNvPr id="37" name="Shape 35"/>
-          <p:cNvSpPr/>
-          <p:nvPr/>
-        </p:nvSpPr>
-        <p:spPr>
-          <a:xfrm>
-            <a:off x="4581144" y="3364992"/>
-            <a:ext cx="1225296" cy="475488"/>
+          <p:cNvPr id="38" name="Shape 36"/>
+          <p:cNvSpPr/>
+          <p:nvPr/>
+        </p:nvSpPr>
+        <p:spPr>
+          <a:xfrm>
+            <a:off x="6858000" y="3364992"/>
+            <a:ext cx="1554480" cy="475488"/>
           </a:xfrm>
           <a:prstGeom prst="rect">
             <a:avLst>
@@ -22603,14 +22679,14 @@
       </p:sp>
       <p:sp>
         <p:nvSpPr>
-          <p:cNvPr id="38" name="Text 36"/>
-          <p:cNvSpPr/>
-          <p:nvPr/>
-        </p:nvSpPr>
-        <p:spPr>
-          <a:xfrm>
-            <a:off x="4581144" y="3364992"/>
-            <a:ext cx="1225296" cy="475488"/>
+          <p:cNvPr id="39" name="Text 37"/>
+          <p:cNvSpPr/>
+          <p:nvPr/>
+        </p:nvSpPr>
+        <p:spPr>
+          <a:xfrm>
+            <a:off x="6858000" y="3364992"/>
+            <a:ext cx="1554480" cy="475488"/>
           </a:xfrm>
           <a:prstGeom prst="rect">
             <a:avLst/>
@@ -22634,7 +22710,7 @@
                 <a:ea typeface="Trebuchet MS" pitchFamily="34" charset="-122"/>
                 <a:cs typeface="Trebuchet MS" pitchFamily="34" charset="-120"/>
               </a:rPr>
-              <a:t>ag</a:t>
+              <a:t>ing</a:t>
             </a:r>
             <a:endParaRPr lang="en-US" sz="1400" dirty="0"/>
           </a:p>
@@ -22642,224 +22718,80 @@
       </p:sp>
       <p:sp>
         <p:nvSpPr>
-          <p:cNvPr id="39" name="Text 37"/>
-          <p:cNvSpPr/>
-          <p:nvPr/>
-        </p:nvSpPr>
-        <p:spPr>
-          <a:xfrm>
-            <a:off x="5806440" y="3364992"/>
-            <a:ext cx="76200" cy="475488"/>
-          </a:xfrm>
-          <a:prstGeom prst="rect">
-            <a:avLst/>
-          </a:prstGeom>
-          <a:noFill/>
-          <a:ln/>
-        </p:spPr>
-        <p:txBody>
-          <a:bodyPr wrap="square" lIns="0" tIns="0" rIns="0" bIns="0" rtlCol="0" anchor="ctr"/>
-          <a:lstStyle/>
-          <a:p>
-            <a:pPr algn="ctr" indent="0" marL="0">
-              <a:buNone/>
-            </a:pPr>
-            <a:r>
-              <a:rPr lang="en-US" sz="1600" b="1" dirty="0">
-                <a:solidFill>
-                  <a:srgbClr val="0D9488"/>
+          <p:cNvPr id="40" name="Shape 38"/>
+          <p:cNvSpPr/>
+          <p:nvPr/>
+        </p:nvSpPr>
+        <p:spPr>
+          <a:xfrm>
+            <a:off x="365760" y="4096512"/>
+            <a:ext cx="1371600" cy="804672"/>
+          </a:xfrm>
+          <a:prstGeom prst="rect">
+            <a:avLst>
+              <a:gd name="adj" fmla="val 6818"/>
+            </a:avLst>
+          </a:prstGeom>
+          <a:solidFill>
+            <a:srgbClr val="E2E8F0"/>
+          </a:solidFill>
+          <a:ln w="12700">
+            <a:solidFill>
+              <a:srgbClr val="E2E8F0"/>
+            </a:solidFill>
+            <a:prstDash val="solid"/>
+          </a:ln>
+        </p:spPr>
+      </p:sp>
+      <p:sp>
+        <p:nvSpPr>
+          <p:cNvPr id="41" name="Text 39"/>
+          <p:cNvSpPr/>
+          <p:nvPr/>
+        </p:nvSpPr>
+        <p:spPr>
+          <a:xfrm>
+            <a:off x="365760" y="4096512"/>
+            <a:ext cx="1371600" cy="804672"/>
+          </a:xfrm>
+          <a:prstGeom prst="rect">
+            <a:avLst/>
+          </a:prstGeom>
+          <a:noFill/>
+          <a:ln/>
+        </p:spPr>
+        <p:txBody>
+          <a:bodyPr wrap="square" lIns="0" tIns="0" rIns="0" bIns="0" rtlCol="0" anchor="ctr"/>
+          <a:lstStyle/>
+          <a:p>
+            <a:pPr algn="ctr" indent="0" marL="0">
+              <a:buNone/>
+            </a:pPr>
+            <a:r>
+              <a:rPr lang="en-US" sz="1100" b="1" dirty="0">
+                <a:solidFill>
+                  <a:srgbClr val="475569"/>
                 </a:solidFill>
                 <a:latin typeface="Trebuchet MS" pitchFamily="34" charset="0"/>
                 <a:ea typeface="Trebuchet MS" pitchFamily="34" charset="-122"/>
                 <a:cs typeface="Trebuchet MS" pitchFamily="34" charset="-120"/>
               </a:rPr>
-              <a:t>·</a:t>
-            </a:r>
-            <a:endParaRPr lang="en-US" sz="1600" dirty="0"/>
-          </a:p>
-        </p:txBody>
-      </p:sp>
-      <p:sp>
-        <p:nvSpPr>
-          <p:cNvPr id="40" name="Shape 38"/>
-          <p:cNvSpPr/>
-          <p:nvPr/>
-        </p:nvSpPr>
-        <p:spPr>
-          <a:xfrm>
-            <a:off x="5882640" y="3364992"/>
-            <a:ext cx="1225296" cy="475488"/>
-          </a:xfrm>
-          <a:prstGeom prst="rect">
-            <a:avLst>
-              <a:gd name="adj" fmla="val 9615"/>
-            </a:avLst>
-          </a:prstGeom>
-          <a:solidFill>
-            <a:srgbClr val="FFFFFF"/>
-          </a:solidFill>
-          <a:ln w="12700">
-            <a:solidFill>
-              <a:srgbClr val="0D9488"/>
-            </a:solidFill>
-            <a:prstDash val="solid"/>
-          </a:ln>
-        </p:spPr>
-      </p:sp>
-      <p:sp>
-        <p:nvSpPr>
-          <p:cNvPr id="41" name="Text 39"/>
-          <p:cNvSpPr/>
-          <p:nvPr/>
-        </p:nvSpPr>
-        <p:spPr>
-          <a:xfrm>
-            <a:off x="5882640" y="3364992"/>
-            <a:ext cx="1225296" cy="475488"/>
-          </a:xfrm>
-          <a:prstGeom prst="rect">
-            <a:avLst/>
-          </a:prstGeom>
-          <a:noFill/>
-          <a:ln/>
-        </p:spPr>
-        <p:txBody>
-          <a:bodyPr wrap="square" lIns="0" tIns="0" rIns="0" bIns="0" rtlCol="0" anchor="ctr"/>
-          <a:lstStyle/>
-          <a:p>
-            <a:pPr algn="ctr" indent="0" marL="0">
-              <a:buNone/>
-            </a:pPr>
-            <a:r>
-              <a:rPr lang="en-US" sz="1400" b="1" dirty="0">
-                <a:solidFill>
-                  <a:srgbClr val="0D9488"/>
-                </a:solidFill>
-                <a:latin typeface="Trebuchet MS" pitchFamily="34" charset="0"/>
-                <a:ea typeface="Trebuchet MS" pitchFamily="34" charset="-122"/>
-                <a:cs typeface="Trebuchet MS" pitchFamily="34" charset="-120"/>
-              </a:rPr>
-              <a:t>ing</a:t>
-            </a:r>
-            <a:endParaRPr lang="en-US" sz="1400" dirty="0"/>
-          </a:p>
-        </p:txBody>
-      </p:sp>
-      <p:sp>
-        <p:nvSpPr>
-          <p:cNvPr id="42" name="Text 40"/>
-          <p:cNvSpPr/>
-          <p:nvPr/>
-        </p:nvSpPr>
-        <p:spPr>
-          <a:xfrm>
-            <a:off x="7107936" y="3364992"/>
-            <a:ext cx="76200" cy="475488"/>
-          </a:xfrm>
-          <a:prstGeom prst="rect">
-            <a:avLst/>
-          </a:prstGeom>
-          <a:noFill/>
-          <a:ln/>
-        </p:spPr>
-        <p:txBody>
-          <a:bodyPr wrap="square" lIns="0" tIns="0" rIns="0" bIns="0" rtlCol="0" anchor="ctr"/>
-          <a:lstStyle/>
-          <a:p>
-            <a:pPr algn="ctr" indent="0" marL="0">
-              <a:buNone/>
-            </a:pPr>
-            <a:r>
-              <a:rPr lang="en-US" sz="1600" b="1" dirty="0">
-                <a:solidFill>
-                  <a:srgbClr val="0D9488"/>
-                </a:solidFill>
-                <a:latin typeface="Trebuchet MS" pitchFamily="34" charset="0"/>
-                <a:ea typeface="Trebuchet MS" pitchFamily="34" charset="-122"/>
-                <a:cs typeface="Trebuchet MS" pitchFamily="34" charset="-120"/>
-              </a:rPr>
-              <a:t>·</a:t>
-            </a:r>
-            <a:endParaRPr lang="en-US" sz="1600" dirty="0"/>
-          </a:p>
-        </p:txBody>
-      </p:sp>
-      <p:sp>
-        <p:nvSpPr>
-          <p:cNvPr id="43" name="Shape 41"/>
-          <p:cNvSpPr/>
-          <p:nvPr/>
-        </p:nvSpPr>
-        <p:spPr>
-          <a:xfrm>
-            <a:off x="7184136" y="3364992"/>
-            <a:ext cx="1225296" cy="475488"/>
-          </a:xfrm>
-          <a:prstGeom prst="rect">
-            <a:avLst>
-              <a:gd name="adj" fmla="val 9615"/>
-            </a:avLst>
-          </a:prstGeom>
-          <a:solidFill>
-            <a:srgbClr val="FFFFFF"/>
-          </a:solidFill>
-          <a:ln w="12700">
-            <a:solidFill>
-              <a:srgbClr val="0D9488"/>
-            </a:solidFill>
-            <a:prstDash val="solid"/>
-          </a:ln>
-        </p:spPr>
-      </p:sp>
-      <p:sp>
-        <p:nvSpPr>
-          <p:cNvPr id="44" name="Text 42"/>
-          <p:cNvSpPr/>
-          <p:nvPr/>
-        </p:nvSpPr>
-        <p:spPr>
-          <a:xfrm>
-            <a:off x="7184136" y="3364992"/>
-            <a:ext cx="1225296" cy="475488"/>
-          </a:xfrm>
-          <a:prstGeom prst="rect">
-            <a:avLst/>
-          </a:prstGeom>
-          <a:noFill/>
-          <a:ln/>
-        </p:spPr>
-        <p:txBody>
-          <a:bodyPr wrap="square" lIns="0" tIns="0" rIns="0" bIns="0" rtlCol="0" anchor="ctr"/>
-          <a:lstStyle/>
-          <a:p>
-            <a:pPr algn="ctr" indent="0" marL="0">
-              <a:buNone/>
-            </a:pPr>
-            <a:r>
-              <a:rPr lang="en-US" sz="1400" b="1" dirty="0">
-                <a:solidFill>
-                  <a:srgbClr val="0D9488"/>
-                </a:solidFill>
-                <a:latin typeface="Trebuchet MS" pitchFamily="34" charset="0"/>
-                <a:ea typeface="Trebuchet MS" pitchFamily="34" charset="-122"/>
-                <a:cs typeface="Trebuchet MS" pitchFamily="34" charset="-120"/>
-              </a:rPr>
-              <a:t>ly</a:t>
-            </a:r>
-            <a:endParaRPr lang="en-US" sz="1400" dirty="0"/>
-          </a:p>
-        </p:txBody>
-      </p:sp>
-      <p:sp>
-        <p:nvSpPr>
-          <p:cNvPr id="45" name="Shape 43"/>
-          <p:cNvSpPr/>
-          <p:nvPr/>
-        </p:nvSpPr>
-        <p:spPr>
-          <a:xfrm>
-            <a:off x="365760" y="4096512"/>
-            <a:ext cx="1371600" cy="804672"/>
+              <a:t>Phonemes</a:t>
+            </a:r>
+            <a:endParaRPr lang="en-US" sz="1100" dirty="0"/>
+          </a:p>
+        </p:txBody>
+      </p:sp>
+      <p:sp>
+        <p:nvSpPr>
+          <p:cNvPr id="42" name="Shape 40"/>
+          <p:cNvSpPr/>
+          <p:nvPr/>
+        </p:nvSpPr>
+        <p:spPr>
+          <a:xfrm>
+            <a:off x="1874520" y="4096512"/>
+            <a:ext cx="6903720" cy="804672"/>
           </a:xfrm>
           <a:prstGeom prst="rect">
             <a:avLst>
@@ -22867,85 +22799,19 @@
             </a:avLst>
           </a:prstGeom>
           <a:solidFill>
-            <a:srgbClr val="E2E8F0"/>
+            <a:srgbClr val="F8FAFC"/>
           </a:solidFill>
           <a:ln w="12700">
             <a:solidFill>
               <a:srgbClr val="E2E8F0"/>
             </a:solidFill>
-            <a:prstDash val="solid"/>
-          </a:ln>
-        </p:spPr>
-      </p:sp>
-      <p:sp>
-        <p:nvSpPr>
-          <p:cNvPr id="46" name="Text 44"/>
-          <p:cNvSpPr/>
-          <p:nvPr/>
-        </p:nvSpPr>
-        <p:spPr>
-          <a:xfrm>
-            <a:off x="365760" y="4096512"/>
-            <a:ext cx="1371600" cy="804672"/>
-          </a:xfrm>
-          <a:prstGeom prst="rect">
-            <a:avLst/>
-          </a:prstGeom>
-          <a:noFill/>
-          <a:ln/>
-        </p:spPr>
-        <p:txBody>
-          <a:bodyPr wrap="square" lIns="0" tIns="0" rIns="0" bIns="0" rtlCol="0" anchor="ctr"/>
-          <a:lstStyle/>
-          <a:p>
-            <a:pPr algn="ctr" indent="0" marL="0">
-              <a:buNone/>
-            </a:pPr>
-            <a:r>
-              <a:rPr lang="en-US" sz="1100" b="1" dirty="0">
-                <a:solidFill>
-                  <a:srgbClr val="475569"/>
-                </a:solidFill>
-                <a:latin typeface="Trebuchet MS" pitchFamily="34" charset="0"/>
-                <a:ea typeface="Trebuchet MS" pitchFamily="34" charset="-122"/>
-                <a:cs typeface="Trebuchet MS" pitchFamily="34" charset="-120"/>
-              </a:rPr>
-              <a:t>Phonemes</a:t>
-            </a:r>
-            <a:endParaRPr lang="en-US" sz="1100" dirty="0"/>
-          </a:p>
-        </p:txBody>
-      </p:sp>
-      <p:sp>
-        <p:nvSpPr>
-          <p:cNvPr id="47" name="Shape 45"/>
-          <p:cNvSpPr/>
-          <p:nvPr/>
-        </p:nvSpPr>
-        <p:spPr>
-          <a:xfrm>
-            <a:off x="1874520" y="4096512"/>
-            <a:ext cx="6903720" cy="804672"/>
-          </a:xfrm>
-          <a:prstGeom prst="rect">
-            <a:avLst>
-              <a:gd name="adj" fmla="val 6818"/>
-            </a:avLst>
-          </a:prstGeom>
-          <a:solidFill>
-            <a:srgbClr val="F8FAFC"/>
-          </a:solidFill>
-          <a:ln w="12700">
-            <a:solidFill>
-              <a:srgbClr val="E2E8F0"/>
-            </a:solidFill>
             <a:prstDash val="dash"/>
           </a:ln>
         </p:spPr>
       </p:sp>
       <p:sp>
         <p:nvSpPr>
-          <p:cNvPr id="48" name="Text 46"/>
+          <p:cNvPr id="43" name="Text 41"/>
           <p:cNvSpPr/>
           <p:nvPr/>
         </p:nvSpPr>
@@ -23407,7 +23273,7 @@
                 <a:ea typeface="Trebuchet MS" pitchFamily="34" charset="-122"/>
                 <a:cs typeface="Trebuchet MS" pitchFamily="34" charset="-120"/>
               </a:rPr>
-              <a:t>encouragingly</a:t>
+              <a:t>encouraging</a:t>
             </a:r>
             <a:endParaRPr lang="en-US" sz="2800" dirty="0"/>
           </a:p>
@@ -23487,8 +23353,8 @@
         </p:nvSpPr>
         <p:spPr>
           <a:xfrm>
-            <a:off x="1989734" y="2258568"/>
-            <a:ext cx="1581912" cy="292608"/>
+            <a:off x="2221992" y="2258568"/>
+            <a:ext cx="1828800" cy="292608"/>
           </a:xfrm>
           <a:prstGeom prst="rect">
             <a:avLst>
@@ -23521,8 +23387,8 @@
         </p:nvSpPr>
         <p:spPr>
           <a:xfrm>
-            <a:off x="1989734" y="2258568"/>
-            <a:ext cx="1581912" cy="292608"/>
+            <a:off x="2221992" y="2258568"/>
+            <a:ext cx="1828800" cy="292608"/>
           </a:xfrm>
           <a:prstGeom prst="rect">
             <a:avLst/>
@@ -23560,8 +23426,8 @@
         </p:nvSpPr>
         <p:spPr>
           <a:xfrm>
-            <a:off x="1989734" y="2569464"/>
-            <a:ext cx="1581912" cy="201168"/>
+            <a:off x="2221992" y="2569464"/>
+            <a:ext cx="1828800" cy="201168"/>
           </a:xfrm>
           <a:prstGeom prst="rect">
             <a:avLst/>
@@ -23599,8 +23465,8 @@
         </p:nvSpPr>
         <p:spPr>
           <a:xfrm>
-            <a:off x="3659429" y="2258568"/>
-            <a:ext cx="1581912" cy="292608"/>
+            <a:off x="4370832" y="2258568"/>
+            <a:ext cx="1828800" cy="292608"/>
           </a:xfrm>
           <a:prstGeom prst="rect">
             <a:avLst>
@@ -23633,8 +23499,8 @@
         </p:nvSpPr>
         <p:spPr>
           <a:xfrm>
-            <a:off x="3659429" y="2258568"/>
-            <a:ext cx="1581912" cy="292608"/>
+            <a:off x="4370832" y="2258568"/>
+            <a:ext cx="1828800" cy="292608"/>
           </a:xfrm>
           <a:prstGeom prst="rect">
             <a:avLst/>
@@ -23672,8 +23538,8 @@
         </p:nvSpPr>
         <p:spPr>
           <a:xfrm>
-            <a:off x="3659429" y="2569464"/>
-            <a:ext cx="1581912" cy="201168"/>
+            <a:off x="4370832" y="2569464"/>
+            <a:ext cx="1828800" cy="201168"/>
           </a:xfrm>
           <a:prstGeom prst="rect">
             <a:avLst/>
@@ -23697,7 +23563,7 @@
                 <a:ea typeface="Calibri" pitchFamily="34" charset="-122"/>
                 <a:cs typeface="Calibri" pitchFamily="34" charset="-120"/>
               </a:rPr>
-              <a:t>bravery from the heart</a:t>
+              <a:t>bravery, heart</a:t>
             </a:r>
             <a:endParaRPr lang="en-US" sz="850" dirty="0"/>
           </a:p>
@@ -23711,8 +23577,8 @@
         </p:nvSpPr>
         <p:spPr>
           <a:xfrm>
-            <a:off x="5329123" y="2258568"/>
-            <a:ext cx="1581912" cy="292608"/>
+            <a:off x="6519672" y="2258568"/>
+            <a:ext cx="1828800" cy="292608"/>
           </a:xfrm>
           <a:prstGeom prst="rect">
             <a:avLst>
@@ -23745,8 +23611,8 @@
         </p:nvSpPr>
         <p:spPr>
           <a:xfrm>
-            <a:off x="5329123" y="2258568"/>
-            <a:ext cx="1581912" cy="292608"/>
+            <a:off x="6519672" y="2258568"/>
+            <a:ext cx="1828800" cy="292608"/>
           </a:xfrm>
           <a:prstGeom prst="rect">
             <a:avLst/>
@@ -23784,8 +23650,8 @@
         </p:nvSpPr>
         <p:spPr>
           <a:xfrm>
-            <a:off x="5329123" y="2569464"/>
-            <a:ext cx="1581912" cy="201168"/>
+            <a:off x="6519672" y="2569464"/>
+            <a:ext cx="1828800" cy="201168"/>
           </a:xfrm>
           <a:prstGeom prst="rect">
             <a:avLst/>
@@ -23809,7 +23675,7 @@
                 <a:ea typeface="Calibri" pitchFamily="34" charset="-122"/>
                 <a:cs typeface="Calibri" pitchFamily="34" charset="-120"/>
               </a:rPr>
-              <a:t>in the process of</a:t>
+              <a:t>happening now (present participle)</a:t>
             </a:r>
             <a:endParaRPr lang="en-US" sz="850" dirty="0"/>
           </a:p>
@@ -23817,87 +23683,818 @@
       </p:sp>
       <p:sp>
         <p:nvSpPr>
-          <p:cNvPr id="25" name="Shape 23"/>
-          <p:cNvSpPr/>
-          <p:nvPr/>
-        </p:nvSpPr>
-        <p:spPr>
-          <a:xfrm>
-            <a:off x="6998818" y="2258568"/>
-            <a:ext cx="1581912" cy="292608"/>
+          <p:cNvPr id="25" name="Text 23"/>
+          <p:cNvSpPr/>
+          <p:nvPr/>
+        </p:nvSpPr>
+        <p:spPr>
+          <a:xfrm>
+            <a:off x="6519672" y="2752344"/>
+            <a:ext cx="1828800" cy="182880"/>
+          </a:xfrm>
+          <a:prstGeom prst="rect">
+            <a:avLst/>
+          </a:prstGeom>
+          <a:noFill/>
+          <a:ln/>
+        </p:spPr>
+        <p:txBody>
+          <a:bodyPr wrap="square" lIns="0" tIns="0" rIns="0" bIns="0" rtlCol="0" anchor="t"/>
+          <a:lstStyle/>
+          <a:p>
+            <a:pPr algn="ctr" indent="0" marL="0">
+              <a:buNone/>
+            </a:pPr>
+            <a:r>
+              <a:rPr lang="en-US" sz="700" i="1" dirty="0">
+                <a:solidFill>
+                  <a:srgbClr val="94A3B8"/>
+                </a:solidFill>
+                <a:latin typeface="Calibri" pitchFamily="34" charset="0"/>
+                <a:ea typeface="Calibri" pitchFamily="34" charset="-122"/>
+                <a:cs typeface="Calibri" pitchFamily="34" charset="-120"/>
+              </a:rPr>
+              <a:t>'e' dropped before vowel suffix</a:t>
+            </a:r>
+            <a:endParaRPr lang="en-US" sz="700" dirty="0"/>
+          </a:p>
+        </p:txBody>
+      </p:sp>
+      <p:sp>
+        <p:nvSpPr>
+          <p:cNvPr id="26" name="Shape 24"/>
+          <p:cNvSpPr/>
+          <p:nvPr/>
+        </p:nvSpPr>
+        <p:spPr>
+          <a:xfrm>
+            <a:off x="365760" y="3273552"/>
+            <a:ext cx="1371600" cy="658368"/>
           </a:xfrm>
           <a:prstGeom prst="rect">
             <a:avLst>
-              <a:gd name="adj" fmla="val 25000"/>
+              <a:gd name="adj" fmla="val 8333"/>
             </a:avLst>
           </a:prstGeom>
           <a:solidFill>
-            <a:srgbClr val="FCE7F3"/>
-          </a:solidFill>
-          <a:ln w="19050">
-            <a:solidFill>
-              <a:srgbClr val="DB2777"/>
-            </a:solidFill>
-            <a:prstDash val="solid"/>
-          </a:ln>
-          <a:effectLst>
-            <a:outerShdw sx="100000" sy="100000" kx="0" ky="0" algn="bl" rotWithShape="0" blurRad="101600" dist="38100" dir="8100000">
-              <a:srgbClr val="000000">
-                <a:alpha val="12000"/>
-              </a:srgbClr>
-            </a:outerShdw>
-          </a:effectLst>
-        </p:spPr>
-      </p:sp>
-      <p:sp>
-        <p:nvSpPr>
-          <p:cNvPr id="26" name="Text 24"/>
-          <p:cNvSpPr/>
-          <p:nvPr/>
-        </p:nvSpPr>
-        <p:spPr>
-          <a:xfrm>
-            <a:off x="6998818" y="2258568"/>
-            <a:ext cx="1581912" cy="292608"/>
-          </a:xfrm>
-          <a:prstGeom prst="rect">
-            <a:avLst/>
-          </a:prstGeom>
-          <a:noFill/>
-          <a:ln/>
-        </p:spPr>
-        <p:txBody>
-          <a:bodyPr wrap="square" lIns="0" tIns="0" rIns="0" bIns="0" rtlCol="0" anchor="ctr"/>
-          <a:lstStyle/>
-          <a:p>
-            <a:pPr algn="ctr" indent="0" marL="0">
-              <a:buNone/>
-            </a:pPr>
-            <a:r>
-              <a:rPr lang="en-US" sz="1300" b="1" dirty="0">
-                <a:solidFill>
-                  <a:srgbClr val="9D174D"/>
+            <a:srgbClr val="E2E8F0"/>
+          </a:solidFill>
+          <a:ln w="12700">
+            <a:solidFill>
+              <a:srgbClr val="E2E8F0"/>
+            </a:solidFill>
+            <a:prstDash val="solid"/>
+          </a:ln>
+        </p:spPr>
+      </p:sp>
+      <p:sp>
+        <p:nvSpPr>
+          <p:cNvPr id="27" name="Text 25"/>
+          <p:cNvSpPr/>
+          <p:nvPr/>
+        </p:nvSpPr>
+        <p:spPr>
+          <a:xfrm>
+            <a:off x="365760" y="3273552"/>
+            <a:ext cx="1371600" cy="658368"/>
+          </a:xfrm>
+          <a:prstGeom prst="rect">
+            <a:avLst/>
+          </a:prstGeom>
+          <a:noFill/>
+          <a:ln/>
+        </p:spPr>
+        <p:txBody>
+          <a:bodyPr wrap="square" lIns="0" tIns="0" rIns="0" bIns="0" rtlCol="0" anchor="ctr"/>
+          <a:lstStyle/>
+          <a:p>
+            <a:pPr algn="ctr" indent="0" marL="0">
+              <a:buNone/>
+            </a:pPr>
+            <a:r>
+              <a:rPr lang="en-US" sz="1100" b="1" dirty="0">
+                <a:solidFill>
+                  <a:srgbClr val="475569"/>
                 </a:solidFill>
                 <a:latin typeface="Trebuchet MS" pitchFamily="34" charset="0"/>
                 <a:ea typeface="Trebuchet MS" pitchFamily="34" charset="-122"/>
                 <a:cs typeface="Trebuchet MS" pitchFamily="34" charset="-120"/>
               </a:rPr>
-              <a:t>ly</a:t>
-            </a:r>
-            <a:endParaRPr lang="en-US" sz="1300" dirty="0"/>
-          </a:p>
-        </p:txBody>
-      </p:sp>
-      <p:sp>
-        <p:nvSpPr>
-          <p:cNvPr id="27" name="Text 25"/>
-          <p:cNvSpPr/>
-          <p:nvPr/>
-        </p:nvSpPr>
-        <p:spPr>
-          <a:xfrm>
-            <a:off x="6998818" y="2569464"/>
-            <a:ext cx="1581912" cy="201168"/>
+              <a:t>Syllables</a:t>
+            </a:r>
+            <a:endParaRPr lang="en-US" sz="1100" dirty="0"/>
+          </a:p>
+        </p:txBody>
+      </p:sp>
+      <p:sp>
+        <p:nvSpPr>
+          <p:cNvPr id="28" name="Shape 26"/>
+          <p:cNvSpPr/>
+          <p:nvPr/>
+        </p:nvSpPr>
+        <p:spPr>
+          <a:xfrm>
+            <a:off x="1874520" y="3273552"/>
+            <a:ext cx="6903720" cy="658368"/>
+          </a:xfrm>
+          <a:prstGeom prst="rect">
+            <a:avLst>
+              <a:gd name="adj" fmla="val 8333"/>
+            </a:avLst>
+          </a:prstGeom>
+          <a:solidFill>
+            <a:srgbClr val="CCFBF1"/>
+          </a:solidFill>
+          <a:ln w="12700">
+            <a:solidFill>
+              <a:srgbClr val="0D9488"/>
+            </a:solidFill>
+            <a:prstDash val="solid"/>
+          </a:ln>
+        </p:spPr>
+      </p:sp>
+      <p:sp>
+        <p:nvSpPr>
+          <p:cNvPr id="29" name="Shape 27"/>
+          <p:cNvSpPr/>
+          <p:nvPr/>
+        </p:nvSpPr>
+        <p:spPr>
+          <a:xfrm>
+            <a:off x="1975104" y="3364992"/>
+            <a:ext cx="1554480" cy="475488"/>
+          </a:xfrm>
+          <a:prstGeom prst="rect">
+            <a:avLst>
+              <a:gd name="adj" fmla="val 9615"/>
+            </a:avLst>
+          </a:prstGeom>
+          <a:solidFill>
+            <a:srgbClr val="FFFFFF"/>
+          </a:solidFill>
+          <a:ln w="12700">
+            <a:solidFill>
+              <a:srgbClr val="0D9488"/>
+            </a:solidFill>
+            <a:prstDash val="solid"/>
+          </a:ln>
+        </p:spPr>
+      </p:sp>
+      <p:sp>
+        <p:nvSpPr>
+          <p:cNvPr id="30" name="Text 28"/>
+          <p:cNvSpPr/>
+          <p:nvPr/>
+        </p:nvSpPr>
+        <p:spPr>
+          <a:xfrm>
+            <a:off x="1975104" y="3364992"/>
+            <a:ext cx="1554480" cy="475488"/>
+          </a:xfrm>
+          <a:prstGeom prst="rect">
+            <a:avLst/>
+          </a:prstGeom>
+          <a:noFill/>
+          <a:ln/>
+        </p:spPr>
+        <p:txBody>
+          <a:bodyPr wrap="square" lIns="0" tIns="0" rIns="0" bIns="0" rtlCol="0" anchor="ctr"/>
+          <a:lstStyle/>
+          <a:p>
+            <a:pPr algn="ctr" indent="0" marL="0">
+              <a:buNone/>
+            </a:pPr>
+            <a:r>
+              <a:rPr lang="en-US" sz="1400" b="1" dirty="0">
+                <a:solidFill>
+                  <a:srgbClr val="0D9488"/>
+                </a:solidFill>
+                <a:latin typeface="Trebuchet MS" pitchFamily="34" charset="0"/>
+                <a:ea typeface="Trebuchet MS" pitchFamily="34" charset="-122"/>
+                <a:cs typeface="Trebuchet MS" pitchFamily="34" charset="-120"/>
+              </a:rPr>
+              <a:t>en</a:t>
+            </a:r>
+            <a:endParaRPr lang="en-US" sz="1400" dirty="0"/>
+          </a:p>
+        </p:txBody>
+      </p:sp>
+      <p:sp>
+        <p:nvSpPr>
+          <p:cNvPr id="31" name="Text 29"/>
+          <p:cNvSpPr/>
+          <p:nvPr/>
+        </p:nvSpPr>
+        <p:spPr>
+          <a:xfrm>
+            <a:off x="3529584" y="3364992"/>
+            <a:ext cx="73152" cy="475488"/>
+          </a:xfrm>
+          <a:prstGeom prst="rect">
+            <a:avLst/>
+          </a:prstGeom>
+          <a:noFill/>
+          <a:ln/>
+        </p:spPr>
+        <p:txBody>
+          <a:bodyPr wrap="square" lIns="0" tIns="0" rIns="0" bIns="0" rtlCol="0" anchor="ctr"/>
+          <a:lstStyle/>
+          <a:p>
+            <a:pPr algn="ctr" indent="0" marL="0">
+              <a:buNone/>
+            </a:pPr>
+            <a:r>
+              <a:rPr lang="en-US" sz="1600" b="1" dirty="0">
+                <a:solidFill>
+                  <a:srgbClr val="0D9488"/>
+                </a:solidFill>
+                <a:latin typeface="Trebuchet MS" pitchFamily="34" charset="0"/>
+                <a:ea typeface="Trebuchet MS" pitchFamily="34" charset="-122"/>
+                <a:cs typeface="Trebuchet MS" pitchFamily="34" charset="-120"/>
+              </a:rPr>
+              <a:t>·</a:t>
+            </a:r>
+            <a:endParaRPr lang="en-US" sz="1600" dirty="0"/>
+          </a:p>
+        </p:txBody>
+      </p:sp>
+      <p:sp>
+        <p:nvSpPr>
+          <p:cNvPr id="32" name="Shape 30"/>
+          <p:cNvSpPr/>
+          <p:nvPr/>
+        </p:nvSpPr>
+        <p:spPr>
+          <a:xfrm>
+            <a:off x="3602736" y="3364992"/>
+            <a:ext cx="1554480" cy="475488"/>
+          </a:xfrm>
+          <a:prstGeom prst="rect">
+            <a:avLst>
+              <a:gd name="adj" fmla="val 9615"/>
+            </a:avLst>
+          </a:prstGeom>
+          <a:solidFill>
+            <a:srgbClr val="FFFFFF"/>
+          </a:solidFill>
+          <a:ln w="12700">
+            <a:solidFill>
+              <a:srgbClr val="0D9488"/>
+            </a:solidFill>
+            <a:prstDash val="solid"/>
+          </a:ln>
+        </p:spPr>
+      </p:sp>
+      <p:sp>
+        <p:nvSpPr>
+          <p:cNvPr id="33" name="Text 31"/>
+          <p:cNvSpPr/>
+          <p:nvPr/>
+        </p:nvSpPr>
+        <p:spPr>
+          <a:xfrm>
+            <a:off x="3602736" y="3364992"/>
+            <a:ext cx="1554480" cy="475488"/>
+          </a:xfrm>
+          <a:prstGeom prst="rect">
+            <a:avLst/>
+          </a:prstGeom>
+          <a:noFill/>
+          <a:ln/>
+        </p:spPr>
+        <p:txBody>
+          <a:bodyPr wrap="square" lIns="0" tIns="0" rIns="0" bIns="0" rtlCol="0" anchor="ctr"/>
+          <a:lstStyle/>
+          <a:p>
+            <a:pPr algn="ctr" indent="0" marL="0">
+              <a:buNone/>
+            </a:pPr>
+            <a:r>
+              <a:rPr lang="en-US" sz="1400" b="1" dirty="0">
+                <a:solidFill>
+                  <a:srgbClr val="0D9488"/>
+                </a:solidFill>
+                <a:latin typeface="Trebuchet MS" pitchFamily="34" charset="0"/>
+                <a:ea typeface="Trebuchet MS" pitchFamily="34" charset="-122"/>
+                <a:cs typeface="Trebuchet MS" pitchFamily="34" charset="-120"/>
+              </a:rPr>
+              <a:t>cour</a:t>
+            </a:r>
+            <a:endParaRPr lang="en-US" sz="1400" dirty="0"/>
+          </a:p>
+        </p:txBody>
+      </p:sp>
+      <p:sp>
+        <p:nvSpPr>
+          <p:cNvPr id="34" name="Text 32"/>
+          <p:cNvSpPr/>
+          <p:nvPr/>
+        </p:nvSpPr>
+        <p:spPr>
+          <a:xfrm>
+            <a:off x="5157216" y="3364992"/>
+            <a:ext cx="73152" cy="475488"/>
+          </a:xfrm>
+          <a:prstGeom prst="rect">
+            <a:avLst/>
+          </a:prstGeom>
+          <a:noFill/>
+          <a:ln/>
+        </p:spPr>
+        <p:txBody>
+          <a:bodyPr wrap="square" lIns="0" tIns="0" rIns="0" bIns="0" rtlCol="0" anchor="ctr"/>
+          <a:lstStyle/>
+          <a:p>
+            <a:pPr algn="ctr" indent="0" marL="0">
+              <a:buNone/>
+            </a:pPr>
+            <a:r>
+              <a:rPr lang="en-US" sz="1600" b="1" dirty="0">
+                <a:solidFill>
+                  <a:srgbClr val="0D9488"/>
+                </a:solidFill>
+                <a:latin typeface="Trebuchet MS" pitchFamily="34" charset="0"/>
+                <a:ea typeface="Trebuchet MS" pitchFamily="34" charset="-122"/>
+                <a:cs typeface="Trebuchet MS" pitchFamily="34" charset="-120"/>
+              </a:rPr>
+              <a:t>·</a:t>
+            </a:r>
+            <a:endParaRPr lang="en-US" sz="1600" dirty="0"/>
+          </a:p>
+        </p:txBody>
+      </p:sp>
+      <p:sp>
+        <p:nvSpPr>
+          <p:cNvPr id="35" name="Shape 33"/>
+          <p:cNvSpPr/>
+          <p:nvPr/>
+        </p:nvSpPr>
+        <p:spPr>
+          <a:xfrm>
+            <a:off x="5230368" y="3364992"/>
+            <a:ext cx="1554480" cy="475488"/>
+          </a:xfrm>
+          <a:prstGeom prst="rect">
+            <a:avLst>
+              <a:gd name="adj" fmla="val 9615"/>
+            </a:avLst>
+          </a:prstGeom>
+          <a:solidFill>
+            <a:srgbClr val="FFFFFF"/>
+          </a:solidFill>
+          <a:ln w="12700">
+            <a:solidFill>
+              <a:srgbClr val="0D9488"/>
+            </a:solidFill>
+            <a:prstDash val="solid"/>
+          </a:ln>
+        </p:spPr>
+      </p:sp>
+      <p:sp>
+        <p:nvSpPr>
+          <p:cNvPr id="36" name="Text 34"/>
+          <p:cNvSpPr/>
+          <p:nvPr/>
+        </p:nvSpPr>
+        <p:spPr>
+          <a:xfrm>
+            <a:off x="5230368" y="3364992"/>
+            <a:ext cx="1554480" cy="475488"/>
+          </a:xfrm>
+          <a:prstGeom prst="rect">
+            <a:avLst/>
+          </a:prstGeom>
+          <a:noFill/>
+          <a:ln/>
+        </p:spPr>
+        <p:txBody>
+          <a:bodyPr wrap="square" lIns="0" tIns="0" rIns="0" bIns="0" rtlCol="0" anchor="ctr"/>
+          <a:lstStyle/>
+          <a:p>
+            <a:pPr algn="ctr" indent="0" marL="0">
+              <a:buNone/>
+            </a:pPr>
+            <a:r>
+              <a:rPr lang="en-US" sz="1400" b="1" dirty="0">
+                <a:solidFill>
+                  <a:srgbClr val="0D9488"/>
+                </a:solidFill>
+                <a:latin typeface="Trebuchet MS" pitchFamily="34" charset="0"/>
+                <a:ea typeface="Trebuchet MS" pitchFamily="34" charset="-122"/>
+                <a:cs typeface="Trebuchet MS" pitchFamily="34" charset="-120"/>
+              </a:rPr>
+              <a:t>ag</a:t>
+            </a:r>
+            <a:endParaRPr lang="en-US" sz="1400" dirty="0"/>
+          </a:p>
+        </p:txBody>
+      </p:sp>
+      <p:sp>
+        <p:nvSpPr>
+          <p:cNvPr id="37" name="Text 35"/>
+          <p:cNvSpPr/>
+          <p:nvPr/>
+        </p:nvSpPr>
+        <p:spPr>
+          <a:xfrm>
+            <a:off x="6784848" y="3364992"/>
+            <a:ext cx="73152" cy="475488"/>
+          </a:xfrm>
+          <a:prstGeom prst="rect">
+            <a:avLst/>
+          </a:prstGeom>
+          <a:noFill/>
+          <a:ln/>
+        </p:spPr>
+        <p:txBody>
+          <a:bodyPr wrap="square" lIns="0" tIns="0" rIns="0" bIns="0" rtlCol="0" anchor="ctr"/>
+          <a:lstStyle/>
+          <a:p>
+            <a:pPr algn="ctr" indent="0" marL="0">
+              <a:buNone/>
+            </a:pPr>
+            <a:r>
+              <a:rPr lang="en-US" sz="1600" b="1" dirty="0">
+                <a:solidFill>
+                  <a:srgbClr val="0D9488"/>
+                </a:solidFill>
+                <a:latin typeface="Trebuchet MS" pitchFamily="34" charset="0"/>
+                <a:ea typeface="Trebuchet MS" pitchFamily="34" charset="-122"/>
+                <a:cs typeface="Trebuchet MS" pitchFamily="34" charset="-120"/>
+              </a:rPr>
+              <a:t>·</a:t>
+            </a:r>
+            <a:endParaRPr lang="en-US" sz="1600" dirty="0"/>
+          </a:p>
+        </p:txBody>
+      </p:sp>
+      <p:sp>
+        <p:nvSpPr>
+          <p:cNvPr id="38" name="Shape 36"/>
+          <p:cNvSpPr/>
+          <p:nvPr/>
+        </p:nvSpPr>
+        <p:spPr>
+          <a:xfrm>
+            <a:off x="6858000" y="3364992"/>
+            <a:ext cx="1554480" cy="475488"/>
+          </a:xfrm>
+          <a:prstGeom prst="rect">
+            <a:avLst>
+              <a:gd name="adj" fmla="val 9615"/>
+            </a:avLst>
+          </a:prstGeom>
+          <a:solidFill>
+            <a:srgbClr val="FFFFFF"/>
+          </a:solidFill>
+          <a:ln w="12700">
+            <a:solidFill>
+              <a:srgbClr val="0D9488"/>
+            </a:solidFill>
+            <a:prstDash val="solid"/>
+          </a:ln>
+        </p:spPr>
+      </p:sp>
+      <p:sp>
+        <p:nvSpPr>
+          <p:cNvPr id="39" name="Text 37"/>
+          <p:cNvSpPr/>
+          <p:nvPr/>
+        </p:nvSpPr>
+        <p:spPr>
+          <a:xfrm>
+            <a:off x="6858000" y="3364992"/>
+            <a:ext cx="1554480" cy="475488"/>
+          </a:xfrm>
+          <a:prstGeom prst="rect">
+            <a:avLst/>
+          </a:prstGeom>
+          <a:noFill/>
+          <a:ln/>
+        </p:spPr>
+        <p:txBody>
+          <a:bodyPr wrap="square" lIns="0" tIns="0" rIns="0" bIns="0" rtlCol="0" anchor="ctr"/>
+          <a:lstStyle/>
+          <a:p>
+            <a:pPr algn="ctr" indent="0" marL="0">
+              <a:buNone/>
+            </a:pPr>
+            <a:r>
+              <a:rPr lang="en-US" sz="1400" b="1" dirty="0">
+                <a:solidFill>
+                  <a:srgbClr val="0D9488"/>
+                </a:solidFill>
+                <a:latin typeface="Trebuchet MS" pitchFamily="34" charset="0"/>
+                <a:ea typeface="Trebuchet MS" pitchFamily="34" charset="-122"/>
+                <a:cs typeface="Trebuchet MS" pitchFamily="34" charset="-120"/>
+              </a:rPr>
+              <a:t>ing</a:t>
+            </a:r>
+            <a:endParaRPr lang="en-US" sz="1400" dirty="0"/>
+          </a:p>
+        </p:txBody>
+      </p:sp>
+      <p:sp>
+        <p:nvSpPr>
+          <p:cNvPr id="40" name="Shape 38"/>
+          <p:cNvSpPr/>
+          <p:nvPr/>
+        </p:nvSpPr>
+        <p:spPr>
+          <a:xfrm>
+            <a:off x="365760" y="4096512"/>
+            <a:ext cx="1371600" cy="804672"/>
+          </a:xfrm>
+          <a:prstGeom prst="rect">
+            <a:avLst>
+              <a:gd name="adj" fmla="val 6818"/>
+            </a:avLst>
+          </a:prstGeom>
+          <a:solidFill>
+            <a:srgbClr val="E2E8F0"/>
+          </a:solidFill>
+          <a:ln w="12700">
+            <a:solidFill>
+              <a:srgbClr val="E2E8F0"/>
+            </a:solidFill>
+            <a:prstDash val="solid"/>
+          </a:ln>
+        </p:spPr>
+      </p:sp>
+      <p:sp>
+        <p:nvSpPr>
+          <p:cNvPr id="41" name="Text 39"/>
+          <p:cNvSpPr/>
+          <p:nvPr/>
+        </p:nvSpPr>
+        <p:spPr>
+          <a:xfrm>
+            <a:off x="365760" y="4096512"/>
+            <a:ext cx="1371600" cy="804672"/>
+          </a:xfrm>
+          <a:prstGeom prst="rect">
+            <a:avLst/>
+          </a:prstGeom>
+          <a:noFill/>
+          <a:ln/>
+        </p:spPr>
+        <p:txBody>
+          <a:bodyPr wrap="square" lIns="0" tIns="0" rIns="0" bIns="0" rtlCol="0" anchor="ctr"/>
+          <a:lstStyle/>
+          <a:p>
+            <a:pPr algn="ctr" indent="0" marL="0">
+              <a:buNone/>
+            </a:pPr>
+            <a:r>
+              <a:rPr lang="en-US" sz="1100" b="1" dirty="0">
+                <a:solidFill>
+                  <a:srgbClr val="475569"/>
+                </a:solidFill>
+                <a:latin typeface="Trebuchet MS" pitchFamily="34" charset="0"/>
+                <a:ea typeface="Trebuchet MS" pitchFamily="34" charset="-122"/>
+                <a:cs typeface="Trebuchet MS" pitchFamily="34" charset="-120"/>
+              </a:rPr>
+              <a:t>Phonemes</a:t>
+            </a:r>
+            <a:endParaRPr lang="en-US" sz="1100" dirty="0"/>
+          </a:p>
+        </p:txBody>
+      </p:sp>
+      <p:sp>
+        <p:nvSpPr>
+          <p:cNvPr id="42" name="Shape 40"/>
+          <p:cNvSpPr/>
+          <p:nvPr/>
+        </p:nvSpPr>
+        <p:spPr>
+          <a:xfrm>
+            <a:off x="1874520" y="4096512"/>
+            <a:ext cx="6903720" cy="804672"/>
+          </a:xfrm>
+          <a:prstGeom prst="rect">
+            <a:avLst>
+              <a:gd name="adj" fmla="val 6818"/>
+            </a:avLst>
+          </a:prstGeom>
+          <a:solidFill>
+            <a:srgbClr val="FCE7F3"/>
+          </a:solidFill>
+          <a:ln w="12700">
+            <a:solidFill>
+              <a:srgbClr val="DB2777"/>
+            </a:solidFill>
+            <a:prstDash val="solid"/>
+          </a:ln>
+        </p:spPr>
+      </p:sp>
+      <p:sp>
+        <p:nvSpPr>
+          <p:cNvPr id="43" name="Shape 41"/>
+          <p:cNvSpPr/>
+          <p:nvPr/>
+        </p:nvSpPr>
+        <p:spPr>
+          <a:xfrm>
+            <a:off x="1951330" y="4169664"/>
+            <a:ext cx="676656" cy="384048"/>
+          </a:xfrm>
+          <a:prstGeom prst="rect">
+            <a:avLst>
+              <a:gd name="adj" fmla="val 9524"/>
+            </a:avLst>
+          </a:prstGeom>
+          <a:solidFill>
+            <a:srgbClr val="FFFFFF"/>
+          </a:solidFill>
+          <a:ln w="12700">
+            <a:solidFill>
+              <a:srgbClr val="DB2777"/>
+            </a:solidFill>
+            <a:prstDash val="solid"/>
+          </a:ln>
+        </p:spPr>
+      </p:sp>
+      <p:sp>
+        <p:nvSpPr>
+          <p:cNvPr id="44" name="Text 42"/>
+          <p:cNvSpPr/>
+          <p:nvPr/>
+        </p:nvSpPr>
+        <p:spPr>
+          <a:xfrm>
+            <a:off x="1951330" y="4169664"/>
+            <a:ext cx="676656" cy="384048"/>
+          </a:xfrm>
+          <a:prstGeom prst="rect">
+            <a:avLst/>
+          </a:prstGeom>
+          <a:noFill/>
+          <a:ln/>
+        </p:spPr>
+        <p:txBody>
+          <a:bodyPr wrap="square" lIns="0" tIns="0" rIns="0" bIns="0" rtlCol="0" anchor="ctr"/>
+          <a:lstStyle/>
+          <a:p>
+            <a:pPr algn="ctr" indent="0" marL="0">
+              <a:buNone/>
+            </a:pPr>
+            <a:r>
+              <a:rPr lang="en-US" sz="900" b="1" dirty="0">
+                <a:solidFill>
+                  <a:srgbClr val="9D174D"/>
+                </a:solidFill>
+                <a:latin typeface="Trebuchet MS" pitchFamily="34" charset="0"/>
+                <a:ea typeface="Trebuchet MS" pitchFamily="34" charset="-122"/>
+                <a:cs typeface="Trebuchet MS" pitchFamily="34" charset="-120"/>
+              </a:rPr>
+              <a:t>e</a:t>
+            </a:r>
+            <a:endParaRPr lang="en-US" sz="900" dirty="0"/>
+          </a:p>
+        </p:txBody>
+      </p:sp>
+      <p:sp>
+        <p:nvSpPr>
+          <p:cNvPr id="45" name="Shape 43"/>
+          <p:cNvSpPr/>
+          <p:nvPr/>
+        </p:nvSpPr>
+        <p:spPr>
+          <a:xfrm>
+            <a:off x="2677363" y="4169664"/>
+            <a:ext cx="676656" cy="384048"/>
+          </a:xfrm>
+          <a:prstGeom prst="rect">
+            <a:avLst>
+              <a:gd name="adj" fmla="val 9524"/>
+            </a:avLst>
+          </a:prstGeom>
+          <a:solidFill>
+            <a:srgbClr val="FFFFFF"/>
+          </a:solidFill>
+          <a:ln w="12700">
+            <a:solidFill>
+              <a:srgbClr val="DB2777"/>
+            </a:solidFill>
+            <a:prstDash val="solid"/>
+          </a:ln>
+        </p:spPr>
+      </p:sp>
+      <p:sp>
+        <p:nvSpPr>
+          <p:cNvPr id="46" name="Text 44"/>
+          <p:cNvSpPr/>
+          <p:nvPr/>
+        </p:nvSpPr>
+        <p:spPr>
+          <a:xfrm>
+            <a:off x="2677363" y="4169664"/>
+            <a:ext cx="676656" cy="384048"/>
+          </a:xfrm>
+          <a:prstGeom prst="rect">
+            <a:avLst/>
+          </a:prstGeom>
+          <a:noFill/>
+          <a:ln/>
+        </p:spPr>
+        <p:txBody>
+          <a:bodyPr wrap="square" lIns="0" tIns="0" rIns="0" bIns="0" rtlCol="0" anchor="ctr"/>
+          <a:lstStyle/>
+          <a:p>
+            <a:pPr algn="ctr" indent="0" marL="0">
+              <a:buNone/>
+            </a:pPr>
+            <a:r>
+              <a:rPr lang="en-US" sz="900" b="1" dirty="0">
+                <a:solidFill>
+                  <a:srgbClr val="9D174D"/>
+                </a:solidFill>
+                <a:latin typeface="Trebuchet MS" pitchFamily="34" charset="0"/>
+                <a:ea typeface="Trebuchet MS" pitchFamily="34" charset="-122"/>
+                <a:cs typeface="Trebuchet MS" pitchFamily="34" charset="-120"/>
+              </a:rPr>
+              <a:t>n</a:t>
+            </a:r>
+            <a:endParaRPr lang="en-US" sz="900" dirty="0"/>
+          </a:p>
+        </p:txBody>
+      </p:sp>
+      <p:sp>
+        <p:nvSpPr>
+          <p:cNvPr id="47" name="Shape 45"/>
+          <p:cNvSpPr/>
+          <p:nvPr/>
+        </p:nvSpPr>
+        <p:spPr>
+          <a:xfrm>
+            <a:off x="3403397" y="4169664"/>
+            <a:ext cx="676656" cy="384048"/>
+          </a:xfrm>
+          <a:prstGeom prst="rect">
+            <a:avLst>
+              <a:gd name="adj" fmla="val 9524"/>
+            </a:avLst>
+          </a:prstGeom>
+          <a:solidFill>
+            <a:srgbClr val="FFFFFF"/>
+          </a:solidFill>
+          <a:ln w="12700">
+            <a:solidFill>
+              <a:srgbClr val="DB2777"/>
+            </a:solidFill>
+            <a:prstDash val="solid"/>
+          </a:ln>
+        </p:spPr>
+      </p:sp>
+      <p:sp>
+        <p:nvSpPr>
+          <p:cNvPr id="48" name="Text 46"/>
+          <p:cNvSpPr/>
+          <p:nvPr/>
+        </p:nvSpPr>
+        <p:spPr>
+          <a:xfrm>
+            <a:off x="3403397" y="4169664"/>
+            <a:ext cx="676656" cy="384048"/>
+          </a:xfrm>
+          <a:prstGeom prst="rect">
+            <a:avLst/>
+          </a:prstGeom>
+          <a:noFill/>
+          <a:ln/>
+        </p:spPr>
+        <p:txBody>
+          <a:bodyPr wrap="square" lIns="0" tIns="0" rIns="0" bIns="0" rtlCol="0" anchor="ctr"/>
+          <a:lstStyle/>
+          <a:p>
+            <a:pPr algn="ctr" indent="0" marL="0">
+              <a:buNone/>
+            </a:pPr>
+            <a:r>
+              <a:rPr lang="en-US" sz="900" b="1" dirty="0">
+                <a:solidFill>
+                  <a:srgbClr val="9D174D"/>
+                </a:solidFill>
+                <a:latin typeface="Trebuchet MS" pitchFamily="34" charset="0"/>
+                <a:ea typeface="Trebuchet MS" pitchFamily="34" charset="-122"/>
+                <a:cs typeface="Trebuchet MS" pitchFamily="34" charset="-120"/>
+              </a:rPr>
+              <a:t>c</a:t>
+            </a:r>
+            <a:endParaRPr lang="en-US" sz="900" dirty="0"/>
+          </a:p>
+        </p:txBody>
+      </p:sp>
+      <p:sp>
+        <p:nvSpPr>
+          <p:cNvPr id="49" name="Text 47"/>
+          <p:cNvSpPr/>
+          <p:nvPr/>
+        </p:nvSpPr>
+        <p:spPr>
+          <a:xfrm>
+            <a:off x="3403397" y="4572000"/>
+            <a:ext cx="676656" cy="219456"/>
           </a:xfrm>
           <a:prstGeom prst="rect">
             <a:avLst/>
@@ -23913,232 +24510,232 @@
               <a:buNone/>
             </a:pPr>
             <a:r>
-              <a:rPr lang="en-US" sz="850" dirty="0">
-                <a:solidFill>
-                  <a:srgbClr val="475569"/>
+              <a:rPr lang="en-US" sz="750" i="1" dirty="0">
+                <a:solidFill>
+                  <a:srgbClr val="94A3B8"/>
                 </a:solidFill>
                 <a:latin typeface="Calibri" pitchFamily="34" charset="0"/>
                 <a:ea typeface="Calibri" pitchFamily="34" charset="-122"/>
                 <a:cs typeface="Calibri" pitchFamily="34" charset="-120"/>
               </a:rPr>
-              <a:t>in that way</a:t>
-            </a:r>
-            <a:endParaRPr lang="en-US" sz="850" dirty="0"/>
-          </a:p>
-        </p:txBody>
-      </p:sp>
-      <p:sp>
-        <p:nvSpPr>
-          <p:cNvPr id="28" name="Shape 26"/>
-          <p:cNvSpPr/>
-          <p:nvPr/>
-        </p:nvSpPr>
-        <p:spPr>
-          <a:xfrm>
-            <a:off x="365760" y="3273552"/>
-            <a:ext cx="1371600" cy="658368"/>
+              <a:t>/k/</a:t>
+            </a:r>
+            <a:endParaRPr lang="en-US" sz="750" dirty="0"/>
+          </a:p>
+        </p:txBody>
+      </p:sp>
+      <p:sp>
+        <p:nvSpPr>
+          <p:cNvPr id="50" name="Shape 48"/>
+          <p:cNvSpPr/>
+          <p:nvPr/>
+        </p:nvSpPr>
+        <p:spPr>
+          <a:xfrm>
+            <a:off x="4129430" y="4169664"/>
+            <a:ext cx="676656" cy="384048"/>
           </a:xfrm>
           <a:prstGeom prst="rect">
             <a:avLst>
-              <a:gd name="adj" fmla="val 8333"/>
+              <a:gd name="adj" fmla="val 9524"/>
             </a:avLst>
           </a:prstGeom>
           <a:solidFill>
-            <a:srgbClr val="E2E8F0"/>
-          </a:solidFill>
-          <a:ln w="12700">
-            <a:solidFill>
-              <a:srgbClr val="E2E8F0"/>
-            </a:solidFill>
-            <a:prstDash val="solid"/>
-          </a:ln>
-        </p:spPr>
-      </p:sp>
-      <p:sp>
-        <p:nvSpPr>
-          <p:cNvPr id="29" name="Text 27"/>
-          <p:cNvSpPr/>
-          <p:nvPr/>
-        </p:nvSpPr>
-        <p:spPr>
-          <a:xfrm>
-            <a:off x="365760" y="3273552"/>
-            <a:ext cx="1371600" cy="658368"/>
-          </a:xfrm>
-          <a:prstGeom prst="rect">
-            <a:avLst/>
-          </a:prstGeom>
-          <a:noFill/>
-          <a:ln/>
-        </p:spPr>
-        <p:txBody>
-          <a:bodyPr wrap="square" lIns="0" tIns="0" rIns="0" bIns="0" rtlCol="0" anchor="ctr"/>
-          <a:lstStyle/>
-          <a:p>
-            <a:pPr algn="ctr" indent="0" marL="0">
-              <a:buNone/>
-            </a:pPr>
-            <a:r>
-              <a:rPr lang="en-US" sz="1100" b="1" dirty="0">
-                <a:solidFill>
-                  <a:srgbClr val="475569"/>
+            <a:srgbClr val="FFFFFF"/>
+          </a:solidFill>
+          <a:ln w="12700">
+            <a:solidFill>
+              <a:srgbClr val="DB2777"/>
+            </a:solidFill>
+            <a:prstDash val="solid"/>
+          </a:ln>
+        </p:spPr>
+      </p:sp>
+      <p:sp>
+        <p:nvSpPr>
+          <p:cNvPr id="51" name="Text 49"/>
+          <p:cNvSpPr/>
+          <p:nvPr/>
+        </p:nvSpPr>
+        <p:spPr>
+          <a:xfrm>
+            <a:off x="4129430" y="4169664"/>
+            <a:ext cx="676656" cy="384048"/>
+          </a:xfrm>
+          <a:prstGeom prst="rect">
+            <a:avLst/>
+          </a:prstGeom>
+          <a:noFill/>
+          <a:ln/>
+        </p:spPr>
+        <p:txBody>
+          <a:bodyPr wrap="square" lIns="0" tIns="0" rIns="0" bIns="0" rtlCol="0" anchor="ctr"/>
+          <a:lstStyle/>
+          <a:p>
+            <a:pPr algn="ctr" indent="0" marL="0">
+              <a:buNone/>
+            </a:pPr>
+            <a:r>
+              <a:rPr lang="en-US" sz="900" b="1" dirty="0">
+                <a:solidFill>
+                  <a:srgbClr val="9D174D"/>
                 </a:solidFill>
                 <a:latin typeface="Trebuchet MS" pitchFamily="34" charset="0"/>
                 <a:ea typeface="Trebuchet MS" pitchFamily="34" charset="-122"/>
                 <a:cs typeface="Trebuchet MS" pitchFamily="34" charset="-120"/>
               </a:rPr>
-              <a:t>Syllables</a:t>
-            </a:r>
-            <a:endParaRPr lang="en-US" sz="1100" dirty="0"/>
-          </a:p>
-        </p:txBody>
-      </p:sp>
-      <p:sp>
-        <p:nvSpPr>
-          <p:cNvPr id="30" name="Shape 28"/>
-          <p:cNvSpPr/>
-          <p:nvPr/>
-        </p:nvSpPr>
-        <p:spPr>
-          <a:xfrm>
-            <a:off x="1874520" y="3273552"/>
-            <a:ext cx="6903720" cy="658368"/>
+              <a:t>ou</a:t>
+            </a:r>
+            <a:endParaRPr lang="en-US" sz="900" dirty="0"/>
+          </a:p>
+        </p:txBody>
+      </p:sp>
+      <p:sp>
+        <p:nvSpPr>
+          <p:cNvPr id="52" name="Shape 50"/>
+          <p:cNvSpPr/>
+          <p:nvPr/>
+        </p:nvSpPr>
+        <p:spPr>
+          <a:xfrm>
+            <a:off x="4855464" y="4169664"/>
+            <a:ext cx="676656" cy="384048"/>
           </a:xfrm>
           <a:prstGeom prst="rect">
             <a:avLst>
-              <a:gd name="adj" fmla="val 8333"/>
+              <a:gd name="adj" fmla="val 9524"/>
             </a:avLst>
           </a:prstGeom>
           <a:solidFill>
-            <a:srgbClr val="CCFBF1"/>
-          </a:solidFill>
-          <a:ln w="12700">
-            <a:solidFill>
-              <a:srgbClr val="0D9488"/>
-            </a:solidFill>
-            <a:prstDash val="solid"/>
-          </a:ln>
-        </p:spPr>
-      </p:sp>
-      <p:sp>
-        <p:nvSpPr>
-          <p:cNvPr id="31" name="Shape 29"/>
-          <p:cNvSpPr/>
-          <p:nvPr/>
-        </p:nvSpPr>
-        <p:spPr>
-          <a:xfrm>
-            <a:off x="1978152" y="3364992"/>
-            <a:ext cx="1225296" cy="475488"/>
-          </a:xfrm>
-          <a:prstGeom prst="rect">
-            <a:avLst>
-              <a:gd name="adj" fmla="val 9615"/>
-            </a:avLst>
-          </a:prstGeom>
-          <a:solidFill>
             <a:srgbClr val="FFFFFF"/>
           </a:solidFill>
           <a:ln w="12700">
             <a:solidFill>
-              <a:srgbClr val="0D9488"/>
-            </a:solidFill>
-            <a:prstDash val="solid"/>
-          </a:ln>
-        </p:spPr>
-      </p:sp>
-      <p:sp>
-        <p:nvSpPr>
-          <p:cNvPr id="32" name="Text 30"/>
-          <p:cNvSpPr/>
-          <p:nvPr/>
-        </p:nvSpPr>
-        <p:spPr>
-          <a:xfrm>
-            <a:off x="1978152" y="3364992"/>
-            <a:ext cx="1225296" cy="475488"/>
-          </a:xfrm>
-          <a:prstGeom prst="rect">
-            <a:avLst/>
-          </a:prstGeom>
-          <a:noFill/>
-          <a:ln/>
-        </p:spPr>
-        <p:txBody>
-          <a:bodyPr wrap="square" lIns="0" tIns="0" rIns="0" bIns="0" rtlCol="0" anchor="ctr"/>
-          <a:lstStyle/>
-          <a:p>
-            <a:pPr algn="ctr" indent="0" marL="0">
-              <a:buNone/>
-            </a:pPr>
-            <a:r>
-              <a:rPr lang="en-US" sz="1400" b="1" dirty="0">
-                <a:solidFill>
-                  <a:srgbClr val="0D9488"/>
+              <a:srgbClr val="DB2777"/>
+            </a:solidFill>
+            <a:prstDash val="solid"/>
+          </a:ln>
+        </p:spPr>
+      </p:sp>
+      <p:sp>
+        <p:nvSpPr>
+          <p:cNvPr id="53" name="Text 51"/>
+          <p:cNvSpPr/>
+          <p:nvPr/>
+        </p:nvSpPr>
+        <p:spPr>
+          <a:xfrm>
+            <a:off x="4855464" y="4169664"/>
+            <a:ext cx="676656" cy="384048"/>
+          </a:xfrm>
+          <a:prstGeom prst="rect">
+            <a:avLst/>
+          </a:prstGeom>
+          <a:noFill/>
+          <a:ln/>
+        </p:spPr>
+        <p:txBody>
+          <a:bodyPr wrap="square" lIns="0" tIns="0" rIns="0" bIns="0" rtlCol="0" anchor="ctr"/>
+          <a:lstStyle/>
+          <a:p>
+            <a:pPr algn="ctr" indent="0" marL="0">
+              <a:buNone/>
+            </a:pPr>
+            <a:r>
+              <a:rPr lang="en-US" sz="900" b="1" dirty="0">
+                <a:solidFill>
+                  <a:srgbClr val="9D174D"/>
                 </a:solidFill>
                 <a:latin typeface="Trebuchet MS" pitchFamily="34" charset="0"/>
                 <a:ea typeface="Trebuchet MS" pitchFamily="34" charset="-122"/>
                 <a:cs typeface="Trebuchet MS" pitchFamily="34" charset="-120"/>
               </a:rPr>
-              <a:t>en</a:t>
-            </a:r>
-            <a:endParaRPr lang="en-US" sz="1400" dirty="0"/>
-          </a:p>
-        </p:txBody>
-      </p:sp>
-      <p:sp>
-        <p:nvSpPr>
-          <p:cNvPr id="33" name="Text 31"/>
-          <p:cNvSpPr/>
-          <p:nvPr/>
-        </p:nvSpPr>
-        <p:spPr>
-          <a:xfrm>
-            <a:off x="3203448" y="3364992"/>
-            <a:ext cx="76200" cy="475488"/>
-          </a:xfrm>
-          <a:prstGeom prst="rect">
-            <a:avLst/>
-          </a:prstGeom>
-          <a:noFill/>
-          <a:ln/>
-        </p:spPr>
-        <p:txBody>
-          <a:bodyPr wrap="square" lIns="0" tIns="0" rIns="0" bIns="0" rtlCol="0" anchor="ctr"/>
-          <a:lstStyle/>
-          <a:p>
-            <a:pPr algn="ctr" indent="0" marL="0">
-              <a:buNone/>
-            </a:pPr>
-            <a:r>
-              <a:rPr lang="en-US" sz="1600" b="1" dirty="0">
-                <a:solidFill>
-                  <a:srgbClr val="0D9488"/>
+              <a:t>r</a:t>
+            </a:r>
+            <a:endParaRPr lang="en-US" sz="900" dirty="0"/>
+          </a:p>
+        </p:txBody>
+      </p:sp>
+      <p:sp>
+        <p:nvSpPr>
+          <p:cNvPr id="54" name="Shape 52"/>
+          <p:cNvSpPr/>
+          <p:nvPr/>
+        </p:nvSpPr>
+        <p:spPr>
+          <a:xfrm>
+            <a:off x="5581498" y="4169664"/>
+            <a:ext cx="676656" cy="384048"/>
+          </a:xfrm>
+          <a:prstGeom prst="rect">
+            <a:avLst>
+              <a:gd name="adj" fmla="val 9524"/>
+            </a:avLst>
+          </a:prstGeom>
+          <a:solidFill>
+            <a:srgbClr val="FFFFFF"/>
+          </a:solidFill>
+          <a:ln w="12700">
+            <a:solidFill>
+              <a:srgbClr val="DB2777"/>
+            </a:solidFill>
+            <a:prstDash val="solid"/>
+          </a:ln>
+        </p:spPr>
+      </p:sp>
+      <p:sp>
+        <p:nvSpPr>
+          <p:cNvPr id="55" name="Text 53"/>
+          <p:cNvSpPr/>
+          <p:nvPr/>
+        </p:nvSpPr>
+        <p:spPr>
+          <a:xfrm>
+            <a:off x="5581498" y="4169664"/>
+            <a:ext cx="676656" cy="384048"/>
+          </a:xfrm>
+          <a:prstGeom prst="rect">
+            <a:avLst/>
+          </a:prstGeom>
+          <a:noFill/>
+          <a:ln/>
+        </p:spPr>
+        <p:txBody>
+          <a:bodyPr wrap="square" lIns="0" tIns="0" rIns="0" bIns="0" rtlCol="0" anchor="ctr"/>
+          <a:lstStyle/>
+          <a:p>
+            <a:pPr algn="ctr" indent="0" marL="0">
+              <a:buNone/>
+            </a:pPr>
+            <a:r>
+              <a:rPr lang="en-US" sz="900" b="1" dirty="0">
+                <a:solidFill>
+                  <a:srgbClr val="9D174D"/>
                 </a:solidFill>
                 <a:latin typeface="Trebuchet MS" pitchFamily="34" charset="0"/>
                 <a:ea typeface="Trebuchet MS" pitchFamily="34" charset="-122"/>
                 <a:cs typeface="Trebuchet MS" pitchFamily="34" charset="-120"/>
               </a:rPr>
-              <a:t>·</a:t>
-            </a:r>
-            <a:endParaRPr lang="en-US" sz="1600" dirty="0"/>
-          </a:p>
-        </p:txBody>
-      </p:sp>
-      <p:sp>
-        <p:nvSpPr>
-          <p:cNvPr id="34" name="Shape 32"/>
-          <p:cNvSpPr/>
-          <p:nvPr/>
-        </p:nvSpPr>
-        <p:spPr>
-          <a:xfrm>
-            <a:off x="3279648" y="3364992"/>
-            <a:ext cx="1225296" cy="475488"/>
+              <a:t>a</a:t>
+            </a:r>
+            <a:endParaRPr lang="en-US" sz="900" dirty="0"/>
+          </a:p>
+        </p:txBody>
+      </p:sp>
+      <p:sp>
+        <p:nvSpPr>
+          <p:cNvPr id="56" name="Shape 54"/>
+          <p:cNvSpPr/>
+          <p:nvPr/>
+        </p:nvSpPr>
+        <p:spPr>
+          <a:xfrm>
+            <a:off x="6307531" y="4169664"/>
+            <a:ext cx="676656" cy="384048"/>
           </a:xfrm>
           <a:prstGeom prst="rect">
             <a:avLst>
-              <a:gd name="adj" fmla="val 9615"/>
+              <a:gd name="adj" fmla="val 9524"/>
             </a:avLst>
           </a:prstGeom>
           <a:solidFill>
@@ -24146,104 +24743,131 @@
           </a:solidFill>
           <a:ln w="12700">
             <a:solidFill>
-              <a:srgbClr val="0D9488"/>
-            </a:solidFill>
-            <a:prstDash val="solid"/>
-          </a:ln>
-        </p:spPr>
-      </p:sp>
-      <p:sp>
-        <p:nvSpPr>
-          <p:cNvPr id="35" name="Text 33"/>
-          <p:cNvSpPr/>
-          <p:nvPr/>
-        </p:nvSpPr>
-        <p:spPr>
-          <a:xfrm>
-            <a:off x="3279648" y="3364992"/>
-            <a:ext cx="1225296" cy="475488"/>
-          </a:xfrm>
-          <a:prstGeom prst="rect">
-            <a:avLst/>
-          </a:prstGeom>
-          <a:noFill/>
-          <a:ln/>
-        </p:spPr>
-        <p:txBody>
-          <a:bodyPr wrap="square" lIns="0" tIns="0" rIns="0" bIns="0" rtlCol="0" anchor="ctr"/>
-          <a:lstStyle/>
-          <a:p>
-            <a:pPr algn="ctr" indent="0" marL="0">
-              <a:buNone/>
-            </a:pPr>
-            <a:r>
-              <a:rPr lang="en-US" sz="1400" b="1" dirty="0">
-                <a:solidFill>
-                  <a:srgbClr val="0D9488"/>
+              <a:srgbClr val="DB2777"/>
+            </a:solidFill>
+            <a:prstDash val="solid"/>
+          </a:ln>
+        </p:spPr>
+      </p:sp>
+      <p:sp>
+        <p:nvSpPr>
+          <p:cNvPr id="57" name="Text 55"/>
+          <p:cNvSpPr/>
+          <p:nvPr/>
+        </p:nvSpPr>
+        <p:spPr>
+          <a:xfrm>
+            <a:off x="6307531" y="4169664"/>
+            <a:ext cx="676656" cy="384048"/>
+          </a:xfrm>
+          <a:prstGeom prst="rect">
+            <a:avLst/>
+          </a:prstGeom>
+          <a:noFill/>
+          <a:ln/>
+        </p:spPr>
+        <p:txBody>
+          <a:bodyPr wrap="square" lIns="0" tIns="0" rIns="0" bIns="0" rtlCol="0" anchor="ctr"/>
+          <a:lstStyle/>
+          <a:p>
+            <a:pPr algn="ctr" indent="0" marL="0">
+              <a:buNone/>
+            </a:pPr>
+            <a:r>
+              <a:rPr lang="en-US" sz="900" b="1" dirty="0">
+                <a:solidFill>
+                  <a:srgbClr val="9D174D"/>
                 </a:solidFill>
                 <a:latin typeface="Trebuchet MS" pitchFamily="34" charset="0"/>
                 <a:ea typeface="Trebuchet MS" pitchFamily="34" charset="-122"/>
                 <a:cs typeface="Trebuchet MS" pitchFamily="34" charset="-120"/>
               </a:rPr>
-              <a:t>cour</a:t>
-            </a:r>
-            <a:endParaRPr lang="en-US" sz="1400" dirty="0"/>
-          </a:p>
-        </p:txBody>
-      </p:sp>
-      <p:sp>
-        <p:nvSpPr>
-          <p:cNvPr id="36" name="Text 34"/>
-          <p:cNvSpPr/>
-          <p:nvPr/>
-        </p:nvSpPr>
-        <p:spPr>
-          <a:xfrm>
-            <a:off x="4504944" y="3364992"/>
-            <a:ext cx="76200" cy="475488"/>
-          </a:xfrm>
-          <a:prstGeom prst="rect">
-            <a:avLst/>
-          </a:prstGeom>
-          <a:noFill/>
-          <a:ln/>
-        </p:spPr>
-        <p:txBody>
-          <a:bodyPr wrap="square" lIns="0" tIns="0" rIns="0" bIns="0" rtlCol="0" anchor="ctr"/>
-          <a:lstStyle/>
-          <a:p>
-            <a:pPr algn="ctr" indent="0" marL="0">
-              <a:buNone/>
-            </a:pPr>
-            <a:r>
-              <a:rPr lang="en-US" sz="1600" b="1" dirty="0">
-                <a:solidFill>
-                  <a:srgbClr val="0D9488"/>
+              <a:t>g</a:t>
+            </a:r>
+            <a:endParaRPr lang="en-US" sz="900" dirty="0"/>
+          </a:p>
+        </p:txBody>
+      </p:sp>
+      <p:sp>
+        <p:nvSpPr>
+          <p:cNvPr id="58" name="Shape 56"/>
+          <p:cNvSpPr/>
+          <p:nvPr/>
+        </p:nvSpPr>
+        <p:spPr>
+          <a:xfrm>
+            <a:off x="7033565" y="4169664"/>
+            <a:ext cx="676656" cy="384048"/>
+          </a:xfrm>
+          <a:prstGeom prst="rect">
+            <a:avLst>
+              <a:gd name="adj" fmla="val 9524"/>
+            </a:avLst>
+          </a:prstGeom>
+          <a:solidFill>
+            <a:srgbClr val="FFFFFF"/>
+          </a:solidFill>
+          <a:ln w="12700">
+            <a:solidFill>
+              <a:srgbClr val="DB2777"/>
+            </a:solidFill>
+            <a:prstDash val="solid"/>
+          </a:ln>
+        </p:spPr>
+      </p:sp>
+      <p:sp>
+        <p:nvSpPr>
+          <p:cNvPr id="59" name="Text 57"/>
+          <p:cNvSpPr/>
+          <p:nvPr/>
+        </p:nvSpPr>
+        <p:spPr>
+          <a:xfrm>
+            <a:off x="7033565" y="4169664"/>
+            <a:ext cx="676656" cy="384048"/>
+          </a:xfrm>
+          <a:prstGeom prst="rect">
+            <a:avLst/>
+          </a:prstGeom>
+          <a:noFill/>
+          <a:ln/>
+        </p:spPr>
+        <p:txBody>
+          <a:bodyPr wrap="square" lIns="0" tIns="0" rIns="0" bIns="0" rtlCol="0" anchor="ctr"/>
+          <a:lstStyle/>
+          <a:p>
+            <a:pPr algn="ctr" indent="0" marL="0">
+              <a:buNone/>
+            </a:pPr>
+            <a:r>
+              <a:rPr lang="en-US" sz="900" b="1" dirty="0">
+                <a:solidFill>
+                  <a:srgbClr val="9D174D"/>
                 </a:solidFill>
                 <a:latin typeface="Trebuchet MS" pitchFamily="34" charset="0"/>
                 <a:ea typeface="Trebuchet MS" pitchFamily="34" charset="-122"/>
                 <a:cs typeface="Trebuchet MS" pitchFamily="34" charset="-120"/>
               </a:rPr>
-              <a:t>·</a:t>
-            </a:r>
-            <a:endParaRPr lang="en-US" sz="1600" dirty="0"/>
-          </a:p>
-        </p:txBody>
-      </p:sp>
-      <p:sp>
-        <p:nvSpPr>
-          <p:cNvPr id="37" name="Shape 35"/>
-          <p:cNvSpPr/>
-          <p:nvPr/>
-        </p:nvSpPr>
-        <p:spPr>
-          <a:xfrm>
-            <a:off x="4581144" y="3364992"/>
-            <a:ext cx="1225296" cy="475488"/>
+              <a:t>i</a:t>
+            </a:r>
+            <a:endParaRPr lang="en-US" sz="900" dirty="0"/>
+          </a:p>
+        </p:txBody>
+      </p:sp>
+      <p:sp>
+        <p:nvSpPr>
+          <p:cNvPr id="60" name="Shape 58"/>
+          <p:cNvSpPr/>
+          <p:nvPr/>
+        </p:nvSpPr>
+        <p:spPr>
+          <a:xfrm>
+            <a:off x="7759598" y="4169664"/>
+            <a:ext cx="676656" cy="384048"/>
           </a:xfrm>
           <a:prstGeom prst="rect">
             <a:avLst>
-              <a:gd name="adj" fmla="val 9615"/>
+              <a:gd name="adj" fmla="val 9524"/>
             </a:avLst>
           </a:prstGeom>
           <a:solidFill>
@@ -24251,1114 +24875,46 @@
           </a:solidFill>
           <a:ln w="12700">
             <a:solidFill>
-              <a:srgbClr val="0D9488"/>
-            </a:solidFill>
-            <a:prstDash val="solid"/>
-          </a:ln>
-        </p:spPr>
-      </p:sp>
-      <p:sp>
-        <p:nvSpPr>
-          <p:cNvPr id="38" name="Text 36"/>
-          <p:cNvSpPr/>
-          <p:nvPr/>
-        </p:nvSpPr>
-        <p:spPr>
-          <a:xfrm>
-            <a:off x="4581144" y="3364992"/>
-            <a:ext cx="1225296" cy="475488"/>
-          </a:xfrm>
-          <a:prstGeom prst="rect">
-            <a:avLst/>
-          </a:prstGeom>
-          <a:noFill/>
-          <a:ln/>
-        </p:spPr>
-        <p:txBody>
-          <a:bodyPr wrap="square" lIns="0" tIns="0" rIns="0" bIns="0" rtlCol="0" anchor="ctr"/>
-          <a:lstStyle/>
-          <a:p>
-            <a:pPr algn="ctr" indent="0" marL="0">
-              <a:buNone/>
-            </a:pPr>
-            <a:r>
-              <a:rPr lang="en-US" sz="1400" b="1" dirty="0">
-                <a:solidFill>
-                  <a:srgbClr val="0D9488"/>
+              <a:srgbClr val="DB2777"/>
+            </a:solidFill>
+            <a:prstDash val="solid"/>
+          </a:ln>
+        </p:spPr>
+      </p:sp>
+      <p:sp>
+        <p:nvSpPr>
+          <p:cNvPr id="61" name="Text 59"/>
+          <p:cNvSpPr/>
+          <p:nvPr/>
+        </p:nvSpPr>
+        <p:spPr>
+          <a:xfrm>
+            <a:off x="7759598" y="4169664"/>
+            <a:ext cx="676656" cy="384048"/>
+          </a:xfrm>
+          <a:prstGeom prst="rect">
+            <a:avLst/>
+          </a:prstGeom>
+          <a:noFill/>
+          <a:ln/>
+        </p:spPr>
+        <p:txBody>
+          <a:bodyPr wrap="square" lIns="0" tIns="0" rIns="0" bIns="0" rtlCol="0" anchor="ctr"/>
+          <a:lstStyle/>
+          <a:p>
+            <a:pPr algn="ctr" indent="0" marL="0">
+              <a:buNone/>
+            </a:pPr>
+            <a:r>
+              <a:rPr lang="en-US" sz="900" b="1" dirty="0">
+                <a:solidFill>
+                  <a:srgbClr val="9D174D"/>
                 </a:solidFill>
                 <a:latin typeface="Trebuchet MS" pitchFamily="34" charset="0"/>
                 <a:ea typeface="Trebuchet MS" pitchFamily="34" charset="-122"/>
                 <a:cs typeface="Trebuchet MS" pitchFamily="34" charset="-120"/>
               </a:rPr>
-              <a:t>ag</a:t>
-            </a:r>
-            <a:endParaRPr lang="en-US" sz="1400" dirty="0"/>
-          </a:p>
-        </p:txBody>
-      </p:sp>
-      <p:sp>
-        <p:nvSpPr>
-          <p:cNvPr id="39" name="Text 37"/>
-          <p:cNvSpPr/>
-          <p:nvPr/>
-        </p:nvSpPr>
-        <p:spPr>
-          <a:xfrm>
-            <a:off x="5806440" y="3364992"/>
-            <a:ext cx="76200" cy="475488"/>
-          </a:xfrm>
-          <a:prstGeom prst="rect">
-            <a:avLst/>
-          </a:prstGeom>
-          <a:noFill/>
-          <a:ln/>
-        </p:spPr>
-        <p:txBody>
-          <a:bodyPr wrap="square" lIns="0" tIns="0" rIns="0" bIns="0" rtlCol="0" anchor="ctr"/>
-          <a:lstStyle/>
-          <a:p>
-            <a:pPr algn="ctr" indent="0" marL="0">
-              <a:buNone/>
-            </a:pPr>
-            <a:r>
-              <a:rPr lang="en-US" sz="1600" b="1" dirty="0">
-                <a:solidFill>
-                  <a:srgbClr val="0D9488"/>
-                </a:solidFill>
-                <a:latin typeface="Trebuchet MS" pitchFamily="34" charset="0"/>
-                <a:ea typeface="Trebuchet MS" pitchFamily="34" charset="-122"/>
-                <a:cs typeface="Trebuchet MS" pitchFamily="34" charset="-120"/>
-              </a:rPr>
-              <a:t>·</a:t>
-            </a:r>
-            <a:endParaRPr lang="en-US" sz="1600" dirty="0"/>
-          </a:p>
-        </p:txBody>
-      </p:sp>
-      <p:sp>
-        <p:nvSpPr>
-          <p:cNvPr id="40" name="Shape 38"/>
-          <p:cNvSpPr/>
-          <p:nvPr/>
-        </p:nvSpPr>
-        <p:spPr>
-          <a:xfrm>
-            <a:off x="5882640" y="3364992"/>
-            <a:ext cx="1225296" cy="475488"/>
-          </a:xfrm>
-          <a:prstGeom prst="rect">
-            <a:avLst>
-              <a:gd name="adj" fmla="val 9615"/>
-            </a:avLst>
-          </a:prstGeom>
-          <a:solidFill>
-            <a:srgbClr val="FFFFFF"/>
-          </a:solidFill>
-          <a:ln w="12700">
-            <a:solidFill>
-              <a:srgbClr val="0D9488"/>
-            </a:solidFill>
-            <a:prstDash val="solid"/>
-          </a:ln>
-        </p:spPr>
-      </p:sp>
-      <p:sp>
-        <p:nvSpPr>
-          <p:cNvPr id="41" name="Text 39"/>
-          <p:cNvSpPr/>
-          <p:nvPr/>
-        </p:nvSpPr>
-        <p:spPr>
-          <a:xfrm>
-            <a:off x="5882640" y="3364992"/>
-            <a:ext cx="1225296" cy="475488"/>
-          </a:xfrm>
-          <a:prstGeom prst="rect">
-            <a:avLst/>
-          </a:prstGeom>
-          <a:noFill/>
-          <a:ln/>
-        </p:spPr>
-        <p:txBody>
-          <a:bodyPr wrap="square" lIns="0" tIns="0" rIns="0" bIns="0" rtlCol="0" anchor="ctr"/>
-          <a:lstStyle/>
-          <a:p>
-            <a:pPr algn="ctr" indent="0" marL="0">
-              <a:buNone/>
-            </a:pPr>
-            <a:r>
-              <a:rPr lang="en-US" sz="1400" b="1" dirty="0">
-                <a:solidFill>
-                  <a:srgbClr val="0D9488"/>
-                </a:solidFill>
-                <a:latin typeface="Trebuchet MS" pitchFamily="34" charset="0"/>
-                <a:ea typeface="Trebuchet MS" pitchFamily="34" charset="-122"/>
-                <a:cs typeface="Trebuchet MS" pitchFamily="34" charset="-120"/>
-              </a:rPr>
-              <a:t>ing</a:t>
-            </a:r>
-            <a:endParaRPr lang="en-US" sz="1400" dirty="0"/>
-          </a:p>
-        </p:txBody>
-      </p:sp>
-      <p:sp>
-        <p:nvSpPr>
-          <p:cNvPr id="42" name="Text 40"/>
-          <p:cNvSpPr/>
-          <p:nvPr/>
-        </p:nvSpPr>
-        <p:spPr>
-          <a:xfrm>
-            <a:off x="7107936" y="3364992"/>
-            <a:ext cx="76200" cy="475488"/>
-          </a:xfrm>
-          <a:prstGeom prst="rect">
-            <a:avLst/>
-          </a:prstGeom>
-          <a:noFill/>
-          <a:ln/>
-        </p:spPr>
-        <p:txBody>
-          <a:bodyPr wrap="square" lIns="0" tIns="0" rIns="0" bIns="0" rtlCol="0" anchor="ctr"/>
-          <a:lstStyle/>
-          <a:p>
-            <a:pPr algn="ctr" indent="0" marL="0">
-              <a:buNone/>
-            </a:pPr>
-            <a:r>
-              <a:rPr lang="en-US" sz="1600" b="1" dirty="0">
-                <a:solidFill>
-                  <a:srgbClr val="0D9488"/>
-                </a:solidFill>
-                <a:latin typeface="Trebuchet MS" pitchFamily="34" charset="0"/>
-                <a:ea typeface="Trebuchet MS" pitchFamily="34" charset="-122"/>
-                <a:cs typeface="Trebuchet MS" pitchFamily="34" charset="-120"/>
-              </a:rPr>
-              <a:t>·</a:t>
-            </a:r>
-            <a:endParaRPr lang="en-US" sz="1600" dirty="0"/>
-          </a:p>
-        </p:txBody>
-      </p:sp>
-      <p:sp>
-        <p:nvSpPr>
-          <p:cNvPr id="43" name="Shape 41"/>
-          <p:cNvSpPr/>
-          <p:nvPr/>
-        </p:nvSpPr>
-        <p:spPr>
-          <a:xfrm>
-            <a:off x="7184136" y="3364992"/>
-            <a:ext cx="1225296" cy="475488"/>
-          </a:xfrm>
-          <a:prstGeom prst="rect">
-            <a:avLst>
-              <a:gd name="adj" fmla="val 9615"/>
-            </a:avLst>
-          </a:prstGeom>
-          <a:solidFill>
-            <a:srgbClr val="FFFFFF"/>
-          </a:solidFill>
-          <a:ln w="12700">
-            <a:solidFill>
-              <a:srgbClr val="0D9488"/>
-            </a:solidFill>
-            <a:prstDash val="solid"/>
-          </a:ln>
-        </p:spPr>
-      </p:sp>
-      <p:sp>
-        <p:nvSpPr>
-          <p:cNvPr id="44" name="Text 42"/>
-          <p:cNvSpPr/>
-          <p:nvPr/>
-        </p:nvSpPr>
-        <p:spPr>
-          <a:xfrm>
-            <a:off x="7184136" y="3364992"/>
-            <a:ext cx="1225296" cy="475488"/>
-          </a:xfrm>
-          <a:prstGeom prst="rect">
-            <a:avLst/>
-          </a:prstGeom>
-          <a:noFill/>
-          <a:ln/>
-        </p:spPr>
-        <p:txBody>
-          <a:bodyPr wrap="square" lIns="0" tIns="0" rIns="0" bIns="0" rtlCol="0" anchor="ctr"/>
-          <a:lstStyle/>
-          <a:p>
-            <a:pPr algn="ctr" indent="0" marL="0">
-              <a:buNone/>
-            </a:pPr>
-            <a:r>
-              <a:rPr lang="en-US" sz="1400" b="1" dirty="0">
-                <a:solidFill>
-                  <a:srgbClr val="0D9488"/>
-                </a:solidFill>
-                <a:latin typeface="Trebuchet MS" pitchFamily="34" charset="0"/>
-                <a:ea typeface="Trebuchet MS" pitchFamily="34" charset="-122"/>
-                <a:cs typeface="Trebuchet MS" pitchFamily="34" charset="-120"/>
-              </a:rPr>
-              <a:t>ly</a:t>
-            </a:r>
-            <a:endParaRPr lang="en-US" sz="1400" dirty="0"/>
-          </a:p>
-        </p:txBody>
-      </p:sp>
-      <p:sp>
-        <p:nvSpPr>
-          <p:cNvPr id="45" name="Shape 43"/>
-          <p:cNvSpPr/>
-          <p:nvPr/>
-        </p:nvSpPr>
-        <p:spPr>
-          <a:xfrm>
-            <a:off x="365760" y="4096512"/>
-            <a:ext cx="1371600" cy="804672"/>
-          </a:xfrm>
-          <a:prstGeom prst="rect">
-            <a:avLst>
-              <a:gd name="adj" fmla="val 6818"/>
-            </a:avLst>
-          </a:prstGeom>
-          <a:solidFill>
-            <a:srgbClr val="E2E8F0"/>
-          </a:solidFill>
-          <a:ln w="12700">
-            <a:solidFill>
-              <a:srgbClr val="E2E8F0"/>
-            </a:solidFill>
-            <a:prstDash val="solid"/>
-          </a:ln>
-        </p:spPr>
-      </p:sp>
-      <p:sp>
-        <p:nvSpPr>
-          <p:cNvPr id="46" name="Text 44"/>
-          <p:cNvSpPr/>
-          <p:nvPr/>
-        </p:nvSpPr>
-        <p:spPr>
-          <a:xfrm>
-            <a:off x="365760" y="4096512"/>
-            <a:ext cx="1371600" cy="804672"/>
-          </a:xfrm>
-          <a:prstGeom prst="rect">
-            <a:avLst/>
-          </a:prstGeom>
-          <a:noFill/>
-          <a:ln/>
-        </p:spPr>
-        <p:txBody>
-          <a:bodyPr wrap="square" lIns="0" tIns="0" rIns="0" bIns="0" rtlCol="0" anchor="ctr"/>
-          <a:lstStyle/>
-          <a:p>
-            <a:pPr algn="ctr" indent="0" marL="0">
-              <a:buNone/>
-            </a:pPr>
-            <a:r>
-              <a:rPr lang="en-US" sz="1100" b="1" dirty="0">
-                <a:solidFill>
-                  <a:srgbClr val="475569"/>
-                </a:solidFill>
-                <a:latin typeface="Trebuchet MS" pitchFamily="34" charset="0"/>
-                <a:ea typeface="Trebuchet MS" pitchFamily="34" charset="-122"/>
-                <a:cs typeface="Trebuchet MS" pitchFamily="34" charset="-120"/>
-              </a:rPr>
-              <a:t>Phonemes</a:t>
-            </a:r>
-            <a:endParaRPr lang="en-US" sz="1100" dirty="0"/>
-          </a:p>
-        </p:txBody>
-      </p:sp>
-      <p:sp>
-        <p:nvSpPr>
-          <p:cNvPr id="47" name="Shape 45"/>
-          <p:cNvSpPr/>
-          <p:nvPr/>
-        </p:nvSpPr>
-        <p:spPr>
-          <a:xfrm>
-            <a:off x="1874520" y="4096512"/>
-            <a:ext cx="6903720" cy="804672"/>
-          </a:xfrm>
-          <a:prstGeom prst="rect">
-            <a:avLst>
-              <a:gd name="adj" fmla="val 6818"/>
-            </a:avLst>
-          </a:prstGeom>
-          <a:solidFill>
-            <a:srgbClr val="FCE7F3"/>
-          </a:solidFill>
-          <a:ln w="12700">
-            <a:solidFill>
-              <a:srgbClr val="DB2777"/>
-            </a:solidFill>
-            <a:prstDash val="solid"/>
-          </a:ln>
-        </p:spPr>
-      </p:sp>
-      <p:sp>
-        <p:nvSpPr>
-          <p:cNvPr id="48" name="Shape 46"/>
-          <p:cNvSpPr/>
-          <p:nvPr/>
-        </p:nvSpPr>
-        <p:spPr>
-          <a:xfrm>
-            <a:off x="1952244" y="4169664"/>
-            <a:ext cx="543652" cy="384048"/>
-          </a:xfrm>
-          <a:prstGeom prst="rect">
-            <a:avLst>
-              <a:gd name="adj" fmla="val 9524"/>
-            </a:avLst>
-          </a:prstGeom>
-          <a:solidFill>
-            <a:srgbClr val="FFFFFF"/>
-          </a:solidFill>
-          <a:ln w="12700">
-            <a:solidFill>
-              <a:srgbClr val="DB2777"/>
-            </a:solidFill>
-            <a:prstDash val="solid"/>
-          </a:ln>
-        </p:spPr>
-      </p:sp>
-      <p:sp>
-        <p:nvSpPr>
-          <p:cNvPr id="49" name="Text 47"/>
-          <p:cNvSpPr/>
-          <p:nvPr/>
-        </p:nvSpPr>
-        <p:spPr>
-          <a:xfrm>
-            <a:off x="1952244" y="4169664"/>
-            <a:ext cx="543652" cy="384048"/>
-          </a:xfrm>
-          <a:prstGeom prst="rect">
-            <a:avLst/>
-          </a:prstGeom>
-          <a:noFill/>
-          <a:ln/>
-        </p:spPr>
-        <p:txBody>
-          <a:bodyPr wrap="square" lIns="0" tIns="0" rIns="0" bIns="0" rtlCol="0" anchor="ctr"/>
-          <a:lstStyle/>
-          <a:p>
-            <a:pPr algn="ctr" indent="0" marL="0">
-              <a:buNone/>
-            </a:pPr>
-            <a:r>
-              <a:rPr lang="en-US" sz="900" b="1" dirty="0">
-                <a:solidFill>
-                  <a:srgbClr val="9D174D"/>
-                </a:solidFill>
-                <a:latin typeface="Trebuchet MS" pitchFamily="34" charset="0"/>
-                <a:ea typeface="Trebuchet MS" pitchFamily="34" charset="-122"/>
-                <a:cs typeface="Trebuchet MS" pitchFamily="34" charset="-120"/>
-              </a:rPr>
-              <a:t>e</a:t>
-            </a:r>
-            <a:endParaRPr lang="en-US" sz="900" dirty="0"/>
-          </a:p>
-        </p:txBody>
-      </p:sp>
-      <p:sp>
-        <p:nvSpPr>
-          <p:cNvPr id="50" name="Shape 48"/>
-          <p:cNvSpPr/>
-          <p:nvPr/>
-        </p:nvSpPr>
-        <p:spPr>
-          <a:xfrm>
-            <a:off x="2546188" y="4169664"/>
-            <a:ext cx="543652" cy="384048"/>
-          </a:xfrm>
-          <a:prstGeom prst="rect">
-            <a:avLst>
-              <a:gd name="adj" fmla="val 9524"/>
-            </a:avLst>
-          </a:prstGeom>
-          <a:solidFill>
-            <a:srgbClr val="FFFFFF"/>
-          </a:solidFill>
-          <a:ln w="12700">
-            <a:solidFill>
-              <a:srgbClr val="DB2777"/>
-            </a:solidFill>
-            <a:prstDash val="solid"/>
-          </a:ln>
-        </p:spPr>
-      </p:sp>
-      <p:sp>
-        <p:nvSpPr>
-          <p:cNvPr id="51" name="Text 49"/>
-          <p:cNvSpPr/>
-          <p:nvPr/>
-        </p:nvSpPr>
-        <p:spPr>
-          <a:xfrm>
-            <a:off x="2546188" y="4169664"/>
-            <a:ext cx="543652" cy="384048"/>
-          </a:xfrm>
-          <a:prstGeom prst="rect">
-            <a:avLst/>
-          </a:prstGeom>
-          <a:noFill/>
-          <a:ln/>
-        </p:spPr>
-        <p:txBody>
-          <a:bodyPr wrap="square" lIns="0" tIns="0" rIns="0" bIns="0" rtlCol="0" anchor="ctr"/>
-          <a:lstStyle/>
-          <a:p>
-            <a:pPr algn="ctr" indent="0" marL="0">
-              <a:buNone/>
-            </a:pPr>
-            <a:r>
-              <a:rPr lang="en-US" sz="900" b="1" dirty="0">
-                <a:solidFill>
-                  <a:srgbClr val="9D174D"/>
-                </a:solidFill>
-                <a:latin typeface="Trebuchet MS" pitchFamily="34" charset="0"/>
-                <a:ea typeface="Trebuchet MS" pitchFamily="34" charset="-122"/>
-                <a:cs typeface="Trebuchet MS" pitchFamily="34" charset="-120"/>
-              </a:rPr>
-              <a:t>n</a:t>
-            </a:r>
-            <a:endParaRPr lang="en-US" sz="900" dirty="0"/>
-          </a:p>
-        </p:txBody>
-      </p:sp>
-      <p:sp>
-        <p:nvSpPr>
-          <p:cNvPr id="52" name="Shape 50"/>
-          <p:cNvSpPr/>
-          <p:nvPr/>
-        </p:nvSpPr>
-        <p:spPr>
-          <a:xfrm>
-            <a:off x="3140133" y="4169664"/>
-            <a:ext cx="543652" cy="384048"/>
-          </a:xfrm>
-          <a:prstGeom prst="rect">
-            <a:avLst>
-              <a:gd name="adj" fmla="val 9524"/>
-            </a:avLst>
-          </a:prstGeom>
-          <a:solidFill>
-            <a:srgbClr val="FFFFFF"/>
-          </a:solidFill>
-          <a:ln w="12700">
-            <a:solidFill>
-              <a:srgbClr val="DB2777"/>
-            </a:solidFill>
-            <a:prstDash val="solid"/>
-          </a:ln>
-        </p:spPr>
-      </p:sp>
-      <p:sp>
-        <p:nvSpPr>
-          <p:cNvPr id="53" name="Text 51"/>
-          <p:cNvSpPr/>
-          <p:nvPr/>
-        </p:nvSpPr>
-        <p:spPr>
-          <a:xfrm>
-            <a:off x="3140133" y="4169664"/>
-            <a:ext cx="543652" cy="384048"/>
-          </a:xfrm>
-          <a:prstGeom prst="rect">
-            <a:avLst/>
-          </a:prstGeom>
-          <a:noFill/>
-          <a:ln/>
-        </p:spPr>
-        <p:txBody>
-          <a:bodyPr wrap="square" lIns="0" tIns="0" rIns="0" bIns="0" rtlCol="0" anchor="ctr"/>
-          <a:lstStyle/>
-          <a:p>
-            <a:pPr algn="ctr" indent="0" marL="0">
-              <a:buNone/>
-            </a:pPr>
-            <a:r>
-              <a:rPr lang="en-US" sz="900" b="1" dirty="0">
-                <a:solidFill>
-                  <a:srgbClr val="9D174D"/>
-                </a:solidFill>
-                <a:latin typeface="Trebuchet MS" pitchFamily="34" charset="0"/>
-                <a:ea typeface="Trebuchet MS" pitchFamily="34" charset="-122"/>
-                <a:cs typeface="Trebuchet MS" pitchFamily="34" charset="-120"/>
-              </a:rPr>
-              <a:t>c</a:t>
-            </a:r>
-            <a:endParaRPr lang="en-US" sz="900" dirty="0"/>
-          </a:p>
-        </p:txBody>
-      </p:sp>
-      <p:sp>
-        <p:nvSpPr>
-          <p:cNvPr id="54" name="Text 52"/>
-          <p:cNvSpPr/>
-          <p:nvPr/>
-        </p:nvSpPr>
-        <p:spPr>
-          <a:xfrm>
-            <a:off x="3140133" y="4572000"/>
-            <a:ext cx="543652" cy="219456"/>
-          </a:xfrm>
-          <a:prstGeom prst="rect">
-            <a:avLst/>
-          </a:prstGeom>
-          <a:noFill/>
-          <a:ln/>
-        </p:spPr>
-        <p:txBody>
-          <a:bodyPr wrap="square" lIns="0" tIns="0" rIns="0" bIns="0" rtlCol="0" anchor="t"/>
-          <a:lstStyle/>
-          <a:p>
-            <a:pPr algn="ctr" indent="0" marL="0">
-              <a:buNone/>
-            </a:pPr>
-            <a:r>
-              <a:rPr lang="en-US" sz="750" i="1" dirty="0">
-                <a:solidFill>
-                  <a:srgbClr val="94A3B8"/>
-                </a:solidFill>
-                <a:latin typeface="Calibri" pitchFamily="34" charset="0"/>
-                <a:ea typeface="Calibri" pitchFamily="34" charset="-122"/>
-                <a:cs typeface="Calibri" pitchFamily="34" charset="-120"/>
-              </a:rPr>
-              <a:t>/k/</a:t>
-            </a:r>
-            <a:endParaRPr lang="en-US" sz="750" dirty="0"/>
-          </a:p>
-        </p:txBody>
-      </p:sp>
-      <p:sp>
-        <p:nvSpPr>
-          <p:cNvPr id="55" name="Shape 53"/>
-          <p:cNvSpPr/>
-          <p:nvPr/>
-        </p:nvSpPr>
-        <p:spPr>
-          <a:xfrm>
-            <a:off x="3734077" y="4169664"/>
-            <a:ext cx="543652" cy="384048"/>
-          </a:xfrm>
-          <a:prstGeom prst="rect">
-            <a:avLst>
-              <a:gd name="adj" fmla="val 9524"/>
-            </a:avLst>
-          </a:prstGeom>
-          <a:solidFill>
-            <a:srgbClr val="FFFFFF"/>
-          </a:solidFill>
-          <a:ln w="12700">
-            <a:solidFill>
-              <a:srgbClr val="DB2777"/>
-            </a:solidFill>
-            <a:prstDash val="solid"/>
-          </a:ln>
-        </p:spPr>
-      </p:sp>
-      <p:sp>
-        <p:nvSpPr>
-          <p:cNvPr id="56" name="Text 54"/>
-          <p:cNvSpPr/>
-          <p:nvPr/>
-        </p:nvSpPr>
-        <p:spPr>
-          <a:xfrm>
-            <a:off x="3734077" y="4169664"/>
-            <a:ext cx="543652" cy="384048"/>
-          </a:xfrm>
-          <a:prstGeom prst="rect">
-            <a:avLst/>
-          </a:prstGeom>
-          <a:noFill/>
-          <a:ln/>
-        </p:spPr>
-        <p:txBody>
-          <a:bodyPr wrap="square" lIns="0" tIns="0" rIns="0" bIns="0" rtlCol="0" anchor="ctr"/>
-          <a:lstStyle/>
-          <a:p>
-            <a:pPr algn="ctr" indent="0" marL="0">
-              <a:buNone/>
-            </a:pPr>
-            <a:r>
-              <a:rPr lang="en-US" sz="900" b="1" dirty="0">
-                <a:solidFill>
-                  <a:srgbClr val="9D174D"/>
-                </a:solidFill>
-                <a:latin typeface="Trebuchet MS" pitchFamily="34" charset="0"/>
-                <a:ea typeface="Trebuchet MS" pitchFamily="34" charset="-122"/>
-                <a:cs typeface="Trebuchet MS" pitchFamily="34" charset="-120"/>
-              </a:rPr>
-              <a:t>ou</a:t>
-            </a:r>
-            <a:endParaRPr lang="en-US" sz="900" dirty="0"/>
-          </a:p>
-        </p:txBody>
-      </p:sp>
-      <p:sp>
-        <p:nvSpPr>
-          <p:cNvPr id="57" name="Shape 55"/>
-          <p:cNvSpPr/>
-          <p:nvPr/>
-        </p:nvSpPr>
-        <p:spPr>
-          <a:xfrm>
-            <a:off x="4328021" y="4169664"/>
-            <a:ext cx="543652" cy="384048"/>
-          </a:xfrm>
-          <a:prstGeom prst="rect">
-            <a:avLst>
-              <a:gd name="adj" fmla="val 9524"/>
-            </a:avLst>
-          </a:prstGeom>
-          <a:solidFill>
-            <a:srgbClr val="FFFFFF"/>
-          </a:solidFill>
-          <a:ln w="12700">
-            <a:solidFill>
-              <a:srgbClr val="DB2777"/>
-            </a:solidFill>
-            <a:prstDash val="solid"/>
-          </a:ln>
-        </p:spPr>
-      </p:sp>
-      <p:sp>
-        <p:nvSpPr>
-          <p:cNvPr id="58" name="Text 56"/>
-          <p:cNvSpPr/>
-          <p:nvPr/>
-        </p:nvSpPr>
-        <p:spPr>
-          <a:xfrm>
-            <a:off x="4328021" y="4169664"/>
-            <a:ext cx="543652" cy="384048"/>
-          </a:xfrm>
-          <a:prstGeom prst="rect">
-            <a:avLst/>
-          </a:prstGeom>
-          <a:noFill/>
-          <a:ln/>
-        </p:spPr>
-        <p:txBody>
-          <a:bodyPr wrap="square" lIns="0" tIns="0" rIns="0" bIns="0" rtlCol="0" anchor="ctr"/>
-          <a:lstStyle/>
-          <a:p>
-            <a:pPr algn="ctr" indent="0" marL="0">
-              <a:buNone/>
-            </a:pPr>
-            <a:r>
-              <a:rPr lang="en-US" sz="900" b="1" dirty="0">
-                <a:solidFill>
-                  <a:srgbClr val="9D174D"/>
-                </a:solidFill>
-                <a:latin typeface="Trebuchet MS" pitchFamily="34" charset="0"/>
-                <a:ea typeface="Trebuchet MS" pitchFamily="34" charset="-122"/>
-                <a:cs typeface="Trebuchet MS" pitchFamily="34" charset="-120"/>
-              </a:rPr>
-              <a:t>r</a:t>
-            </a:r>
-            <a:endParaRPr lang="en-US" sz="900" dirty="0"/>
-          </a:p>
-        </p:txBody>
-      </p:sp>
-      <p:sp>
-        <p:nvSpPr>
-          <p:cNvPr id="59" name="Shape 57"/>
-          <p:cNvSpPr/>
-          <p:nvPr/>
-        </p:nvSpPr>
-        <p:spPr>
-          <a:xfrm>
-            <a:off x="4921966" y="4169664"/>
-            <a:ext cx="543652" cy="384048"/>
-          </a:xfrm>
-          <a:prstGeom prst="rect">
-            <a:avLst>
-              <a:gd name="adj" fmla="val 9524"/>
-            </a:avLst>
-          </a:prstGeom>
-          <a:solidFill>
-            <a:srgbClr val="FFFFFF"/>
-          </a:solidFill>
-          <a:ln w="12700">
-            <a:solidFill>
-              <a:srgbClr val="DB2777"/>
-            </a:solidFill>
-            <a:prstDash val="solid"/>
-          </a:ln>
-        </p:spPr>
-      </p:sp>
-      <p:sp>
-        <p:nvSpPr>
-          <p:cNvPr id="60" name="Text 58"/>
-          <p:cNvSpPr/>
-          <p:nvPr/>
-        </p:nvSpPr>
-        <p:spPr>
-          <a:xfrm>
-            <a:off x="4921966" y="4169664"/>
-            <a:ext cx="543652" cy="384048"/>
-          </a:xfrm>
-          <a:prstGeom prst="rect">
-            <a:avLst/>
-          </a:prstGeom>
-          <a:noFill/>
-          <a:ln/>
-        </p:spPr>
-        <p:txBody>
-          <a:bodyPr wrap="square" lIns="0" tIns="0" rIns="0" bIns="0" rtlCol="0" anchor="ctr"/>
-          <a:lstStyle/>
-          <a:p>
-            <a:pPr algn="ctr" indent="0" marL="0">
-              <a:buNone/>
-            </a:pPr>
-            <a:r>
-              <a:rPr lang="en-US" sz="900" b="1" dirty="0">
-                <a:solidFill>
-                  <a:srgbClr val="9D174D"/>
-                </a:solidFill>
-                <a:latin typeface="Trebuchet MS" pitchFamily="34" charset="0"/>
-                <a:ea typeface="Trebuchet MS" pitchFamily="34" charset="-122"/>
-                <a:cs typeface="Trebuchet MS" pitchFamily="34" charset="-120"/>
-              </a:rPr>
-              <a:t>a</a:t>
-            </a:r>
-            <a:endParaRPr lang="en-US" sz="900" dirty="0"/>
-          </a:p>
-        </p:txBody>
-      </p:sp>
-      <p:sp>
-        <p:nvSpPr>
-          <p:cNvPr id="61" name="Shape 59"/>
-          <p:cNvSpPr/>
-          <p:nvPr/>
-        </p:nvSpPr>
-        <p:spPr>
-          <a:xfrm>
-            <a:off x="5515910" y="4169664"/>
-            <a:ext cx="543652" cy="384048"/>
-          </a:xfrm>
-          <a:prstGeom prst="rect">
-            <a:avLst>
-              <a:gd name="adj" fmla="val 9524"/>
-            </a:avLst>
-          </a:prstGeom>
-          <a:solidFill>
-            <a:srgbClr val="FFFFFF"/>
-          </a:solidFill>
-          <a:ln w="12700">
-            <a:solidFill>
-              <a:srgbClr val="DB2777"/>
-            </a:solidFill>
-            <a:prstDash val="solid"/>
-          </a:ln>
-        </p:spPr>
-      </p:sp>
-      <p:sp>
-        <p:nvSpPr>
-          <p:cNvPr id="62" name="Text 60"/>
-          <p:cNvSpPr/>
-          <p:nvPr/>
-        </p:nvSpPr>
-        <p:spPr>
-          <a:xfrm>
-            <a:off x="5515910" y="4169664"/>
-            <a:ext cx="543652" cy="384048"/>
-          </a:xfrm>
-          <a:prstGeom prst="rect">
-            <a:avLst/>
-          </a:prstGeom>
-          <a:noFill/>
-          <a:ln/>
-        </p:spPr>
-        <p:txBody>
-          <a:bodyPr wrap="square" lIns="0" tIns="0" rIns="0" bIns="0" rtlCol="0" anchor="ctr"/>
-          <a:lstStyle/>
-          <a:p>
-            <a:pPr algn="ctr" indent="0" marL="0">
-              <a:buNone/>
-            </a:pPr>
-            <a:r>
-              <a:rPr lang="en-US" sz="900" b="1" dirty="0">
-                <a:solidFill>
-                  <a:srgbClr val="9D174D"/>
-                </a:solidFill>
-                <a:latin typeface="Trebuchet MS" pitchFamily="34" charset="0"/>
-                <a:ea typeface="Trebuchet MS" pitchFamily="34" charset="-122"/>
-                <a:cs typeface="Trebuchet MS" pitchFamily="34" charset="-120"/>
-              </a:rPr>
-              <a:t>g</a:t>
-            </a:r>
-            <a:endParaRPr lang="en-US" sz="900" dirty="0"/>
-          </a:p>
-        </p:txBody>
-      </p:sp>
-      <p:sp>
-        <p:nvSpPr>
-          <p:cNvPr id="63" name="Shape 61"/>
-          <p:cNvSpPr/>
-          <p:nvPr/>
-        </p:nvSpPr>
-        <p:spPr>
-          <a:xfrm>
-            <a:off x="6109855" y="4169664"/>
-            <a:ext cx="543652" cy="384048"/>
-          </a:xfrm>
-          <a:prstGeom prst="rect">
-            <a:avLst>
-              <a:gd name="adj" fmla="val 9524"/>
-            </a:avLst>
-          </a:prstGeom>
-          <a:solidFill>
-            <a:srgbClr val="FFFFFF"/>
-          </a:solidFill>
-          <a:ln w="12700">
-            <a:solidFill>
-              <a:srgbClr val="DB2777"/>
-            </a:solidFill>
-            <a:prstDash val="solid"/>
-          </a:ln>
-        </p:spPr>
-      </p:sp>
-      <p:sp>
-        <p:nvSpPr>
-          <p:cNvPr id="64" name="Text 62"/>
-          <p:cNvSpPr/>
-          <p:nvPr/>
-        </p:nvSpPr>
-        <p:spPr>
-          <a:xfrm>
-            <a:off x="6109855" y="4169664"/>
-            <a:ext cx="543652" cy="384048"/>
-          </a:xfrm>
-          <a:prstGeom prst="rect">
-            <a:avLst/>
-          </a:prstGeom>
-          <a:noFill/>
-          <a:ln/>
-        </p:spPr>
-        <p:txBody>
-          <a:bodyPr wrap="square" lIns="0" tIns="0" rIns="0" bIns="0" rtlCol="0" anchor="ctr"/>
-          <a:lstStyle/>
-          <a:p>
-            <a:pPr algn="ctr" indent="0" marL="0">
-              <a:buNone/>
-            </a:pPr>
-            <a:r>
-              <a:rPr lang="en-US" sz="900" b="1" dirty="0">
-                <a:solidFill>
-                  <a:srgbClr val="9D174D"/>
-                </a:solidFill>
-                <a:latin typeface="Trebuchet MS" pitchFamily="34" charset="0"/>
-                <a:ea typeface="Trebuchet MS" pitchFamily="34" charset="-122"/>
-                <a:cs typeface="Trebuchet MS" pitchFamily="34" charset="-120"/>
-              </a:rPr>
-              <a:t>i</a:t>
-            </a:r>
-            <a:endParaRPr lang="en-US" sz="900" dirty="0"/>
-          </a:p>
-        </p:txBody>
-      </p:sp>
-      <p:sp>
-        <p:nvSpPr>
-          <p:cNvPr id="65" name="Shape 63"/>
-          <p:cNvSpPr/>
-          <p:nvPr/>
-        </p:nvSpPr>
-        <p:spPr>
-          <a:xfrm>
-            <a:off x="6703799" y="4169664"/>
-            <a:ext cx="543652" cy="384048"/>
-          </a:xfrm>
-          <a:prstGeom prst="rect">
-            <a:avLst>
-              <a:gd name="adj" fmla="val 9524"/>
-            </a:avLst>
-          </a:prstGeom>
-          <a:solidFill>
-            <a:srgbClr val="FFFFFF"/>
-          </a:solidFill>
-          <a:ln w="12700">
-            <a:solidFill>
-              <a:srgbClr val="DB2777"/>
-            </a:solidFill>
-            <a:prstDash val="solid"/>
-          </a:ln>
-        </p:spPr>
-      </p:sp>
-      <p:sp>
-        <p:nvSpPr>
-          <p:cNvPr id="66" name="Text 64"/>
-          <p:cNvSpPr/>
-          <p:nvPr/>
-        </p:nvSpPr>
-        <p:spPr>
-          <a:xfrm>
-            <a:off x="6703799" y="4169664"/>
-            <a:ext cx="543652" cy="384048"/>
-          </a:xfrm>
-          <a:prstGeom prst="rect">
-            <a:avLst/>
-          </a:prstGeom>
-          <a:noFill/>
-          <a:ln/>
-        </p:spPr>
-        <p:txBody>
-          <a:bodyPr wrap="square" lIns="0" tIns="0" rIns="0" bIns="0" rtlCol="0" anchor="ctr"/>
-          <a:lstStyle/>
-          <a:p>
-            <a:pPr algn="ctr" indent="0" marL="0">
-              <a:buNone/>
-            </a:pPr>
-            <a:r>
-              <a:rPr lang="en-US" sz="900" b="1" dirty="0">
-                <a:solidFill>
-                  <a:srgbClr val="9D174D"/>
-                </a:solidFill>
-                <a:latin typeface="Trebuchet MS" pitchFamily="34" charset="0"/>
-                <a:ea typeface="Trebuchet MS" pitchFamily="34" charset="-122"/>
-                <a:cs typeface="Trebuchet MS" pitchFamily="34" charset="-120"/>
-              </a:rPr>
               <a:t>ng</a:t>
-            </a:r>
-            <a:endParaRPr lang="en-US" sz="900" dirty="0"/>
-          </a:p>
-        </p:txBody>
-      </p:sp>
-      <p:sp>
-        <p:nvSpPr>
-          <p:cNvPr id="67" name="Shape 65"/>
-          <p:cNvSpPr/>
-          <p:nvPr/>
-        </p:nvSpPr>
-        <p:spPr>
-          <a:xfrm>
-            <a:off x="7297743" y="4169664"/>
-            <a:ext cx="543652" cy="384048"/>
-          </a:xfrm>
-          <a:prstGeom prst="rect">
-            <a:avLst>
-              <a:gd name="adj" fmla="val 9524"/>
-            </a:avLst>
-          </a:prstGeom>
-          <a:solidFill>
-            <a:srgbClr val="FFFFFF"/>
-          </a:solidFill>
-          <a:ln w="12700">
-            <a:solidFill>
-              <a:srgbClr val="DB2777"/>
-            </a:solidFill>
-            <a:prstDash val="solid"/>
-          </a:ln>
-        </p:spPr>
-      </p:sp>
-      <p:sp>
-        <p:nvSpPr>
-          <p:cNvPr id="68" name="Text 66"/>
-          <p:cNvSpPr/>
-          <p:nvPr/>
-        </p:nvSpPr>
-        <p:spPr>
-          <a:xfrm>
-            <a:off x="7297743" y="4169664"/>
-            <a:ext cx="543652" cy="384048"/>
-          </a:xfrm>
-          <a:prstGeom prst="rect">
-            <a:avLst/>
-          </a:prstGeom>
-          <a:noFill/>
-          <a:ln/>
-        </p:spPr>
-        <p:txBody>
-          <a:bodyPr wrap="square" lIns="0" tIns="0" rIns="0" bIns="0" rtlCol="0" anchor="ctr"/>
-          <a:lstStyle/>
-          <a:p>
-            <a:pPr algn="ctr" indent="0" marL="0">
-              <a:buNone/>
-            </a:pPr>
-            <a:r>
-              <a:rPr lang="en-US" sz="900" b="1" dirty="0">
-                <a:solidFill>
-                  <a:srgbClr val="9D174D"/>
-                </a:solidFill>
-                <a:latin typeface="Trebuchet MS" pitchFamily="34" charset="0"/>
-                <a:ea typeface="Trebuchet MS" pitchFamily="34" charset="-122"/>
-                <a:cs typeface="Trebuchet MS" pitchFamily="34" charset="-120"/>
-              </a:rPr>
-              <a:t>l</a:t>
-            </a:r>
-            <a:endParaRPr lang="en-US" sz="900" dirty="0"/>
-          </a:p>
-        </p:txBody>
-      </p:sp>
-      <p:sp>
-        <p:nvSpPr>
-          <p:cNvPr id="69" name="Shape 67"/>
-          <p:cNvSpPr/>
-          <p:nvPr/>
-        </p:nvSpPr>
-        <p:spPr>
-          <a:xfrm>
-            <a:off x="7891688" y="4169664"/>
-            <a:ext cx="543652" cy="384048"/>
-          </a:xfrm>
-          <a:prstGeom prst="rect">
-            <a:avLst>
-              <a:gd name="adj" fmla="val 9524"/>
-            </a:avLst>
-          </a:prstGeom>
-          <a:solidFill>
-            <a:srgbClr val="FFFFFF"/>
-          </a:solidFill>
-          <a:ln w="12700">
-            <a:solidFill>
-              <a:srgbClr val="DB2777"/>
-            </a:solidFill>
-            <a:prstDash val="solid"/>
-          </a:ln>
-        </p:spPr>
-      </p:sp>
-      <p:sp>
-        <p:nvSpPr>
-          <p:cNvPr id="70" name="Text 68"/>
-          <p:cNvSpPr/>
-          <p:nvPr/>
-        </p:nvSpPr>
-        <p:spPr>
-          <a:xfrm>
-            <a:off x="7891688" y="4169664"/>
-            <a:ext cx="543652" cy="384048"/>
-          </a:xfrm>
-          <a:prstGeom prst="rect">
-            <a:avLst/>
-          </a:prstGeom>
-          <a:noFill/>
-          <a:ln/>
-        </p:spPr>
-        <p:txBody>
-          <a:bodyPr wrap="square" lIns="0" tIns="0" rIns="0" bIns="0" rtlCol="0" anchor="ctr"/>
-          <a:lstStyle/>
-          <a:p>
-            <a:pPr algn="ctr" indent="0" marL="0">
-              <a:buNone/>
-            </a:pPr>
-            <a:r>
-              <a:rPr lang="en-US" sz="900" b="1" dirty="0">
-                <a:solidFill>
-                  <a:srgbClr val="9D174D"/>
-                </a:solidFill>
-                <a:latin typeface="Trebuchet MS" pitchFamily="34" charset="0"/>
-                <a:ea typeface="Trebuchet MS" pitchFamily="34" charset="-122"/>
-                <a:cs typeface="Trebuchet MS" pitchFamily="34" charset="-120"/>
-              </a:rPr>
-              <a:t>y</a:t>
             </a:r>
             <a:endParaRPr lang="en-US" sz="900" dirty="0"/>
           </a:p>
@@ -25789,7 +25345,7 @@
                 <a:ea typeface="Trebuchet MS" pitchFamily="34" charset="-122"/>
                 <a:cs typeface="Trebuchet MS" pitchFamily="34" charset="-120"/>
               </a:rPr>
-              <a:t>encouragement</a:t>
+              <a:t>encouragingly</a:t>
             </a:r>
             <a:endParaRPr lang="en-US" sz="2800" dirty="0"/>
           </a:p>
@@ -26616,7 +26172,7 @@
                 <a:ea typeface="Trebuchet MS" pitchFamily="34" charset="-122"/>
                 <a:cs typeface="Trebuchet MS" pitchFamily="34" charset="-120"/>
               </a:rPr>
-              <a:t>encouragement</a:t>
+              <a:t>encouragingly</a:t>
             </a:r>
             <a:endParaRPr lang="en-US" sz="2800" dirty="0"/>
           </a:p>
@@ -26696,8 +26252,8 @@
         </p:nvSpPr>
         <p:spPr>
           <a:xfrm>
-            <a:off x="2221992" y="2258568"/>
-            <a:ext cx="1828800" cy="292608"/>
+            <a:off x="1989734" y="2258568"/>
+            <a:ext cx="1581912" cy="292608"/>
           </a:xfrm>
           <a:prstGeom prst="rect">
             <a:avLst>
@@ -26730,8 +26286,8 @@
         </p:nvSpPr>
         <p:spPr>
           <a:xfrm>
-            <a:off x="2221992" y="2258568"/>
-            <a:ext cx="1828800" cy="292608"/>
+            <a:off x="1989734" y="2258568"/>
+            <a:ext cx="1581912" cy="292608"/>
           </a:xfrm>
           <a:prstGeom prst="rect">
             <a:avLst/>
@@ -26769,8 +26325,8 @@
         </p:nvSpPr>
         <p:spPr>
           <a:xfrm>
-            <a:off x="2221992" y="2569464"/>
-            <a:ext cx="1828800" cy="201168"/>
+            <a:off x="1989734" y="2569464"/>
+            <a:ext cx="1581912" cy="201168"/>
           </a:xfrm>
           <a:prstGeom prst="rect">
             <a:avLst/>
@@ -26808,8 +26364,8 @@
         </p:nvSpPr>
         <p:spPr>
           <a:xfrm>
-            <a:off x="4370832" y="2258568"/>
-            <a:ext cx="1828800" cy="292608"/>
+            <a:off x="3659429" y="2258568"/>
+            <a:ext cx="1581912" cy="292608"/>
           </a:xfrm>
           <a:prstGeom prst="rect">
             <a:avLst>
@@ -26842,8 +26398,8 @@
         </p:nvSpPr>
         <p:spPr>
           <a:xfrm>
-            <a:off x="4370832" y="2258568"/>
-            <a:ext cx="1828800" cy="292608"/>
+            <a:off x="3659429" y="2258568"/>
+            <a:ext cx="1581912" cy="292608"/>
           </a:xfrm>
           <a:prstGeom prst="rect">
             <a:avLst/>
@@ -26881,8 +26437,8 @@
         </p:nvSpPr>
         <p:spPr>
           <a:xfrm>
-            <a:off x="4370832" y="2569464"/>
-            <a:ext cx="1828800" cy="201168"/>
+            <a:off x="3659429" y="2569464"/>
+            <a:ext cx="1581912" cy="201168"/>
           </a:xfrm>
           <a:prstGeom prst="rect">
             <a:avLst/>
@@ -26906,7 +26462,7 @@
                 <a:ea typeface="Calibri" pitchFamily="34" charset="-122"/>
                 <a:cs typeface="Calibri" pitchFamily="34" charset="-120"/>
               </a:rPr>
-              <a:t>bravery from the heart</a:t>
+              <a:t>bravery, heart</a:t>
             </a:r>
             <a:endParaRPr lang="en-US" sz="850" dirty="0"/>
           </a:p>
@@ -26920,8 +26476,8 @@
         </p:nvSpPr>
         <p:spPr>
           <a:xfrm>
-            <a:off x="6519672" y="2258568"/>
-            <a:ext cx="1828800" cy="292608"/>
+            <a:off x="5329123" y="2258568"/>
+            <a:ext cx="1581912" cy="292608"/>
           </a:xfrm>
           <a:prstGeom prst="rect">
             <a:avLst>
@@ -26954,8 +26510,8 @@
         </p:nvSpPr>
         <p:spPr>
           <a:xfrm>
-            <a:off x="6519672" y="2258568"/>
-            <a:ext cx="1828800" cy="292608"/>
+            <a:off x="5329123" y="2258568"/>
+            <a:ext cx="1581912" cy="292608"/>
           </a:xfrm>
           <a:prstGeom prst="rect">
             <a:avLst/>
@@ -26979,7 +26535,7 @@
                 <a:ea typeface="Trebuchet MS" pitchFamily="34" charset="-122"/>
                 <a:cs typeface="Trebuchet MS" pitchFamily="34" charset="-120"/>
               </a:rPr>
-              <a:t>ment</a:t>
+              <a:t>ing</a:t>
             </a:r>
             <a:endParaRPr lang="en-US" sz="1300" dirty="0"/>
           </a:p>
@@ -26993,8 +26549,8 @@
         </p:nvSpPr>
         <p:spPr>
           <a:xfrm>
-            <a:off x="6519672" y="2569464"/>
-            <a:ext cx="1828800" cy="201168"/>
+            <a:off x="5329123" y="2569464"/>
+            <a:ext cx="1581912" cy="201168"/>
           </a:xfrm>
           <a:prstGeom prst="rect">
             <a:avLst/>
@@ -27018,7 +26574,7 @@
                 <a:ea typeface="Calibri" pitchFamily="34" charset="-122"/>
                 <a:cs typeface="Calibri" pitchFamily="34" charset="-120"/>
               </a:rPr>
-              <a:t>the result or state of</a:t>
+              <a:t>present participle</a:t>
             </a:r>
             <a:endParaRPr lang="en-US" sz="850" dirty="0"/>
           </a:p>
@@ -27026,7 +26582,158 @@
       </p:sp>
       <p:sp>
         <p:nvSpPr>
-          <p:cNvPr id="25" name="Shape 23"/>
+          <p:cNvPr id="25" name="Text 23"/>
+          <p:cNvSpPr/>
+          <p:nvPr/>
+        </p:nvSpPr>
+        <p:spPr>
+          <a:xfrm>
+            <a:off x="5329123" y="2752344"/>
+            <a:ext cx="1581912" cy="182880"/>
+          </a:xfrm>
+          <a:prstGeom prst="rect">
+            <a:avLst/>
+          </a:prstGeom>
+          <a:noFill/>
+          <a:ln/>
+        </p:spPr>
+        <p:txBody>
+          <a:bodyPr wrap="square" lIns="0" tIns="0" rIns="0" bIns="0" rtlCol="0" anchor="t"/>
+          <a:lstStyle/>
+          <a:p>
+            <a:pPr algn="ctr" indent="0" marL="0">
+              <a:buNone/>
+            </a:pPr>
+            <a:r>
+              <a:rPr lang="en-US" sz="700" i="1" dirty="0">
+                <a:solidFill>
+                  <a:srgbClr val="94A3B8"/>
+                </a:solidFill>
+                <a:latin typeface="Calibri" pitchFamily="34" charset="0"/>
+                <a:ea typeface="Calibri" pitchFamily="34" charset="-122"/>
+                <a:cs typeface="Calibri" pitchFamily="34" charset="-120"/>
+              </a:rPr>
+              <a:t>'e' dropped before vowel suffix</a:t>
+            </a:r>
+            <a:endParaRPr lang="en-US" sz="700" dirty="0"/>
+          </a:p>
+        </p:txBody>
+      </p:sp>
+      <p:sp>
+        <p:nvSpPr>
+          <p:cNvPr id="26" name="Shape 24"/>
+          <p:cNvSpPr/>
+          <p:nvPr/>
+        </p:nvSpPr>
+        <p:spPr>
+          <a:xfrm>
+            <a:off x="6998818" y="2258568"/>
+            <a:ext cx="1581912" cy="292608"/>
+          </a:xfrm>
+          <a:prstGeom prst="rect">
+            <a:avLst>
+              <a:gd name="adj" fmla="val 25000"/>
+            </a:avLst>
+          </a:prstGeom>
+          <a:solidFill>
+            <a:srgbClr val="FCE7F3"/>
+          </a:solidFill>
+          <a:ln w="19050">
+            <a:solidFill>
+              <a:srgbClr val="DB2777"/>
+            </a:solidFill>
+            <a:prstDash val="solid"/>
+          </a:ln>
+          <a:effectLst>
+            <a:outerShdw sx="100000" sy="100000" kx="0" ky="0" algn="bl" rotWithShape="0" blurRad="101600" dist="38100" dir="8100000">
+              <a:srgbClr val="000000">
+                <a:alpha val="12000"/>
+              </a:srgbClr>
+            </a:outerShdw>
+          </a:effectLst>
+        </p:spPr>
+      </p:sp>
+      <p:sp>
+        <p:nvSpPr>
+          <p:cNvPr id="27" name="Text 25"/>
+          <p:cNvSpPr/>
+          <p:nvPr/>
+        </p:nvSpPr>
+        <p:spPr>
+          <a:xfrm>
+            <a:off x="6998818" y="2258568"/>
+            <a:ext cx="1581912" cy="292608"/>
+          </a:xfrm>
+          <a:prstGeom prst="rect">
+            <a:avLst/>
+          </a:prstGeom>
+          <a:noFill/>
+          <a:ln/>
+        </p:spPr>
+        <p:txBody>
+          <a:bodyPr wrap="square" lIns="0" tIns="0" rIns="0" bIns="0" rtlCol="0" anchor="ctr"/>
+          <a:lstStyle/>
+          <a:p>
+            <a:pPr algn="ctr" indent="0" marL="0">
+              <a:buNone/>
+            </a:pPr>
+            <a:r>
+              <a:rPr lang="en-US" sz="1300" b="1" dirty="0">
+                <a:solidFill>
+                  <a:srgbClr val="9D174D"/>
+                </a:solidFill>
+                <a:latin typeface="Trebuchet MS" pitchFamily="34" charset="0"/>
+                <a:ea typeface="Trebuchet MS" pitchFamily="34" charset="-122"/>
+                <a:cs typeface="Trebuchet MS" pitchFamily="34" charset="-120"/>
+              </a:rPr>
+              <a:t>ly</a:t>
+            </a:r>
+            <a:endParaRPr lang="en-US" sz="1300" dirty="0"/>
+          </a:p>
+        </p:txBody>
+      </p:sp>
+      <p:sp>
+        <p:nvSpPr>
+          <p:cNvPr id="28" name="Text 26"/>
+          <p:cNvSpPr/>
+          <p:nvPr/>
+        </p:nvSpPr>
+        <p:spPr>
+          <a:xfrm>
+            <a:off x="6998818" y="2569464"/>
+            <a:ext cx="1581912" cy="201168"/>
+          </a:xfrm>
+          <a:prstGeom prst="rect">
+            <a:avLst/>
+          </a:prstGeom>
+          <a:noFill/>
+          <a:ln/>
+        </p:spPr>
+        <p:txBody>
+          <a:bodyPr wrap="square" lIns="0" tIns="0" rIns="0" bIns="0" rtlCol="0" anchor="t"/>
+          <a:lstStyle/>
+          <a:p>
+            <a:pPr algn="ctr" indent="0" marL="0">
+              <a:buNone/>
+            </a:pPr>
+            <a:r>
+              <a:rPr lang="en-US" sz="850" dirty="0">
+                <a:solidFill>
+                  <a:srgbClr val="475569"/>
+                </a:solidFill>
+                <a:latin typeface="Calibri" pitchFamily="34" charset="0"/>
+                <a:ea typeface="Calibri" pitchFamily="34" charset="-122"/>
+                <a:cs typeface="Calibri" pitchFamily="34" charset="-120"/>
+              </a:rPr>
+              <a:t>in a certain way (makes an adverb)</a:t>
+            </a:r>
+            <a:endParaRPr lang="en-US" sz="850" dirty="0"/>
+          </a:p>
+        </p:txBody>
+      </p:sp>
+      <p:sp>
+        <p:nvSpPr>
+          <p:cNvPr id="29" name="Shape 27"/>
           <p:cNvSpPr/>
           <p:nvPr/>
         </p:nvSpPr>
@@ -27053,7 +26760,7 @@
       </p:sp>
       <p:sp>
         <p:nvSpPr>
-          <p:cNvPr id="26" name="Text 24"/>
+          <p:cNvPr id="30" name="Text 28"/>
           <p:cNvSpPr/>
           <p:nvPr/>
         </p:nvSpPr>
@@ -27092,7 +26799,7 @@
       </p:sp>
       <p:sp>
         <p:nvSpPr>
-          <p:cNvPr id="27" name="Shape 25"/>
+          <p:cNvPr id="31" name="Shape 29"/>
           <p:cNvSpPr/>
           <p:nvPr/>
         </p:nvSpPr>
@@ -27119,7 +26826,7 @@
       </p:sp>
       <p:sp>
         <p:nvSpPr>
-          <p:cNvPr id="28" name="Text 26"/>
+          <p:cNvPr id="32" name="Text 30"/>
           <p:cNvSpPr/>
           <p:nvPr/>
         </p:nvSpPr>
@@ -27158,7 +26865,7 @@
       </p:sp>
       <p:sp>
         <p:nvSpPr>
-          <p:cNvPr id="29" name="Shape 27"/>
+          <p:cNvPr id="33" name="Shape 31"/>
           <p:cNvSpPr/>
           <p:nvPr/>
         </p:nvSpPr>
@@ -27185,7 +26892,7 @@
       </p:sp>
       <p:sp>
         <p:nvSpPr>
-          <p:cNvPr id="30" name="Text 28"/>
+          <p:cNvPr id="34" name="Text 32"/>
           <p:cNvSpPr/>
           <p:nvPr/>
         </p:nvSpPr>
@@ -27224,7 +26931,7 @@
       </p:sp>
       <p:sp>
         <p:nvSpPr>
-          <p:cNvPr id="31" name="Shape 29"/>
+          <p:cNvPr id="35" name="Shape 33"/>
           <p:cNvSpPr/>
           <p:nvPr/>
         </p:nvSpPr>
@@ -27251,7 +26958,7 @@
       </p:sp>
       <p:sp>
         <p:nvSpPr>
-          <p:cNvPr id="32" name="Text 30"/>
+          <p:cNvPr id="36" name="Text 34"/>
           <p:cNvSpPr/>
           <p:nvPr/>
         </p:nvSpPr>
@@ -28432,7 +28139,7 @@
                 <a:ea typeface="Trebuchet MS" pitchFamily="34" charset="-122"/>
                 <a:cs typeface="Trebuchet MS" pitchFamily="34" charset="-120"/>
               </a:rPr>
-              <a:t>encouragement</a:t>
+              <a:t>encouragingly</a:t>
             </a:r>
             <a:endParaRPr lang="en-US" sz="2800" dirty="0"/>
           </a:p>
@@ -28512,8 +28219,8 @@
         </p:nvSpPr>
         <p:spPr>
           <a:xfrm>
-            <a:off x="2221992" y="2258568"/>
-            <a:ext cx="1828800" cy="292608"/>
+            <a:off x="1989734" y="2258568"/>
+            <a:ext cx="1581912" cy="292608"/>
           </a:xfrm>
           <a:prstGeom prst="rect">
             <a:avLst>
@@ -28546,8 +28253,8 @@
         </p:nvSpPr>
         <p:spPr>
           <a:xfrm>
-            <a:off x="2221992" y="2258568"/>
-            <a:ext cx="1828800" cy="292608"/>
+            <a:off x="1989734" y="2258568"/>
+            <a:ext cx="1581912" cy="292608"/>
           </a:xfrm>
           <a:prstGeom prst="rect">
             <a:avLst/>
@@ -28585,8 +28292,8 @@
         </p:nvSpPr>
         <p:spPr>
           <a:xfrm>
-            <a:off x="2221992" y="2569464"/>
-            <a:ext cx="1828800" cy="201168"/>
+            <a:off x="1989734" y="2569464"/>
+            <a:ext cx="1581912" cy="201168"/>
           </a:xfrm>
           <a:prstGeom prst="rect">
             <a:avLst/>
@@ -28624,8 +28331,8 @@
         </p:nvSpPr>
         <p:spPr>
           <a:xfrm>
-            <a:off x="4370832" y="2258568"/>
-            <a:ext cx="1828800" cy="292608"/>
+            <a:off x="3659429" y="2258568"/>
+            <a:ext cx="1581912" cy="292608"/>
           </a:xfrm>
           <a:prstGeom prst="rect">
             <a:avLst>
@@ -28658,8 +28365,8 @@
         </p:nvSpPr>
         <p:spPr>
           <a:xfrm>
-            <a:off x="4370832" y="2258568"/>
-            <a:ext cx="1828800" cy="292608"/>
+            <a:off x="3659429" y="2258568"/>
+            <a:ext cx="1581912" cy="292608"/>
           </a:xfrm>
           <a:prstGeom prst="rect">
             <a:avLst/>
@@ -28697,8 +28404,8 @@
         </p:nvSpPr>
         <p:spPr>
           <a:xfrm>
-            <a:off x="4370832" y="2569464"/>
-            <a:ext cx="1828800" cy="201168"/>
+            <a:off x="3659429" y="2569464"/>
+            <a:ext cx="1581912" cy="201168"/>
           </a:xfrm>
           <a:prstGeom prst="rect">
             <a:avLst/>
@@ -28722,7 +28429,7 @@
                 <a:ea typeface="Calibri" pitchFamily="34" charset="-122"/>
                 <a:cs typeface="Calibri" pitchFamily="34" charset="-120"/>
               </a:rPr>
-              <a:t>bravery from the heart</a:t>
+              <a:t>bravery, heart</a:t>
             </a:r>
             <a:endParaRPr lang="en-US" sz="850" dirty="0"/>
           </a:p>
@@ -28736,8 +28443,8 @@
         </p:nvSpPr>
         <p:spPr>
           <a:xfrm>
-            <a:off x="6519672" y="2258568"/>
-            <a:ext cx="1828800" cy="292608"/>
+            <a:off x="5329123" y="2258568"/>
+            <a:ext cx="1581912" cy="292608"/>
           </a:xfrm>
           <a:prstGeom prst="rect">
             <a:avLst>
@@ -28770,8 +28477,8 @@
         </p:nvSpPr>
         <p:spPr>
           <a:xfrm>
-            <a:off x="6519672" y="2258568"/>
-            <a:ext cx="1828800" cy="292608"/>
+            <a:off x="5329123" y="2258568"/>
+            <a:ext cx="1581912" cy="292608"/>
           </a:xfrm>
           <a:prstGeom prst="rect">
             <a:avLst/>
@@ -28795,7 +28502,7 @@
                 <a:ea typeface="Trebuchet MS" pitchFamily="34" charset="-122"/>
                 <a:cs typeface="Trebuchet MS" pitchFamily="34" charset="-120"/>
               </a:rPr>
-              <a:t>ment</a:t>
+              <a:t>ing</a:t>
             </a:r>
             <a:endParaRPr lang="en-US" sz="1300" dirty="0"/>
           </a:p>
@@ -28809,8 +28516,8 @@
         </p:nvSpPr>
         <p:spPr>
           <a:xfrm>
-            <a:off x="6519672" y="2569464"/>
-            <a:ext cx="1828800" cy="201168"/>
+            <a:off x="5329123" y="2569464"/>
+            <a:ext cx="1581912" cy="201168"/>
           </a:xfrm>
           <a:prstGeom prst="rect">
             <a:avLst/>
@@ -28834,7 +28541,7 @@
                 <a:ea typeface="Calibri" pitchFamily="34" charset="-122"/>
                 <a:cs typeface="Calibri" pitchFamily="34" charset="-120"/>
               </a:rPr>
-              <a:t>the result or state of</a:t>
+              <a:t>present participle</a:t>
             </a:r>
             <a:endParaRPr lang="en-US" sz="850" dirty="0"/>
           </a:p>
@@ -28842,7 +28549,158 @@
       </p:sp>
       <p:sp>
         <p:nvSpPr>
-          <p:cNvPr id="25" name="Shape 23"/>
+          <p:cNvPr id="25" name="Text 23"/>
+          <p:cNvSpPr/>
+          <p:nvPr/>
+        </p:nvSpPr>
+        <p:spPr>
+          <a:xfrm>
+            <a:off x="5329123" y="2752344"/>
+            <a:ext cx="1581912" cy="182880"/>
+          </a:xfrm>
+          <a:prstGeom prst="rect">
+            <a:avLst/>
+          </a:prstGeom>
+          <a:noFill/>
+          <a:ln/>
+        </p:spPr>
+        <p:txBody>
+          <a:bodyPr wrap="square" lIns="0" tIns="0" rIns="0" bIns="0" rtlCol="0" anchor="t"/>
+          <a:lstStyle/>
+          <a:p>
+            <a:pPr algn="ctr" indent="0" marL="0">
+              <a:buNone/>
+            </a:pPr>
+            <a:r>
+              <a:rPr lang="en-US" sz="700" i="1" dirty="0">
+                <a:solidFill>
+                  <a:srgbClr val="94A3B8"/>
+                </a:solidFill>
+                <a:latin typeface="Calibri" pitchFamily="34" charset="0"/>
+                <a:ea typeface="Calibri" pitchFamily="34" charset="-122"/>
+                <a:cs typeface="Calibri" pitchFamily="34" charset="-120"/>
+              </a:rPr>
+              <a:t>'e' dropped before vowel suffix</a:t>
+            </a:r>
+            <a:endParaRPr lang="en-US" sz="700" dirty="0"/>
+          </a:p>
+        </p:txBody>
+      </p:sp>
+      <p:sp>
+        <p:nvSpPr>
+          <p:cNvPr id="26" name="Shape 24"/>
+          <p:cNvSpPr/>
+          <p:nvPr/>
+        </p:nvSpPr>
+        <p:spPr>
+          <a:xfrm>
+            <a:off x="6998818" y="2258568"/>
+            <a:ext cx="1581912" cy="292608"/>
+          </a:xfrm>
+          <a:prstGeom prst="rect">
+            <a:avLst>
+              <a:gd name="adj" fmla="val 25000"/>
+            </a:avLst>
+          </a:prstGeom>
+          <a:solidFill>
+            <a:srgbClr val="FCE7F3"/>
+          </a:solidFill>
+          <a:ln w="19050">
+            <a:solidFill>
+              <a:srgbClr val="DB2777"/>
+            </a:solidFill>
+            <a:prstDash val="solid"/>
+          </a:ln>
+          <a:effectLst>
+            <a:outerShdw sx="100000" sy="100000" kx="0" ky="0" algn="bl" rotWithShape="0" blurRad="101600" dist="38100" dir="8100000">
+              <a:srgbClr val="000000">
+                <a:alpha val="12000"/>
+              </a:srgbClr>
+            </a:outerShdw>
+          </a:effectLst>
+        </p:spPr>
+      </p:sp>
+      <p:sp>
+        <p:nvSpPr>
+          <p:cNvPr id="27" name="Text 25"/>
+          <p:cNvSpPr/>
+          <p:nvPr/>
+        </p:nvSpPr>
+        <p:spPr>
+          <a:xfrm>
+            <a:off x="6998818" y="2258568"/>
+            <a:ext cx="1581912" cy="292608"/>
+          </a:xfrm>
+          <a:prstGeom prst="rect">
+            <a:avLst/>
+          </a:prstGeom>
+          <a:noFill/>
+          <a:ln/>
+        </p:spPr>
+        <p:txBody>
+          <a:bodyPr wrap="square" lIns="0" tIns="0" rIns="0" bIns="0" rtlCol="0" anchor="ctr"/>
+          <a:lstStyle/>
+          <a:p>
+            <a:pPr algn="ctr" indent="0" marL="0">
+              <a:buNone/>
+            </a:pPr>
+            <a:r>
+              <a:rPr lang="en-US" sz="1300" b="1" dirty="0">
+                <a:solidFill>
+                  <a:srgbClr val="9D174D"/>
+                </a:solidFill>
+                <a:latin typeface="Trebuchet MS" pitchFamily="34" charset="0"/>
+                <a:ea typeface="Trebuchet MS" pitchFamily="34" charset="-122"/>
+                <a:cs typeface="Trebuchet MS" pitchFamily="34" charset="-120"/>
+              </a:rPr>
+              <a:t>ly</a:t>
+            </a:r>
+            <a:endParaRPr lang="en-US" sz="1300" dirty="0"/>
+          </a:p>
+        </p:txBody>
+      </p:sp>
+      <p:sp>
+        <p:nvSpPr>
+          <p:cNvPr id="28" name="Text 26"/>
+          <p:cNvSpPr/>
+          <p:nvPr/>
+        </p:nvSpPr>
+        <p:spPr>
+          <a:xfrm>
+            <a:off x="6998818" y="2569464"/>
+            <a:ext cx="1581912" cy="201168"/>
+          </a:xfrm>
+          <a:prstGeom prst="rect">
+            <a:avLst/>
+          </a:prstGeom>
+          <a:noFill/>
+          <a:ln/>
+        </p:spPr>
+        <p:txBody>
+          <a:bodyPr wrap="square" lIns="0" tIns="0" rIns="0" bIns="0" rtlCol="0" anchor="t"/>
+          <a:lstStyle/>
+          <a:p>
+            <a:pPr algn="ctr" indent="0" marL="0">
+              <a:buNone/>
+            </a:pPr>
+            <a:r>
+              <a:rPr lang="en-US" sz="850" dirty="0">
+                <a:solidFill>
+                  <a:srgbClr val="475569"/>
+                </a:solidFill>
+                <a:latin typeface="Calibri" pitchFamily="34" charset="0"/>
+                <a:ea typeface="Calibri" pitchFamily="34" charset="-122"/>
+                <a:cs typeface="Calibri" pitchFamily="34" charset="-120"/>
+              </a:rPr>
+              <a:t>in a certain way (makes an adverb)</a:t>
+            </a:r>
+            <a:endParaRPr lang="en-US" sz="850" dirty="0"/>
+          </a:p>
+        </p:txBody>
+      </p:sp>
+      <p:sp>
+        <p:nvSpPr>
+          <p:cNvPr id="29" name="Shape 27"/>
           <p:cNvSpPr/>
           <p:nvPr/>
         </p:nvSpPr>
@@ -28869,7 +28727,7 @@
       </p:sp>
       <p:sp>
         <p:nvSpPr>
-          <p:cNvPr id="26" name="Text 24"/>
+          <p:cNvPr id="30" name="Text 28"/>
           <p:cNvSpPr/>
           <p:nvPr/>
         </p:nvSpPr>
@@ -28908,7 +28766,7 @@
       </p:sp>
       <p:sp>
         <p:nvSpPr>
-          <p:cNvPr id="27" name="Shape 25"/>
+          <p:cNvPr id="31" name="Shape 29"/>
           <p:cNvSpPr/>
           <p:nvPr/>
         </p:nvSpPr>
@@ -28935,14 +28793,14 @@
       </p:sp>
       <p:sp>
         <p:nvSpPr>
-          <p:cNvPr id="28" name="Shape 26"/>
-          <p:cNvSpPr/>
-          <p:nvPr/>
-        </p:nvSpPr>
-        <p:spPr>
-          <a:xfrm>
-            <a:off x="1975104" y="3364992"/>
-            <a:ext cx="1554480" cy="475488"/>
+          <p:cNvPr id="32" name="Shape 30"/>
+          <p:cNvSpPr/>
+          <p:nvPr/>
+        </p:nvSpPr>
+        <p:spPr>
+          <a:xfrm>
+            <a:off x="1978152" y="3364992"/>
+            <a:ext cx="1225296" cy="475488"/>
           </a:xfrm>
           <a:prstGeom prst="rect">
             <a:avLst>
@@ -28962,14 +28820,14 @@
       </p:sp>
       <p:sp>
         <p:nvSpPr>
-          <p:cNvPr id="29" name="Text 27"/>
-          <p:cNvSpPr/>
-          <p:nvPr/>
-        </p:nvSpPr>
-        <p:spPr>
-          <a:xfrm>
-            <a:off x="1975104" y="3364992"/>
-            <a:ext cx="1554480" cy="475488"/>
+          <p:cNvPr id="33" name="Text 31"/>
+          <p:cNvSpPr/>
+          <p:nvPr/>
+        </p:nvSpPr>
+        <p:spPr>
+          <a:xfrm>
+            <a:off x="1978152" y="3364992"/>
+            <a:ext cx="1225296" cy="475488"/>
           </a:xfrm>
           <a:prstGeom prst="rect">
             <a:avLst/>
@@ -29001,14 +28859,14 @@
       </p:sp>
       <p:sp>
         <p:nvSpPr>
-          <p:cNvPr id="30" name="Text 28"/>
-          <p:cNvSpPr/>
-          <p:nvPr/>
-        </p:nvSpPr>
-        <p:spPr>
-          <a:xfrm>
-            <a:off x="3529584" y="3364992"/>
-            <a:ext cx="73152" cy="475488"/>
+          <p:cNvPr id="34" name="Text 32"/>
+          <p:cNvSpPr/>
+          <p:nvPr/>
+        </p:nvSpPr>
+        <p:spPr>
+          <a:xfrm>
+            <a:off x="3203448" y="3364992"/>
+            <a:ext cx="76200" cy="475488"/>
           </a:xfrm>
           <a:prstGeom prst="rect">
             <a:avLst/>
@@ -29040,14 +28898,14 @@
       </p:sp>
       <p:sp>
         <p:nvSpPr>
-          <p:cNvPr id="31" name="Shape 29"/>
-          <p:cNvSpPr/>
-          <p:nvPr/>
-        </p:nvSpPr>
-        <p:spPr>
-          <a:xfrm>
-            <a:off x="3602736" y="3364992"/>
-            <a:ext cx="1554480" cy="475488"/>
+          <p:cNvPr id="35" name="Shape 33"/>
+          <p:cNvSpPr/>
+          <p:nvPr/>
+        </p:nvSpPr>
+        <p:spPr>
+          <a:xfrm>
+            <a:off x="3279648" y="3364992"/>
+            <a:ext cx="1225296" cy="475488"/>
           </a:xfrm>
           <a:prstGeom prst="rect">
             <a:avLst>
@@ -29067,14 +28925,14 @@
       </p:sp>
       <p:sp>
         <p:nvSpPr>
-          <p:cNvPr id="32" name="Text 30"/>
-          <p:cNvSpPr/>
-          <p:nvPr/>
-        </p:nvSpPr>
-        <p:spPr>
-          <a:xfrm>
-            <a:off x="3602736" y="3364992"/>
-            <a:ext cx="1554480" cy="475488"/>
+          <p:cNvPr id="36" name="Text 34"/>
+          <p:cNvSpPr/>
+          <p:nvPr/>
+        </p:nvSpPr>
+        <p:spPr>
+          <a:xfrm>
+            <a:off x="3279648" y="3364992"/>
+            <a:ext cx="1225296" cy="475488"/>
           </a:xfrm>
           <a:prstGeom prst="rect">
             <a:avLst/>
@@ -29106,14 +28964,14 @@
       </p:sp>
       <p:sp>
         <p:nvSpPr>
-          <p:cNvPr id="33" name="Text 31"/>
-          <p:cNvSpPr/>
-          <p:nvPr/>
-        </p:nvSpPr>
-        <p:spPr>
-          <a:xfrm>
-            <a:off x="5157216" y="3364992"/>
-            <a:ext cx="73152" cy="475488"/>
+          <p:cNvPr id="37" name="Text 35"/>
+          <p:cNvSpPr/>
+          <p:nvPr/>
+        </p:nvSpPr>
+        <p:spPr>
+          <a:xfrm>
+            <a:off x="4504944" y="3364992"/>
+            <a:ext cx="76200" cy="475488"/>
           </a:xfrm>
           <a:prstGeom prst="rect">
             <a:avLst/>
@@ -29145,14 +29003,14 @@
       </p:sp>
       <p:sp>
         <p:nvSpPr>
-          <p:cNvPr id="34" name="Shape 32"/>
-          <p:cNvSpPr/>
-          <p:nvPr/>
-        </p:nvSpPr>
-        <p:spPr>
-          <a:xfrm>
-            <a:off x="5230368" y="3364992"/>
-            <a:ext cx="1554480" cy="475488"/>
+          <p:cNvPr id="38" name="Shape 36"/>
+          <p:cNvSpPr/>
+          <p:nvPr/>
+        </p:nvSpPr>
+        <p:spPr>
+          <a:xfrm>
+            <a:off x="4581144" y="3364992"/>
+            <a:ext cx="1225296" cy="475488"/>
           </a:xfrm>
           <a:prstGeom prst="rect">
             <a:avLst>
@@ -29172,14 +29030,14 @@
       </p:sp>
       <p:sp>
         <p:nvSpPr>
-          <p:cNvPr id="35" name="Text 33"/>
-          <p:cNvSpPr/>
-          <p:nvPr/>
-        </p:nvSpPr>
-        <p:spPr>
-          <a:xfrm>
-            <a:off x="5230368" y="3364992"/>
-            <a:ext cx="1554480" cy="475488"/>
+          <p:cNvPr id="39" name="Text 37"/>
+          <p:cNvSpPr/>
+          <p:nvPr/>
+        </p:nvSpPr>
+        <p:spPr>
+          <a:xfrm>
+            <a:off x="4581144" y="3364992"/>
+            <a:ext cx="1225296" cy="475488"/>
           </a:xfrm>
           <a:prstGeom prst="rect">
             <a:avLst/>
@@ -29203,7 +29061,7 @@
                 <a:ea typeface="Trebuchet MS" pitchFamily="34" charset="-122"/>
                 <a:cs typeface="Trebuchet MS" pitchFamily="34" charset="-120"/>
               </a:rPr>
-              <a:t>age</a:t>
+              <a:t>ag</a:t>
             </a:r>
             <a:endParaRPr lang="en-US" sz="1400" dirty="0"/>
           </a:p>
@@ -29211,14 +29069,14 @@
       </p:sp>
       <p:sp>
         <p:nvSpPr>
-          <p:cNvPr id="36" name="Text 34"/>
-          <p:cNvSpPr/>
-          <p:nvPr/>
-        </p:nvSpPr>
-        <p:spPr>
-          <a:xfrm>
-            <a:off x="6784848" y="3364992"/>
-            <a:ext cx="73152" cy="475488"/>
+          <p:cNvPr id="40" name="Text 38"/>
+          <p:cNvSpPr/>
+          <p:nvPr/>
+        </p:nvSpPr>
+        <p:spPr>
+          <a:xfrm>
+            <a:off x="5806440" y="3364992"/>
+            <a:ext cx="76200" cy="475488"/>
           </a:xfrm>
           <a:prstGeom prst="rect">
             <a:avLst/>
@@ -29250,14 +29108,14 @@
       </p:sp>
       <p:sp>
         <p:nvSpPr>
-          <p:cNvPr id="37" name="Shape 35"/>
-          <p:cNvSpPr/>
-          <p:nvPr/>
-        </p:nvSpPr>
-        <p:spPr>
-          <a:xfrm>
-            <a:off x="6858000" y="3364992"/>
-            <a:ext cx="1554480" cy="475488"/>
+          <p:cNvPr id="41" name="Shape 39"/>
+          <p:cNvSpPr/>
+          <p:nvPr/>
+        </p:nvSpPr>
+        <p:spPr>
+          <a:xfrm>
+            <a:off x="5882640" y="3364992"/>
+            <a:ext cx="1225296" cy="475488"/>
           </a:xfrm>
           <a:prstGeom prst="rect">
             <a:avLst>
@@ -29277,14 +29135,14 @@
       </p:sp>
       <p:sp>
         <p:nvSpPr>
-          <p:cNvPr id="38" name="Text 36"/>
-          <p:cNvSpPr/>
-          <p:nvPr/>
-        </p:nvSpPr>
-        <p:spPr>
-          <a:xfrm>
-            <a:off x="6858000" y="3364992"/>
-            <a:ext cx="1554480" cy="475488"/>
+          <p:cNvPr id="42" name="Text 40"/>
+          <p:cNvSpPr/>
+          <p:nvPr/>
+        </p:nvSpPr>
+        <p:spPr>
+          <a:xfrm>
+            <a:off x="5882640" y="3364992"/>
+            <a:ext cx="1225296" cy="475488"/>
           </a:xfrm>
           <a:prstGeom prst="rect">
             <a:avLst/>
@@ -29308,7 +29166,7 @@
                 <a:ea typeface="Trebuchet MS" pitchFamily="34" charset="-122"/>
                 <a:cs typeface="Trebuchet MS" pitchFamily="34" charset="-120"/>
               </a:rPr>
-              <a:t>ment</a:t>
+              <a:t>ing</a:t>
             </a:r>
             <a:endParaRPr lang="en-US" sz="1400" dirty="0"/>
           </a:p>
@@ -29316,7 +29174,112 @@
       </p:sp>
       <p:sp>
         <p:nvSpPr>
-          <p:cNvPr id="39" name="Shape 37"/>
+          <p:cNvPr id="43" name="Text 41"/>
+          <p:cNvSpPr/>
+          <p:nvPr/>
+        </p:nvSpPr>
+        <p:spPr>
+          <a:xfrm>
+            <a:off x="7107936" y="3364992"/>
+            <a:ext cx="76200" cy="475488"/>
+          </a:xfrm>
+          <a:prstGeom prst="rect">
+            <a:avLst/>
+          </a:prstGeom>
+          <a:noFill/>
+          <a:ln/>
+        </p:spPr>
+        <p:txBody>
+          <a:bodyPr wrap="square" lIns="0" tIns="0" rIns="0" bIns="0" rtlCol="0" anchor="ctr"/>
+          <a:lstStyle/>
+          <a:p>
+            <a:pPr algn="ctr" indent="0" marL="0">
+              <a:buNone/>
+            </a:pPr>
+            <a:r>
+              <a:rPr lang="en-US" sz="1600" b="1" dirty="0">
+                <a:solidFill>
+                  <a:srgbClr val="0D9488"/>
+                </a:solidFill>
+                <a:latin typeface="Trebuchet MS" pitchFamily="34" charset="0"/>
+                <a:ea typeface="Trebuchet MS" pitchFamily="34" charset="-122"/>
+                <a:cs typeface="Trebuchet MS" pitchFamily="34" charset="-120"/>
+              </a:rPr>
+              <a:t>·</a:t>
+            </a:r>
+            <a:endParaRPr lang="en-US" sz="1600" dirty="0"/>
+          </a:p>
+        </p:txBody>
+      </p:sp>
+      <p:sp>
+        <p:nvSpPr>
+          <p:cNvPr id="44" name="Shape 42"/>
+          <p:cNvSpPr/>
+          <p:nvPr/>
+        </p:nvSpPr>
+        <p:spPr>
+          <a:xfrm>
+            <a:off x="7184136" y="3364992"/>
+            <a:ext cx="1225296" cy="475488"/>
+          </a:xfrm>
+          <a:prstGeom prst="rect">
+            <a:avLst>
+              <a:gd name="adj" fmla="val 9615"/>
+            </a:avLst>
+          </a:prstGeom>
+          <a:solidFill>
+            <a:srgbClr val="FFFFFF"/>
+          </a:solidFill>
+          <a:ln w="12700">
+            <a:solidFill>
+              <a:srgbClr val="0D9488"/>
+            </a:solidFill>
+            <a:prstDash val="solid"/>
+          </a:ln>
+        </p:spPr>
+      </p:sp>
+      <p:sp>
+        <p:nvSpPr>
+          <p:cNvPr id="45" name="Text 43"/>
+          <p:cNvSpPr/>
+          <p:nvPr/>
+        </p:nvSpPr>
+        <p:spPr>
+          <a:xfrm>
+            <a:off x="7184136" y="3364992"/>
+            <a:ext cx="1225296" cy="475488"/>
+          </a:xfrm>
+          <a:prstGeom prst="rect">
+            <a:avLst/>
+          </a:prstGeom>
+          <a:noFill/>
+          <a:ln/>
+        </p:spPr>
+        <p:txBody>
+          <a:bodyPr wrap="square" lIns="0" tIns="0" rIns="0" bIns="0" rtlCol="0" anchor="ctr"/>
+          <a:lstStyle/>
+          <a:p>
+            <a:pPr algn="ctr" indent="0" marL="0">
+              <a:buNone/>
+            </a:pPr>
+            <a:r>
+              <a:rPr lang="en-US" sz="1400" b="1" dirty="0">
+                <a:solidFill>
+                  <a:srgbClr val="0D9488"/>
+                </a:solidFill>
+                <a:latin typeface="Trebuchet MS" pitchFamily="34" charset="0"/>
+                <a:ea typeface="Trebuchet MS" pitchFamily="34" charset="-122"/>
+                <a:cs typeface="Trebuchet MS" pitchFamily="34" charset="-120"/>
+              </a:rPr>
+              <a:t>ly</a:t>
+            </a:r>
+            <a:endParaRPr lang="en-US" sz="1400" dirty="0"/>
+          </a:p>
+        </p:txBody>
+      </p:sp>
+      <p:sp>
+        <p:nvSpPr>
+          <p:cNvPr id="46" name="Shape 44"/>
           <p:cNvSpPr/>
           <p:nvPr/>
         </p:nvSpPr>
@@ -29343,7 +29306,7 @@
       </p:sp>
       <p:sp>
         <p:nvSpPr>
-          <p:cNvPr id="40" name="Text 38"/>
+          <p:cNvPr id="47" name="Text 45"/>
           <p:cNvSpPr/>
           <p:nvPr/>
         </p:nvSpPr>
@@ -29382,7 +29345,7 @@
       </p:sp>
       <p:sp>
         <p:nvSpPr>
-          <p:cNvPr id="41" name="Shape 39"/>
+          <p:cNvPr id="48" name="Shape 46"/>
           <p:cNvSpPr/>
           <p:nvPr/>
         </p:nvSpPr>
@@ -29409,7 +29372,7 @@
       </p:sp>
       <p:sp>
         <p:nvSpPr>
-          <p:cNvPr id="42" name="Text 40"/>
+          <p:cNvPr id="49" name="Text 47"/>
           <p:cNvSpPr/>
           <p:nvPr/>
         </p:nvSpPr>
@@ -29871,7 +29834,7 @@
                 <a:ea typeface="Trebuchet MS" pitchFamily="34" charset="-122"/>
                 <a:cs typeface="Trebuchet MS" pitchFamily="34" charset="-120"/>
               </a:rPr>
-              <a:t>encouragement</a:t>
+              <a:t>encouragingly</a:t>
             </a:r>
             <a:endParaRPr lang="en-US" sz="2800" dirty="0"/>
           </a:p>
@@ -29951,8 +29914,8 @@
         </p:nvSpPr>
         <p:spPr>
           <a:xfrm>
-            <a:off x="2221992" y="2258568"/>
-            <a:ext cx="1828800" cy="292608"/>
+            <a:off x="1989734" y="2258568"/>
+            <a:ext cx="1581912" cy="292608"/>
           </a:xfrm>
           <a:prstGeom prst="rect">
             <a:avLst>
@@ -29985,8 +29948,8 @@
         </p:nvSpPr>
         <p:spPr>
           <a:xfrm>
-            <a:off x="2221992" y="2258568"/>
-            <a:ext cx="1828800" cy="292608"/>
+            <a:off x="1989734" y="2258568"/>
+            <a:ext cx="1581912" cy="292608"/>
           </a:xfrm>
           <a:prstGeom prst="rect">
             <a:avLst/>
@@ -30024,8 +29987,8 @@
         </p:nvSpPr>
         <p:spPr>
           <a:xfrm>
-            <a:off x="2221992" y="2569464"/>
-            <a:ext cx="1828800" cy="201168"/>
+            <a:off x="1989734" y="2569464"/>
+            <a:ext cx="1581912" cy="201168"/>
           </a:xfrm>
           <a:prstGeom prst="rect">
             <a:avLst/>
@@ -30063,8 +30026,8 @@
         </p:nvSpPr>
         <p:spPr>
           <a:xfrm>
-            <a:off x="4370832" y="2258568"/>
-            <a:ext cx="1828800" cy="292608"/>
+            <a:off x="3659429" y="2258568"/>
+            <a:ext cx="1581912" cy="292608"/>
           </a:xfrm>
           <a:prstGeom prst="rect">
             <a:avLst>
@@ -30097,8 +30060,8 @@
         </p:nvSpPr>
         <p:spPr>
           <a:xfrm>
-            <a:off x="4370832" y="2258568"/>
-            <a:ext cx="1828800" cy="292608"/>
+            <a:off x="3659429" y="2258568"/>
+            <a:ext cx="1581912" cy="292608"/>
           </a:xfrm>
           <a:prstGeom prst="rect">
             <a:avLst/>
@@ -30136,8 +30099,8 @@
         </p:nvSpPr>
         <p:spPr>
           <a:xfrm>
-            <a:off x="4370832" y="2569464"/>
-            <a:ext cx="1828800" cy="201168"/>
+            <a:off x="3659429" y="2569464"/>
+            <a:ext cx="1581912" cy="201168"/>
           </a:xfrm>
           <a:prstGeom prst="rect">
             <a:avLst/>
@@ -30161,7 +30124,7 @@
                 <a:ea typeface="Calibri" pitchFamily="34" charset="-122"/>
                 <a:cs typeface="Calibri" pitchFamily="34" charset="-120"/>
               </a:rPr>
-              <a:t>bravery from the heart</a:t>
+              <a:t>bravery, heart</a:t>
             </a:r>
             <a:endParaRPr lang="en-US" sz="850" dirty="0"/>
           </a:p>
@@ -30175,8 +30138,8 @@
         </p:nvSpPr>
         <p:spPr>
           <a:xfrm>
-            <a:off x="6519672" y="2258568"/>
-            <a:ext cx="1828800" cy="292608"/>
+            <a:off x="5329123" y="2258568"/>
+            <a:ext cx="1581912" cy="292608"/>
           </a:xfrm>
           <a:prstGeom prst="rect">
             <a:avLst>
@@ -30209,8 +30172,8 @@
         </p:nvSpPr>
         <p:spPr>
           <a:xfrm>
-            <a:off x="6519672" y="2258568"/>
-            <a:ext cx="1828800" cy="292608"/>
+            <a:off x="5329123" y="2258568"/>
+            <a:ext cx="1581912" cy="292608"/>
           </a:xfrm>
           <a:prstGeom prst="rect">
             <a:avLst/>
@@ -30234,7 +30197,7 @@
                 <a:ea typeface="Trebuchet MS" pitchFamily="34" charset="-122"/>
                 <a:cs typeface="Trebuchet MS" pitchFamily="34" charset="-120"/>
               </a:rPr>
-              <a:t>ment</a:t>
+              <a:t>ing</a:t>
             </a:r>
             <a:endParaRPr lang="en-US" sz="1300" dirty="0"/>
           </a:p>
@@ -30248,8 +30211,8 @@
         </p:nvSpPr>
         <p:spPr>
           <a:xfrm>
-            <a:off x="6519672" y="2569464"/>
-            <a:ext cx="1828800" cy="201168"/>
+            <a:off x="5329123" y="2569464"/>
+            <a:ext cx="1581912" cy="201168"/>
           </a:xfrm>
           <a:prstGeom prst="rect">
             <a:avLst/>
@@ -30273,7 +30236,7 @@
                 <a:ea typeface="Calibri" pitchFamily="34" charset="-122"/>
                 <a:cs typeface="Calibri" pitchFamily="34" charset="-120"/>
               </a:rPr>
-              <a:t>the result or state of</a:t>
+              <a:t>present participle</a:t>
             </a:r>
             <a:endParaRPr lang="en-US" sz="850" dirty="0"/>
           </a:p>
@@ -30281,7 +30244,158 @@
       </p:sp>
       <p:sp>
         <p:nvSpPr>
-          <p:cNvPr id="25" name="Shape 23"/>
+          <p:cNvPr id="25" name="Text 23"/>
+          <p:cNvSpPr/>
+          <p:nvPr/>
+        </p:nvSpPr>
+        <p:spPr>
+          <a:xfrm>
+            <a:off x="5329123" y="2752344"/>
+            <a:ext cx="1581912" cy="182880"/>
+          </a:xfrm>
+          <a:prstGeom prst="rect">
+            <a:avLst/>
+          </a:prstGeom>
+          <a:noFill/>
+          <a:ln/>
+        </p:spPr>
+        <p:txBody>
+          <a:bodyPr wrap="square" lIns="0" tIns="0" rIns="0" bIns="0" rtlCol="0" anchor="t"/>
+          <a:lstStyle/>
+          <a:p>
+            <a:pPr algn="ctr" indent="0" marL="0">
+              <a:buNone/>
+            </a:pPr>
+            <a:r>
+              <a:rPr lang="en-US" sz="700" i="1" dirty="0">
+                <a:solidFill>
+                  <a:srgbClr val="94A3B8"/>
+                </a:solidFill>
+                <a:latin typeface="Calibri" pitchFamily="34" charset="0"/>
+                <a:ea typeface="Calibri" pitchFamily="34" charset="-122"/>
+                <a:cs typeface="Calibri" pitchFamily="34" charset="-120"/>
+              </a:rPr>
+              <a:t>'e' dropped before vowel suffix</a:t>
+            </a:r>
+            <a:endParaRPr lang="en-US" sz="700" dirty="0"/>
+          </a:p>
+        </p:txBody>
+      </p:sp>
+      <p:sp>
+        <p:nvSpPr>
+          <p:cNvPr id="26" name="Shape 24"/>
+          <p:cNvSpPr/>
+          <p:nvPr/>
+        </p:nvSpPr>
+        <p:spPr>
+          <a:xfrm>
+            <a:off x="6998818" y="2258568"/>
+            <a:ext cx="1581912" cy="292608"/>
+          </a:xfrm>
+          <a:prstGeom prst="rect">
+            <a:avLst>
+              <a:gd name="adj" fmla="val 25000"/>
+            </a:avLst>
+          </a:prstGeom>
+          <a:solidFill>
+            <a:srgbClr val="FCE7F3"/>
+          </a:solidFill>
+          <a:ln w="19050">
+            <a:solidFill>
+              <a:srgbClr val="DB2777"/>
+            </a:solidFill>
+            <a:prstDash val="solid"/>
+          </a:ln>
+          <a:effectLst>
+            <a:outerShdw sx="100000" sy="100000" kx="0" ky="0" algn="bl" rotWithShape="0" blurRad="101600" dist="38100" dir="8100000">
+              <a:srgbClr val="000000">
+                <a:alpha val="12000"/>
+              </a:srgbClr>
+            </a:outerShdw>
+          </a:effectLst>
+        </p:spPr>
+      </p:sp>
+      <p:sp>
+        <p:nvSpPr>
+          <p:cNvPr id="27" name="Text 25"/>
+          <p:cNvSpPr/>
+          <p:nvPr/>
+        </p:nvSpPr>
+        <p:spPr>
+          <a:xfrm>
+            <a:off x="6998818" y="2258568"/>
+            <a:ext cx="1581912" cy="292608"/>
+          </a:xfrm>
+          <a:prstGeom prst="rect">
+            <a:avLst/>
+          </a:prstGeom>
+          <a:noFill/>
+          <a:ln/>
+        </p:spPr>
+        <p:txBody>
+          <a:bodyPr wrap="square" lIns="0" tIns="0" rIns="0" bIns="0" rtlCol="0" anchor="ctr"/>
+          <a:lstStyle/>
+          <a:p>
+            <a:pPr algn="ctr" indent="0" marL="0">
+              <a:buNone/>
+            </a:pPr>
+            <a:r>
+              <a:rPr lang="en-US" sz="1300" b="1" dirty="0">
+                <a:solidFill>
+                  <a:srgbClr val="9D174D"/>
+                </a:solidFill>
+                <a:latin typeface="Trebuchet MS" pitchFamily="34" charset="0"/>
+                <a:ea typeface="Trebuchet MS" pitchFamily="34" charset="-122"/>
+                <a:cs typeface="Trebuchet MS" pitchFamily="34" charset="-120"/>
+              </a:rPr>
+              <a:t>ly</a:t>
+            </a:r>
+            <a:endParaRPr lang="en-US" sz="1300" dirty="0"/>
+          </a:p>
+        </p:txBody>
+      </p:sp>
+      <p:sp>
+        <p:nvSpPr>
+          <p:cNvPr id="28" name="Text 26"/>
+          <p:cNvSpPr/>
+          <p:nvPr/>
+        </p:nvSpPr>
+        <p:spPr>
+          <a:xfrm>
+            <a:off x="6998818" y="2569464"/>
+            <a:ext cx="1581912" cy="201168"/>
+          </a:xfrm>
+          <a:prstGeom prst="rect">
+            <a:avLst/>
+          </a:prstGeom>
+          <a:noFill/>
+          <a:ln/>
+        </p:spPr>
+        <p:txBody>
+          <a:bodyPr wrap="square" lIns="0" tIns="0" rIns="0" bIns="0" rtlCol="0" anchor="t"/>
+          <a:lstStyle/>
+          <a:p>
+            <a:pPr algn="ctr" indent="0" marL="0">
+              <a:buNone/>
+            </a:pPr>
+            <a:r>
+              <a:rPr lang="en-US" sz="850" dirty="0">
+                <a:solidFill>
+                  <a:srgbClr val="475569"/>
+                </a:solidFill>
+                <a:latin typeface="Calibri" pitchFamily="34" charset="0"/>
+                <a:ea typeface="Calibri" pitchFamily="34" charset="-122"/>
+                <a:cs typeface="Calibri" pitchFamily="34" charset="-120"/>
+              </a:rPr>
+              <a:t>in a certain way (makes an adverb)</a:t>
+            </a:r>
+            <a:endParaRPr lang="en-US" sz="850" dirty="0"/>
+          </a:p>
+        </p:txBody>
+      </p:sp>
+      <p:sp>
+        <p:nvSpPr>
+          <p:cNvPr id="29" name="Shape 27"/>
           <p:cNvSpPr/>
           <p:nvPr/>
         </p:nvSpPr>
@@ -30308,7 +30422,7 @@
       </p:sp>
       <p:sp>
         <p:nvSpPr>
-          <p:cNvPr id="26" name="Text 24"/>
+          <p:cNvPr id="30" name="Text 28"/>
           <p:cNvSpPr/>
           <p:nvPr/>
         </p:nvSpPr>
@@ -30347,7 +30461,7 @@
       </p:sp>
       <p:sp>
         <p:nvSpPr>
-          <p:cNvPr id="27" name="Shape 25"/>
+          <p:cNvPr id="31" name="Shape 29"/>
           <p:cNvSpPr/>
           <p:nvPr/>
         </p:nvSpPr>
@@ -30374,14 +30488,14 @@
       </p:sp>
       <p:sp>
         <p:nvSpPr>
-          <p:cNvPr id="28" name="Shape 26"/>
-          <p:cNvSpPr/>
-          <p:nvPr/>
-        </p:nvSpPr>
-        <p:spPr>
-          <a:xfrm>
-            <a:off x="1975104" y="3364992"/>
-            <a:ext cx="1554480" cy="475488"/>
+          <p:cNvPr id="32" name="Shape 30"/>
+          <p:cNvSpPr/>
+          <p:nvPr/>
+        </p:nvSpPr>
+        <p:spPr>
+          <a:xfrm>
+            <a:off x="1978152" y="3364992"/>
+            <a:ext cx="1225296" cy="475488"/>
           </a:xfrm>
           <a:prstGeom prst="rect">
             <a:avLst>
@@ -30401,14 +30515,14 @@
       </p:sp>
       <p:sp>
         <p:nvSpPr>
-          <p:cNvPr id="29" name="Text 27"/>
-          <p:cNvSpPr/>
-          <p:nvPr/>
-        </p:nvSpPr>
-        <p:spPr>
-          <a:xfrm>
-            <a:off x="1975104" y="3364992"/>
-            <a:ext cx="1554480" cy="475488"/>
+          <p:cNvPr id="33" name="Text 31"/>
+          <p:cNvSpPr/>
+          <p:nvPr/>
+        </p:nvSpPr>
+        <p:spPr>
+          <a:xfrm>
+            <a:off x="1978152" y="3364992"/>
+            <a:ext cx="1225296" cy="475488"/>
           </a:xfrm>
           <a:prstGeom prst="rect">
             <a:avLst/>
@@ -30440,14 +30554,14 @@
       </p:sp>
       <p:sp>
         <p:nvSpPr>
-          <p:cNvPr id="30" name="Text 28"/>
-          <p:cNvSpPr/>
-          <p:nvPr/>
-        </p:nvSpPr>
-        <p:spPr>
-          <a:xfrm>
-            <a:off x="3529584" y="3364992"/>
-            <a:ext cx="73152" cy="475488"/>
+          <p:cNvPr id="34" name="Text 32"/>
+          <p:cNvSpPr/>
+          <p:nvPr/>
+        </p:nvSpPr>
+        <p:spPr>
+          <a:xfrm>
+            <a:off x="3203448" y="3364992"/>
+            <a:ext cx="76200" cy="475488"/>
           </a:xfrm>
           <a:prstGeom prst="rect">
             <a:avLst/>
@@ -30479,14 +30593,14 @@
       </p:sp>
       <p:sp>
         <p:nvSpPr>
-          <p:cNvPr id="31" name="Shape 29"/>
-          <p:cNvSpPr/>
-          <p:nvPr/>
-        </p:nvSpPr>
-        <p:spPr>
-          <a:xfrm>
-            <a:off x="3602736" y="3364992"/>
-            <a:ext cx="1554480" cy="475488"/>
+          <p:cNvPr id="35" name="Shape 33"/>
+          <p:cNvSpPr/>
+          <p:nvPr/>
+        </p:nvSpPr>
+        <p:spPr>
+          <a:xfrm>
+            <a:off x="3279648" y="3364992"/>
+            <a:ext cx="1225296" cy="475488"/>
           </a:xfrm>
           <a:prstGeom prst="rect">
             <a:avLst>
@@ -30506,14 +30620,14 @@
       </p:sp>
       <p:sp>
         <p:nvSpPr>
-          <p:cNvPr id="32" name="Text 30"/>
-          <p:cNvSpPr/>
-          <p:nvPr/>
-        </p:nvSpPr>
-        <p:spPr>
-          <a:xfrm>
-            <a:off x="3602736" y="3364992"/>
-            <a:ext cx="1554480" cy="475488"/>
+          <p:cNvPr id="36" name="Text 34"/>
+          <p:cNvSpPr/>
+          <p:nvPr/>
+        </p:nvSpPr>
+        <p:spPr>
+          <a:xfrm>
+            <a:off x="3279648" y="3364992"/>
+            <a:ext cx="1225296" cy="475488"/>
           </a:xfrm>
           <a:prstGeom prst="rect">
             <a:avLst/>
@@ -30545,14 +30659,14 @@
       </p:sp>
       <p:sp>
         <p:nvSpPr>
-          <p:cNvPr id="33" name="Text 31"/>
-          <p:cNvSpPr/>
-          <p:nvPr/>
-        </p:nvSpPr>
-        <p:spPr>
-          <a:xfrm>
-            <a:off x="5157216" y="3364992"/>
-            <a:ext cx="73152" cy="475488"/>
+          <p:cNvPr id="37" name="Text 35"/>
+          <p:cNvSpPr/>
+          <p:nvPr/>
+        </p:nvSpPr>
+        <p:spPr>
+          <a:xfrm>
+            <a:off x="4504944" y="3364992"/>
+            <a:ext cx="76200" cy="475488"/>
           </a:xfrm>
           <a:prstGeom prst="rect">
             <a:avLst/>
@@ -30584,14 +30698,14 @@
       </p:sp>
       <p:sp>
         <p:nvSpPr>
-          <p:cNvPr id="34" name="Shape 32"/>
-          <p:cNvSpPr/>
-          <p:nvPr/>
-        </p:nvSpPr>
-        <p:spPr>
-          <a:xfrm>
-            <a:off x="5230368" y="3364992"/>
-            <a:ext cx="1554480" cy="475488"/>
+          <p:cNvPr id="38" name="Shape 36"/>
+          <p:cNvSpPr/>
+          <p:nvPr/>
+        </p:nvSpPr>
+        <p:spPr>
+          <a:xfrm>
+            <a:off x="4581144" y="3364992"/>
+            <a:ext cx="1225296" cy="475488"/>
           </a:xfrm>
           <a:prstGeom prst="rect">
             <a:avLst>
@@ -30611,14 +30725,14 @@
       </p:sp>
       <p:sp>
         <p:nvSpPr>
-          <p:cNvPr id="35" name="Text 33"/>
-          <p:cNvSpPr/>
-          <p:nvPr/>
-        </p:nvSpPr>
-        <p:spPr>
-          <a:xfrm>
-            <a:off x="5230368" y="3364992"/>
-            <a:ext cx="1554480" cy="475488"/>
+          <p:cNvPr id="39" name="Text 37"/>
+          <p:cNvSpPr/>
+          <p:nvPr/>
+        </p:nvSpPr>
+        <p:spPr>
+          <a:xfrm>
+            <a:off x="4581144" y="3364992"/>
+            <a:ext cx="1225296" cy="475488"/>
           </a:xfrm>
           <a:prstGeom prst="rect">
             <a:avLst/>
@@ -30642,7 +30756,7 @@
                 <a:ea typeface="Trebuchet MS" pitchFamily="34" charset="-122"/>
                 <a:cs typeface="Trebuchet MS" pitchFamily="34" charset="-120"/>
               </a:rPr>
-              <a:t>age</a:t>
+              <a:t>ag</a:t>
             </a:r>
             <a:endParaRPr lang="en-US" sz="1400" dirty="0"/>
           </a:p>
@@ -30650,14 +30764,14 @@
       </p:sp>
       <p:sp>
         <p:nvSpPr>
-          <p:cNvPr id="36" name="Text 34"/>
-          <p:cNvSpPr/>
-          <p:nvPr/>
-        </p:nvSpPr>
-        <p:spPr>
-          <a:xfrm>
-            <a:off x="6784848" y="3364992"/>
-            <a:ext cx="73152" cy="475488"/>
+          <p:cNvPr id="40" name="Text 38"/>
+          <p:cNvSpPr/>
+          <p:nvPr/>
+        </p:nvSpPr>
+        <p:spPr>
+          <a:xfrm>
+            <a:off x="5806440" y="3364992"/>
+            <a:ext cx="76200" cy="475488"/>
           </a:xfrm>
           <a:prstGeom prst="rect">
             <a:avLst/>
@@ -30689,14 +30803,14 @@
       </p:sp>
       <p:sp>
         <p:nvSpPr>
-          <p:cNvPr id="37" name="Shape 35"/>
-          <p:cNvSpPr/>
-          <p:nvPr/>
-        </p:nvSpPr>
-        <p:spPr>
-          <a:xfrm>
-            <a:off x="6858000" y="3364992"/>
-            <a:ext cx="1554480" cy="475488"/>
+          <p:cNvPr id="41" name="Shape 39"/>
+          <p:cNvSpPr/>
+          <p:nvPr/>
+        </p:nvSpPr>
+        <p:spPr>
+          <a:xfrm>
+            <a:off x="5882640" y="3364992"/>
+            <a:ext cx="1225296" cy="475488"/>
           </a:xfrm>
           <a:prstGeom prst="rect">
             <a:avLst>
@@ -30716,14 +30830,14 @@
       </p:sp>
       <p:sp>
         <p:nvSpPr>
-          <p:cNvPr id="38" name="Text 36"/>
-          <p:cNvSpPr/>
-          <p:nvPr/>
-        </p:nvSpPr>
-        <p:spPr>
-          <a:xfrm>
-            <a:off x="6858000" y="3364992"/>
-            <a:ext cx="1554480" cy="475488"/>
+          <p:cNvPr id="42" name="Text 40"/>
+          <p:cNvSpPr/>
+          <p:nvPr/>
+        </p:nvSpPr>
+        <p:spPr>
+          <a:xfrm>
+            <a:off x="5882640" y="3364992"/>
+            <a:ext cx="1225296" cy="475488"/>
           </a:xfrm>
           <a:prstGeom prst="rect">
             <a:avLst/>
@@ -30747,7 +30861,7 @@
                 <a:ea typeface="Trebuchet MS" pitchFamily="34" charset="-122"/>
                 <a:cs typeface="Trebuchet MS" pitchFamily="34" charset="-120"/>
               </a:rPr>
-              <a:t>ment</a:t>
+              <a:t>ing</a:t>
             </a:r>
             <a:endParaRPr lang="en-US" sz="1400" dirty="0"/>
           </a:p>
@@ -30755,7 +30869,112 @@
       </p:sp>
       <p:sp>
         <p:nvSpPr>
-          <p:cNvPr id="39" name="Shape 37"/>
+          <p:cNvPr id="43" name="Text 41"/>
+          <p:cNvSpPr/>
+          <p:nvPr/>
+        </p:nvSpPr>
+        <p:spPr>
+          <a:xfrm>
+            <a:off x="7107936" y="3364992"/>
+            <a:ext cx="76200" cy="475488"/>
+          </a:xfrm>
+          <a:prstGeom prst="rect">
+            <a:avLst/>
+          </a:prstGeom>
+          <a:noFill/>
+          <a:ln/>
+        </p:spPr>
+        <p:txBody>
+          <a:bodyPr wrap="square" lIns="0" tIns="0" rIns="0" bIns="0" rtlCol="0" anchor="ctr"/>
+          <a:lstStyle/>
+          <a:p>
+            <a:pPr algn="ctr" indent="0" marL="0">
+              <a:buNone/>
+            </a:pPr>
+            <a:r>
+              <a:rPr lang="en-US" sz="1600" b="1" dirty="0">
+                <a:solidFill>
+                  <a:srgbClr val="0D9488"/>
+                </a:solidFill>
+                <a:latin typeface="Trebuchet MS" pitchFamily="34" charset="0"/>
+                <a:ea typeface="Trebuchet MS" pitchFamily="34" charset="-122"/>
+                <a:cs typeface="Trebuchet MS" pitchFamily="34" charset="-120"/>
+              </a:rPr>
+              <a:t>·</a:t>
+            </a:r>
+            <a:endParaRPr lang="en-US" sz="1600" dirty="0"/>
+          </a:p>
+        </p:txBody>
+      </p:sp>
+      <p:sp>
+        <p:nvSpPr>
+          <p:cNvPr id="44" name="Shape 42"/>
+          <p:cNvSpPr/>
+          <p:nvPr/>
+        </p:nvSpPr>
+        <p:spPr>
+          <a:xfrm>
+            <a:off x="7184136" y="3364992"/>
+            <a:ext cx="1225296" cy="475488"/>
+          </a:xfrm>
+          <a:prstGeom prst="rect">
+            <a:avLst>
+              <a:gd name="adj" fmla="val 9615"/>
+            </a:avLst>
+          </a:prstGeom>
+          <a:solidFill>
+            <a:srgbClr val="FFFFFF"/>
+          </a:solidFill>
+          <a:ln w="12700">
+            <a:solidFill>
+              <a:srgbClr val="0D9488"/>
+            </a:solidFill>
+            <a:prstDash val="solid"/>
+          </a:ln>
+        </p:spPr>
+      </p:sp>
+      <p:sp>
+        <p:nvSpPr>
+          <p:cNvPr id="45" name="Text 43"/>
+          <p:cNvSpPr/>
+          <p:nvPr/>
+        </p:nvSpPr>
+        <p:spPr>
+          <a:xfrm>
+            <a:off x="7184136" y="3364992"/>
+            <a:ext cx="1225296" cy="475488"/>
+          </a:xfrm>
+          <a:prstGeom prst="rect">
+            <a:avLst/>
+          </a:prstGeom>
+          <a:noFill/>
+          <a:ln/>
+        </p:spPr>
+        <p:txBody>
+          <a:bodyPr wrap="square" lIns="0" tIns="0" rIns="0" bIns="0" rtlCol="0" anchor="ctr"/>
+          <a:lstStyle/>
+          <a:p>
+            <a:pPr algn="ctr" indent="0" marL="0">
+              <a:buNone/>
+            </a:pPr>
+            <a:r>
+              <a:rPr lang="en-US" sz="1400" b="1" dirty="0">
+                <a:solidFill>
+                  <a:srgbClr val="0D9488"/>
+                </a:solidFill>
+                <a:latin typeface="Trebuchet MS" pitchFamily="34" charset="0"/>
+                <a:ea typeface="Trebuchet MS" pitchFamily="34" charset="-122"/>
+                <a:cs typeface="Trebuchet MS" pitchFamily="34" charset="-120"/>
+              </a:rPr>
+              <a:t>ly</a:t>
+            </a:r>
+            <a:endParaRPr lang="en-US" sz="1400" dirty="0"/>
+          </a:p>
+        </p:txBody>
+      </p:sp>
+      <p:sp>
+        <p:nvSpPr>
+          <p:cNvPr id="46" name="Shape 44"/>
           <p:cNvSpPr/>
           <p:nvPr/>
         </p:nvSpPr>
@@ -30782,7 +31001,7 @@
       </p:sp>
       <p:sp>
         <p:nvSpPr>
-          <p:cNvPr id="40" name="Text 38"/>
+          <p:cNvPr id="47" name="Text 45"/>
           <p:cNvSpPr/>
           <p:nvPr/>
         </p:nvSpPr>
@@ -30821,7 +31040,7 @@
       </p:sp>
       <p:sp>
         <p:nvSpPr>
-          <p:cNvPr id="41" name="Shape 39"/>
+          <p:cNvPr id="48" name="Shape 46"/>
           <p:cNvSpPr/>
           <p:nvPr/>
         </p:nvSpPr>
@@ -30848,7 +31067,7 @@
       </p:sp>
       <p:sp>
         <p:nvSpPr>
-          <p:cNvPr id="42" name="Shape 40"/>
+          <p:cNvPr id="49" name="Shape 47"/>
           <p:cNvSpPr/>
           <p:nvPr/>
         </p:nvSpPr>
@@ -30875,7 +31094,7 @@
       </p:sp>
       <p:sp>
         <p:nvSpPr>
-          <p:cNvPr id="43" name="Text 41"/>
+          <p:cNvPr id="50" name="Text 48"/>
           <p:cNvSpPr/>
           <p:nvPr/>
         </p:nvSpPr>
@@ -30914,7 +31133,7 @@
       </p:sp>
       <p:sp>
         <p:nvSpPr>
-          <p:cNvPr id="44" name="Shape 42"/>
+          <p:cNvPr id="51" name="Shape 49"/>
           <p:cNvSpPr/>
           <p:nvPr/>
         </p:nvSpPr>
@@ -30941,7 +31160,7 @@
       </p:sp>
       <p:sp>
         <p:nvSpPr>
-          <p:cNvPr id="45" name="Text 43"/>
+          <p:cNvPr id="52" name="Text 50"/>
           <p:cNvSpPr/>
           <p:nvPr/>
         </p:nvSpPr>
@@ -30980,7 +31199,7 @@
       </p:sp>
       <p:sp>
         <p:nvSpPr>
-          <p:cNvPr id="46" name="Shape 44"/>
+          <p:cNvPr id="53" name="Shape 51"/>
           <p:cNvSpPr/>
           <p:nvPr/>
         </p:nvSpPr>
@@ -31007,7 +31226,7 @@
       </p:sp>
       <p:sp>
         <p:nvSpPr>
-          <p:cNvPr id="47" name="Text 45"/>
+          <p:cNvPr id="54" name="Text 52"/>
           <p:cNvSpPr/>
           <p:nvPr/>
         </p:nvSpPr>
@@ -31046,7 +31265,7 @@
       </p:sp>
       <p:sp>
         <p:nvSpPr>
-          <p:cNvPr id="48" name="Text 46"/>
+          <p:cNvPr id="55" name="Text 53"/>
           <p:cNvSpPr/>
           <p:nvPr/>
         </p:nvSpPr>
@@ -31085,7 +31304,7 @@
       </p:sp>
       <p:sp>
         <p:nvSpPr>
-          <p:cNvPr id="49" name="Shape 47"/>
+          <p:cNvPr id="56" name="Shape 54"/>
           <p:cNvSpPr/>
           <p:nvPr/>
         </p:nvSpPr>
@@ -31112,7 +31331,7 @@
       </p:sp>
       <p:sp>
         <p:nvSpPr>
-          <p:cNvPr id="50" name="Text 48"/>
+          <p:cNvPr id="57" name="Text 55"/>
           <p:cNvSpPr/>
           <p:nvPr/>
         </p:nvSpPr>
@@ -31151,7 +31370,7 @@
       </p:sp>
       <p:sp>
         <p:nvSpPr>
-          <p:cNvPr id="51" name="Shape 49"/>
+          <p:cNvPr id="58" name="Shape 56"/>
           <p:cNvSpPr/>
           <p:nvPr/>
         </p:nvSpPr>
@@ -31178,7 +31397,7 @@
       </p:sp>
       <p:sp>
         <p:nvSpPr>
-          <p:cNvPr id="52" name="Text 50"/>
+          <p:cNvPr id="59" name="Text 57"/>
           <p:cNvSpPr/>
           <p:nvPr/>
         </p:nvSpPr>
@@ -31217,7 +31436,7 @@
       </p:sp>
       <p:sp>
         <p:nvSpPr>
-          <p:cNvPr id="53" name="Shape 51"/>
+          <p:cNvPr id="60" name="Shape 58"/>
           <p:cNvSpPr/>
           <p:nvPr/>
         </p:nvSpPr>
@@ -31244,7 +31463,7 @@
       </p:sp>
       <p:sp>
         <p:nvSpPr>
-          <p:cNvPr id="54" name="Text 52"/>
+          <p:cNvPr id="61" name="Text 59"/>
           <p:cNvSpPr/>
           <p:nvPr/>
         </p:nvSpPr>
@@ -31283,7 +31502,7 @@
       </p:sp>
       <p:sp>
         <p:nvSpPr>
-          <p:cNvPr id="55" name="Shape 53"/>
+          <p:cNvPr id="62" name="Shape 60"/>
           <p:cNvSpPr/>
           <p:nvPr/>
         </p:nvSpPr>
@@ -31310,7 +31529,7 @@
       </p:sp>
       <p:sp>
         <p:nvSpPr>
-          <p:cNvPr id="56" name="Text 54"/>
+          <p:cNvPr id="63" name="Text 61"/>
           <p:cNvSpPr/>
           <p:nvPr/>
         </p:nvSpPr>
@@ -31341,7 +31560,7 @@
                 <a:ea typeface="Trebuchet MS" pitchFamily="34" charset="-122"/>
                 <a:cs typeface="Trebuchet MS" pitchFamily="34" charset="-120"/>
               </a:rPr>
-              <a:t>ge</a:t>
+              <a:t>g</a:t>
             </a:r>
             <a:endParaRPr lang="en-US" sz="900" dirty="0"/>
           </a:p>
@@ -31349,46 +31568,7 @@
       </p:sp>
       <p:sp>
         <p:nvSpPr>
-          <p:cNvPr id="57" name="Text 55"/>
-          <p:cNvSpPr/>
-          <p:nvPr/>
-        </p:nvSpPr>
-        <p:spPr>
-          <a:xfrm>
-            <a:off x="5515910" y="4572000"/>
-            <a:ext cx="543652" cy="219456"/>
-          </a:xfrm>
-          <a:prstGeom prst="rect">
-            <a:avLst/>
-          </a:prstGeom>
-          <a:noFill/>
-          <a:ln/>
-        </p:spPr>
-        <p:txBody>
-          <a:bodyPr wrap="square" lIns="0" tIns="0" rIns="0" bIns="0" rtlCol="0" anchor="t"/>
-          <a:lstStyle/>
-          <a:p>
-            <a:pPr algn="ctr" indent="0" marL="0">
-              <a:buNone/>
-            </a:pPr>
-            <a:r>
-              <a:rPr lang="en-US" sz="750" i="1" dirty="0">
-                <a:solidFill>
-                  <a:srgbClr val="94A3B8"/>
-                </a:solidFill>
-                <a:latin typeface="Calibri" pitchFamily="34" charset="0"/>
-                <a:ea typeface="Calibri" pitchFamily="34" charset="-122"/>
-                <a:cs typeface="Calibri" pitchFamily="34" charset="-120"/>
-              </a:rPr>
-              <a:t>/j/</a:t>
-            </a:r>
-            <a:endParaRPr lang="en-US" sz="750" dirty="0"/>
-          </a:p>
-        </p:txBody>
-      </p:sp>
-      <p:sp>
-        <p:nvSpPr>
-          <p:cNvPr id="58" name="Shape 56"/>
+          <p:cNvPr id="64" name="Shape 62"/>
           <p:cNvSpPr/>
           <p:nvPr/>
         </p:nvSpPr>
@@ -31415,7 +31595,7 @@
       </p:sp>
       <p:sp>
         <p:nvSpPr>
-          <p:cNvPr id="59" name="Text 57"/>
+          <p:cNvPr id="65" name="Text 63"/>
           <p:cNvSpPr/>
           <p:nvPr/>
         </p:nvSpPr>
@@ -31446,7 +31626,7 @@
                 <a:ea typeface="Trebuchet MS" pitchFamily="34" charset="-122"/>
                 <a:cs typeface="Trebuchet MS" pitchFamily="34" charset="-120"/>
               </a:rPr>
-              <a:t>m</a:t>
+              <a:t>i</a:t>
             </a:r>
             <a:endParaRPr lang="en-US" sz="900" dirty="0"/>
           </a:p>
@@ -31454,7 +31634,7 @@
       </p:sp>
       <p:sp>
         <p:nvSpPr>
-          <p:cNvPr id="60" name="Shape 58"/>
+          <p:cNvPr id="66" name="Shape 64"/>
           <p:cNvSpPr/>
           <p:nvPr/>
         </p:nvSpPr>
@@ -31481,7 +31661,7 @@
       </p:sp>
       <p:sp>
         <p:nvSpPr>
-          <p:cNvPr id="61" name="Text 59"/>
+          <p:cNvPr id="67" name="Text 65"/>
           <p:cNvSpPr/>
           <p:nvPr/>
         </p:nvSpPr>
@@ -31512,7 +31692,7 @@
                 <a:ea typeface="Trebuchet MS" pitchFamily="34" charset="-122"/>
                 <a:cs typeface="Trebuchet MS" pitchFamily="34" charset="-120"/>
               </a:rPr>
-              <a:t>e</a:t>
+              <a:t>ng</a:t>
             </a:r>
             <a:endParaRPr lang="en-US" sz="900" dirty="0"/>
           </a:p>
@@ -31520,7 +31700,7 @@
       </p:sp>
       <p:sp>
         <p:nvSpPr>
-          <p:cNvPr id="62" name="Shape 60"/>
+          <p:cNvPr id="68" name="Shape 66"/>
           <p:cNvSpPr/>
           <p:nvPr/>
         </p:nvSpPr>
@@ -31547,7 +31727,7 @@
       </p:sp>
       <p:sp>
         <p:nvSpPr>
-          <p:cNvPr id="63" name="Text 61"/>
+          <p:cNvPr id="69" name="Text 67"/>
           <p:cNvSpPr/>
           <p:nvPr/>
         </p:nvSpPr>
@@ -31578,7 +31758,7 @@
                 <a:ea typeface="Trebuchet MS" pitchFamily="34" charset="-122"/>
                 <a:cs typeface="Trebuchet MS" pitchFamily="34" charset="-120"/>
               </a:rPr>
-              <a:t>n</a:t>
+              <a:t>l</a:t>
             </a:r>
             <a:endParaRPr lang="en-US" sz="900" dirty="0"/>
           </a:p>
@@ -31586,7 +31766,7 @@
       </p:sp>
       <p:sp>
         <p:nvSpPr>
-          <p:cNvPr id="64" name="Shape 62"/>
+          <p:cNvPr id="70" name="Shape 68"/>
           <p:cNvSpPr/>
           <p:nvPr/>
         </p:nvSpPr>
@@ -31613,7 +31793,7 @@
       </p:sp>
       <p:sp>
         <p:nvSpPr>
-          <p:cNvPr id="65" name="Text 63"/>
+          <p:cNvPr id="71" name="Text 69"/>
           <p:cNvSpPr/>
           <p:nvPr/>
         </p:nvSpPr>
@@ -31644,7 +31824,7 @@
                 <a:ea typeface="Trebuchet MS" pitchFamily="34" charset="-122"/>
                 <a:cs typeface="Trebuchet MS" pitchFamily="34" charset="-120"/>
               </a:rPr>
-              <a:t>t</a:t>
+              <a:t>y</a:t>
             </a:r>
             <a:endParaRPr lang="en-US" sz="900" dirty="0"/>
           </a:p>
@@ -32075,7 +32255,7 @@
                 <a:ea typeface="Trebuchet MS" pitchFamily="34" charset="-122"/>
                 <a:cs typeface="Trebuchet MS" pitchFamily="34" charset="-120"/>
               </a:rPr>
-              <a:t>discouragement</a:t>
+              <a:t>encourager</a:t>
             </a:r>
             <a:endParaRPr lang="en-US" sz="2800" dirty="0"/>
           </a:p>
@@ -32902,7 +33082,7 @@
                 <a:ea typeface="Trebuchet MS" pitchFamily="34" charset="-122"/>
                 <a:cs typeface="Trebuchet MS" pitchFamily="34" charset="-120"/>
               </a:rPr>
-              <a:t>discouragement</a:t>
+              <a:t>encourager</a:t>
             </a:r>
             <a:endParaRPr lang="en-US" sz="2800" dirty="0"/>
           </a:p>
@@ -33041,7 +33221,7 @@
                 <a:ea typeface="Trebuchet MS" pitchFamily="34" charset="-122"/>
                 <a:cs typeface="Trebuchet MS" pitchFamily="34" charset="-120"/>
               </a:rPr>
-              <a:t>dis</a:t>
+              <a:t>en</a:t>
             </a:r>
             <a:endParaRPr lang="en-US" sz="1300" dirty="0"/>
           </a:p>
@@ -33080,7 +33260,7 @@
                 <a:ea typeface="Calibri" pitchFamily="34" charset="-122"/>
                 <a:cs typeface="Calibri" pitchFamily="34" charset="-120"/>
               </a:rPr>
-              <a:t>not or opposite of</a:t>
+              <a:t>to put into or cause</a:t>
             </a:r>
             <a:endParaRPr lang="en-US" sz="850" dirty="0"/>
           </a:p>
@@ -33192,7 +33372,7 @@
                 <a:ea typeface="Calibri" pitchFamily="34" charset="-122"/>
                 <a:cs typeface="Calibri" pitchFamily="34" charset="-120"/>
               </a:rPr>
-              <a:t>bravery from the heart</a:t>
+              <a:t>bravery, heart</a:t>
             </a:r>
             <a:endParaRPr lang="en-US" sz="850" dirty="0"/>
           </a:p>
@@ -33265,7 +33445,7 @@
                 <a:ea typeface="Trebuchet MS" pitchFamily="34" charset="-122"/>
                 <a:cs typeface="Trebuchet MS" pitchFamily="34" charset="-120"/>
               </a:rPr>
-              <a:t>ment</a:t>
+              <a:t>er</a:t>
             </a:r>
             <a:endParaRPr lang="en-US" sz="1300" dirty="0"/>
           </a:p>
@@ -33304,7 +33484,7 @@
                 <a:ea typeface="Calibri" pitchFamily="34" charset="-122"/>
                 <a:cs typeface="Calibri" pitchFamily="34" charset="-120"/>
               </a:rPr>
-              <a:t>the result or state of</a:t>
+              <a:t>a person who does something</a:t>
             </a:r>
             <a:endParaRPr lang="en-US" sz="850" dirty="0"/>
           </a:p>
@@ -33312,7 +33492,46 @@
       </p:sp>
       <p:sp>
         <p:nvSpPr>
-          <p:cNvPr id="25" name="Shape 23"/>
+          <p:cNvPr id="25" name="Text 23"/>
+          <p:cNvSpPr/>
+          <p:nvPr/>
+        </p:nvSpPr>
+        <p:spPr>
+          <a:xfrm>
+            <a:off x="6519672" y="2752344"/>
+            <a:ext cx="1828800" cy="182880"/>
+          </a:xfrm>
+          <a:prstGeom prst="rect">
+            <a:avLst/>
+          </a:prstGeom>
+          <a:noFill/>
+          <a:ln/>
+        </p:spPr>
+        <p:txBody>
+          <a:bodyPr wrap="square" lIns="0" tIns="0" rIns="0" bIns="0" rtlCol="0" anchor="t"/>
+          <a:lstStyle/>
+          <a:p>
+            <a:pPr algn="ctr" indent="0" marL="0">
+              <a:buNone/>
+            </a:pPr>
+            <a:r>
+              <a:rPr lang="en-US" sz="700" i="1" dirty="0">
+                <a:solidFill>
+                  <a:srgbClr val="94A3B8"/>
+                </a:solidFill>
+                <a:latin typeface="Calibri" pitchFamily="34" charset="0"/>
+                <a:ea typeface="Calibri" pitchFamily="34" charset="-122"/>
+                <a:cs typeface="Calibri" pitchFamily="34" charset="-120"/>
+              </a:rPr>
+              <a:t>'e' dropped before vowel suffix</a:t>
+            </a:r>
+            <a:endParaRPr lang="en-US" sz="700" dirty="0"/>
+          </a:p>
+        </p:txBody>
+      </p:sp>
+      <p:sp>
+        <p:nvSpPr>
+          <p:cNvPr id="26" name="Shape 24"/>
           <p:cNvSpPr/>
           <p:nvPr/>
         </p:nvSpPr>
@@ -33339,7 +33558,7 @@
       </p:sp>
       <p:sp>
         <p:nvSpPr>
-          <p:cNvPr id="26" name="Text 24"/>
+          <p:cNvPr id="27" name="Text 25"/>
           <p:cNvSpPr/>
           <p:nvPr/>
         </p:nvSpPr>
@@ -33378,7 +33597,7 @@
       </p:sp>
       <p:sp>
         <p:nvSpPr>
-          <p:cNvPr id="27" name="Shape 25"/>
+          <p:cNvPr id="28" name="Shape 26"/>
           <p:cNvSpPr/>
           <p:nvPr/>
         </p:nvSpPr>
@@ -33405,7 +33624,7 @@
       </p:sp>
       <p:sp>
         <p:nvSpPr>
-          <p:cNvPr id="28" name="Text 26"/>
+          <p:cNvPr id="29" name="Text 27"/>
           <p:cNvSpPr/>
           <p:nvPr/>
         </p:nvSpPr>
@@ -33444,7 +33663,7 @@
       </p:sp>
       <p:sp>
         <p:nvSpPr>
-          <p:cNvPr id="29" name="Shape 27"/>
+          <p:cNvPr id="30" name="Shape 28"/>
           <p:cNvSpPr/>
           <p:nvPr/>
         </p:nvSpPr>
@@ -33471,7 +33690,7 @@
       </p:sp>
       <p:sp>
         <p:nvSpPr>
-          <p:cNvPr id="30" name="Text 28"/>
+          <p:cNvPr id="31" name="Text 29"/>
           <p:cNvSpPr/>
           <p:nvPr/>
         </p:nvSpPr>
@@ -33510,7 +33729,7 @@
       </p:sp>
       <p:sp>
         <p:nvSpPr>
-          <p:cNvPr id="31" name="Shape 29"/>
+          <p:cNvPr id="32" name="Shape 30"/>
           <p:cNvSpPr/>
           <p:nvPr/>
         </p:nvSpPr>
@@ -33537,7 +33756,7 @@
       </p:sp>
       <p:sp>
         <p:nvSpPr>
-          <p:cNvPr id="32" name="Text 30"/>
+          <p:cNvPr id="33" name="Text 31"/>
           <p:cNvSpPr/>
           <p:nvPr/>
         </p:nvSpPr>
@@ -33999,7 +34218,7 @@
                 <a:ea typeface="Trebuchet MS" pitchFamily="34" charset="-122"/>
                 <a:cs typeface="Trebuchet MS" pitchFamily="34" charset="-120"/>
               </a:rPr>
-              <a:t>discouragement</a:t>
+              <a:t>encourager</a:t>
             </a:r>
             <a:endParaRPr lang="en-US" sz="2800" dirty="0"/>
           </a:p>
@@ -34138,7 +34357,7 @@
                 <a:ea typeface="Trebuchet MS" pitchFamily="34" charset="-122"/>
                 <a:cs typeface="Trebuchet MS" pitchFamily="34" charset="-120"/>
               </a:rPr>
-              <a:t>dis</a:t>
+              <a:t>en</a:t>
             </a:r>
             <a:endParaRPr lang="en-US" sz="1300" dirty="0"/>
           </a:p>
@@ -34177,7 +34396,7 @@
                 <a:ea typeface="Calibri" pitchFamily="34" charset="-122"/>
                 <a:cs typeface="Calibri" pitchFamily="34" charset="-120"/>
               </a:rPr>
-              <a:t>not or opposite of</a:t>
+              <a:t>to put into or cause</a:t>
             </a:r>
             <a:endParaRPr lang="en-US" sz="850" dirty="0"/>
           </a:p>
@@ -34289,7 +34508,7 @@
                 <a:ea typeface="Calibri" pitchFamily="34" charset="-122"/>
                 <a:cs typeface="Calibri" pitchFamily="34" charset="-120"/>
               </a:rPr>
-              <a:t>bravery from the heart</a:t>
+              <a:t>bravery, heart</a:t>
             </a:r>
             <a:endParaRPr lang="en-US" sz="850" dirty="0"/>
           </a:p>
@@ -34362,7 +34581,7 @@
                 <a:ea typeface="Trebuchet MS" pitchFamily="34" charset="-122"/>
                 <a:cs typeface="Trebuchet MS" pitchFamily="34" charset="-120"/>
               </a:rPr>
-              <a:t>ment</a:t>
+              <a:t>er</a:t>
             </a:r>
             <a:endParaRPr lang="en-US" sz="1300" dirty="0"/>
           </a:p>
@@ -34401,7 +34620,7 @@
                 <a:ea typeface="Calibri" pitchFamily="34" charset="-122"/>
                 <a:cs typeface="Calibri" pitchFamily="34" charset="-120"/>
               </a:rPr>
-              <a:t>the result or state of</a:t>
+              <a:t>a person who does something</a:t>
             </a:r>
             <a:endParaRPr lang="en-US" sz="850" dirty="0"/>
           </a:p>
@@ -34409,7 +34628,46 @@
       </p:sp>
       <p:sp>
         <p:nvSpPr>
-          <p:cNvPr id="25" name="Shape 23"/>
+          <p:cNvPr id="25" name="Text 23"/>
+          <p:cNvSpPr/>
+          <p:nvPr/>
+        </p:nvSpPr>
+        <p:spPr>
+          <a:xfrm>
+            <a:off x="6519672" y="2752344"/>
+            <a:ext cx="1828800" cy="182880"/>
+          </a:xfrm>
+          <a:prstGeom prst="rect">
+            <a:avLst/>
+          </a:prstGeom>
+          <a:noFill/>
+          <a:ln/>
+        </p:spPr>
+        <p:txBody>
+          <a:bodyPr wrap="square" lIns="0" tIns="0" rIns="0" bIns="0" rtlCol="0" anchor="t"/>
+          <a:lstStyle/>
+          <a:p>
+            <a:pPr algn="ctr" indent="0" marL="0">
+              <a:buNone/>
+            </a:pPr>
+            <a:r>
+              <a:rPr lang="en-US" sz="700" i="1" dirty="0">
+                <a:solidFill>
+                  <a:srgbClr val="94A3B8"/>
+                </a:solidFill>
+                <a:latin typeface="Calibri" pitchFamily="34" charset="0"/>
+                <a:ea typeface="Calibri" pitchFamily="34" charset="-122"/>
+                <a:cs typeface="Calibri" pitchFamily="34" charset="-120"/>
+              </a:rPr>
+              <a:t>'e' dropped before vowel suffix</a:t>
+            </a:r>
+            <a:endParaRPr lang="en-US" sz="700" dirty="0"/>
+          </a:p>
+        </p:txBody>
+      </p:sp>
+      <p:sp>
+        <p:nvSpPr>
+          <p:cNvPr id="26" name="Shape 24"/>
           <p:cNvSpPr/>
           <p:nvPr/>
         </p:nvSpPr>
@@ -34436,7 +34694,7 @@
       </p:sp>
       <p:sp>
         <p:nvSpPr>
-          <p:cNvPr id="26" name="Text 24"/>
+          <p:cNvPr id="27" name="Text 25"/>
           <p:cNvSpPr/>
           <p:nvPr/>
         </p:nvSpPr>
@@ -34475,7 +34733,7 @@
       </p:sp>
       <p:sp>
         <p:nvSpPr>
-          <p:cNvPr id="27" name="Shape 25"/>
+          <p:cNvPr id="28" name="Shape 26"/>
           <p:cNvSpPr/>
           <p:nvPr/>
         </p:nvSpPr>
@@ -34502,7 +34760,7 @@
       </p:sp>
       <p:sp>
         <p:nvSpPr>
-          <p:cNvPr id="28" name="Shape 26"/>
+          <p:cNvPr id="29" name="Shape 27"/>
           <p:cNvSpPr/>
           <p:nvPr/>
         </p:nvSpPr>
@@ -34529,7 +34787,7 @@
       </p:sp>
       <p:sp>
         <p:nvSpPr>
-          <p:cNvPr id="29" name="Text 27"/>
+          <p:cNvPr id="30" name="Text 28"/>
           <p:cNvSpPr/>
           <p:nvPr/>
         </p:nvSpPr>
@@ -34560,7 +34818,7 @@
                 <a:ea typeface="Trebuchet MS" pitchFamily="34" charset="-122"/>
                 <a:cs typeface="Trebuchet MS" pitchFamily="34" charset="-120"/>
               </a:rPr>
-              <a:t>dis</a:t>
+              <a:t>en</a:t>
             </a:r>
             <a:endParaRPr lang="en-US" sz="1400" dirty="0"/>
           </a:p>
@@ -34568,7 +34826,7 @@
       </p:sp>
       <p:sp>
         <p:nvSpPr>
-          <p:cNvPr id="30" name="Text 28"/>
+          <p:cNvPr id="31" name="Text 29"/>
           <p:cNvSpPr/>
           <p:nvPr/>
         </p:nvSpPr>
@@ -34607,7 +34865,7 @@
       </p:sp>
       <p:sp>
         <p:nvSpPr>
-          <p:cNvPr id="31" name="Shape 29"/>
+          <p:cNvPr id="32" name="Shape 30"/>
           <p:cNvSpPr/>
           <p:nvPr/>
         </p:nvSpPr>
@@ -34634,7 +34892,7 @@
       </p:sp>
       <p:sp>
         <p:nvSpPr>
-          <p:cNvPr id="32" name="Text 30"/>
+          <p:cNvPr id="33" name="Text 31"/>
           <p:cNvSpPr/>
           <p:nvPr/>
         </p:nvSpPr>
@@ -34673,7 +34931,7 @@
       </p:sp>
       <p:sp>
         <p:nvSpPr>
-          <p:cNvPr id="33" name="Text 31"/>
+          <p:cNvPr id="34" name="Text 32"/>
           <p:cNvSpPr/>
           <p:nvPr/>
         </p:nvSpPr>
@@ -34712,7 +34970,7 @@
       </p:sp>
       <p:sp>
         <p:nvSpPr>
-          <p:cNvPr id="34" name="Shape 32"/>
+          <p:cNvPr id="35" name="Shape 33"/>
           <p:cNvSpPr/>
           <p:nvPr/>
         </p:nvSpPr>
@@ -34739,7 +34997,7 @@
       </p:sp>
       <p:sp>
         <p:nvSpPr>
-          <p:cNvPr id="35" name="Text 33"/>
+          <p:cNvPr id="36" name="Text 34"/>
           <p:cNvSpPr/>
           <p:nvPr/>
         </p:nvSpPr>
@@ -34770,7 +35028,7 @@
                 <a:ea typeface="Trebuchet MS" pitchFamily="34" charset="-122"/>
                 <a:cs typeface="Trebuchet MS" pitchFamily="34" charset="-120"/>
               </a:rPr>
-              <a:t>age</a:t>
+              <a:t>ag</a:t>
             </a:r>
             <a:endParaRPr lang="en-US" sz="1400" dirty="0"/>
           </a:p>
@@ -34778,7 +35036,7 @@
       </p:sp>
       <p:sp>
         <p:nvSpPr>
-          <p:cNvPr id="36" name="Text 34"/>
+          <p:cNvPr id="37" name="Text 35"/>
           <p:cNvSpPr/>
           <p:nvPr/>
         </p:nvSpPr>
@@ -34817,7 +35075,7 @@
       </p:sp>
       <p:sp>
         <p:nvSpPr>
-          <p:cNvPr id="37" name="Shape 35"/>
+          <p:cNvPr id="38" name="Shape 36"/>
           <p:cNvSpPr/>
           <p:nvPr/>
         </p:nvSpPr>
@@ -34844,7 +35102,7 @@
       </p:sp>
       <p:sp>
         <p:nvSpPr>
-          <p:cNvPr id="38" name="Text 36"/>
+          <p:cNvPr id="39" name="Text 37"/>
           <p:cNvSpPr/>
           <p:nvPr/>
         </p:nvSpPr>
@@ -34875,7 +35133,7 @@
                 <a:ea typeface="Trebuchet MS" pitchFamily="34" charset="-122"/>
                 <a:cs typeface="Trebuchet MS" pitchFamily="34" charset="-120"/>
               </a:rPr>
-              <a:t>ment</a:t>
+              <a:t>er</a:t>
             </a:r>
             <a:endParaRPr lang="en-US" sz="1400" dirty="0"/>
           </a:p>
@@ -34883,7 +35141,7 @@
       </p:sp>
       <p:sp>
         <p:nvSpPr>
-          <p:cNvPr id="39" name="Shape 37"/>
+          <p:cNvPr id="40" name="Shape 38"/>
           <p:cNvSpPr/>
           <p:nvPr/>
         </p:nvSpPr>
@@ -34910,7 +35168,7 @@
       </p:sp>
       <p:sp>
         <p:nvSpPr>
-          <p:cNvPr id="40" name="Text 38"/>
+          <p:cNvPr id="41" name="Text 39"/>
           <p:cNvSpPr/>
           <p:nvPr/>
         </p:nvSpPr>
@@ -34949,7 +35207,7 @@
       </p:sp>
       <p:sp>
         <p:nvSpPr>
-          <p:cNvPr id="41" name="Shape 39"/>
+          <p:cNvPr id="42" name="Shape 40"/>
           <p:cNvSpPr/>
           <p:nvPr/>
         </p:nvSpPr>
@@ -34976,7 +35234,7 @@
       </p:sp>
       <p:sp>
         <p:nvSpPr>
-          <p:cNvPr id="42" name="Text 40"/>
+          <p:cNvPr id="43" name="Text 41"/>
           <p:cNvSpPr/>
           <p:nvPr/>
         </p:nvSpPr>
@@ -35438,7 +35696,7 @@
                 <a:ea typeface="Trebuchet MS" pitchFamily="34" charset="-122"/>
                 <a:cs typeface="Trebuchet MS" pitchFamily="34" charset="-120"/>
               </a:rPr>
-              <a:t>discouragement</a:t>
+              <a:t>encourager</a:t>
             </a:r>
             <a:endParaRPr lang="en-US" sz="2800" dirty="0"/>
           </a:p>
@@ -35577,7 +35835,7 @@
                 <a:ea typeface="Trebuchet MS" pitchFamily="34" charset="-122"/>
                 <a:cs typeface="Trebuchet MS" pitchFamily="34" charset="-120"/>
               </a:rPr>
-              <a:t>dis</a:t>
+              <a:t>en</a:t>
             </a:r>
             <a:endParaRPr lang="en-US" sz="1300" dirty="0"/>
           </a:p>
@@ -35616,7 +35874,7 @@
                 <a:ea typeface="Calibri" pitchFamily="34" charset="-122"/>
                 <a:cs typeface="Calibri" pitchFamily="34" charset="-120"/>
               </a:rPr>
-              <a:t>not or opposite of</a:t>
+              <a:t>to put into or cause</a:t>
             </a:r>
             <a:endParaRPr lang="en-US" sz="850" dirty="0"/>
           </a:p>
@@ -35728,7 +35986,7 @@
                 <a:ea typeface="Calibri" pitchFamily="34" charset="-122"/>
                 <a:cs typeface="Calibri" pitchFamily="34" charset="-120"/>
               </a:rPr>
-              <a:t>bravery from the heart</a:t>
+              <a:t>bravery, heart</a:t>
             </a:r>
             <a:endParaRPr lang="en-US" sz="850" dirty="0"/>
           </a:p>
@@ -35801,7 +36059,7 @@
                 <a:ea typeface="Trebuchet MS" pitchFamily="34" charset="-122"/>
                 <a:cs typeface="Trebuchet MS" pitchFamily="34" charset="-120"/>
               </a:rPr>
-              <a:t>ment</a:t>
+              <a:t>er</a:t>
             </a:r>
             <a:endParaRPr lang="en-US" sz="1300" dirty="0"/>
           </a:p>
@@ -35840,7 +36098,7 @@
                 <a:ea typeface="Calibri" pitchFamily="34" charset="-122"/>
                 <a:cs typeface="Calibri" pitchFamily="34" charset="-120"/>
               </a:rPr>
-              <a:t>the result or state of</a:t>
+              <a:t>a person who does something</a:t>
             </a:r>
             <a:endParaRPr lang="en-US" sz="850" dirty="0"/>
           </a:p>
@@ -35848,7 +36106,46 @@
       </p:sp>
       <p:sp>
         <p:nvSpPr>
-          <p:cNvPr id="25" name="Shape 23"/>
+          <p:cNvPr id="25" name="Text 23"/>
+          <p:cNvSpPr/>
+          <p:nvPr/>
+        </p:nvSpPr>
+        <p:spPr>
+          <a:xfrm>
+            <a:off x="6519672" y="2752344"/>
+            <a:ext cx="1828800" cy="182880"/>
+          </a:xfrm>
+          <a:prstGeom prst="rect">
+            <a:avLst/>
+          </a:prstGeom>
+          <a:noFill/>
+          <a:ln/>
+        </p:spPr>
+        <p:txBody>
+          <a:bodyPr wrap="square" lIns="0" tIns="0" rIns="0" bIns="0" rtlCol="0" anchor="t"/>
+          <a:lstStyle/>
+          <a:p>
+            <a:pPr algn="ctr" indent="0" marL="0">
+              <a:buNone/>
+            </a:pPr>
+            <a:r>
+              <a:rPr lang="en-US" sz="700" i="1" dirty="0">
+                <a:solidFill>
+                  <a:srgbClr val="94A3B8"/>
+                </a:solidFill>
+                <a:latin typeface="Calibri" pitchFamily="34" charset="0"/>
+                <a:ea typeface="Calibri" pitchFamily="34" charset="-122"/>
+                <a:cs typeface="Calibri" pitchFamily="34" charset="-120"/>
+              </a:rPr>
+              <a:t>'e' dropped before vowel suffix</a:t>
+            </a:r>
+            <a:endParaRPr lang="en-US" sz="700" dirty="0"/>
+          </a:p>
+        </p:txBody>
+      </p:sp>
+      <p:sp>
+        <p:nvSpPr>
+          <p:cNvPr id="26" name="Shape 24"/>
           <p:cNvSpPr/>
           <p:nvPr/>
         </p:nvSpPr>
@@ -35875,7 +36172,7 @@
       </p:sp>
       <p:sp>
         <p:nvSpPr>
-          <p:cNvPr id="26" name="Text 24"/>
+          <p:cNvPr id="27" name="Text 25"/>
           <p:cNvSpPr/>
           <p:nvPr/>
         </p:nvSpPr>
@@ -35914,7 +36211,7 @@
       </p:sp>
       <p:sp>
         <p:nvSpPr>
-          <p:cNvPr id="27" name="Shape 25"/>
+          <p:cNvPr id="28" name="Shape 26"/>
           <p:cNvSpPr/>
           <p:nvPr/>
         </p:nvSpPr>
@@ -35941,7 +36238,7 @@
       </p:sp>
       <p:sp>
         <p:nvSpPr>
-          <p:cNvPr id="28" name="Shape 26"/>
+          <p:cNvPr id="29" name="Shape 27"/>
           <p:cNvSpPr/>
           <p:nvPr/>
         </p:nvSpPr>
@@ -35968,7 +36265,7 @@
       </p:sp>
       <p:sp>
         <p:nvSpPr>
-          <p:cNvPr id="29" name="Text 27"/>
+          <p:cNvPr id="30" name="Text 28"/>
           <p:cNvSpPr/>
           <p:nvPr/>
         </p:nvSpPr>
@@ -35999,7 +36296,7 @@
                 <a:ea typeface="Trebuchet MS" pitchFamily="34" charset="-122"/>
                 <a:cs typeface="Trebuchet MS" pitchFamily="34" charset="-120"/>
               </a:rPr>
-              <a:t>dis</a:t>
+              <a:t>en</a:t>
             </a:r>
             <a:endParaRPr lang="en-US" sz="1400" dirty="0"/>
           </a:p>
@@ -36007,7 +36304,7 @@
       </p:sp>
       <p:sp>
         <p:nvSpPr>
-          <p:cNvPr id="30" name="Text 28"/>
+          <p:cNvPr id="31" name="Text 29"/>
           <p:cNvSpPr/>
           <p:nvPr/>
         </p:nvSpPr>
@@ -36046,7 +36343,7 @@
       </p:sp>
       <p:sp>
         <p:nvSpPr>
-          <p:cNvPr id="31" name="Shape 29"/>
+          <p:cNvPr id="32" name="Shape 30"/>
           <p:cNvSpPr/>
           <p:nvPr/>
         </p:nvSpPr>
@@ -36073,7 +36370,7 @@
       </p:sp>
       <p:sp>
         <p:nvSpPr>
-          <p:cNvPr id="32" name="Text 30"/>
+          <p:cNvPr id="33" name="Text 31"/>
           <p:cNvSpPr/>
           <p:nvPr/>
         </p:nvSpPr>
@@ -36112,7 +36409,7 @@
       </p:sp>
       <p:sp>
         <p:nvSpPr>
-          <p:cNvPr id="33" name="Text 31"/>
+          <p:cNvPr id="34" name="Text 32"/>
           <p:cNvSpPr/>
           <p:nvPr/>
         </p:nvSpPr>
@@ -36151,7 +36448,7 @@
       </p:sp>
       <p:sp>
         <p:nvSpPr>
-          <p:cNvPr id="34" name="Shape 32"/>
+          <p:cNvPr id="35" name="Shape 33"/>
           <p:cNvSpPr/>
           <p:nvPr/>
         </p:nvSpPr>
@@ -36178,7 +36475,7 @@
       </p:sp>
       <p:sp>
         <p:nvSpPr>
-          <p:cNvPr id="35" name="Text 33"/>
+          <p:cNvPr id="36" name="Text 34"/>
           <p:cNvSpPr/>
           <p:nvPr/>
         </p:nvSpPr>
@@ -36209,7 +36506,7 @@
                 <a:ea typeface="Trebuchet MS" pitchFamily="34" charset="-122"/>
                 <a:cs typeface="Trebuchet MS" pitchFamily="34" charset="-120"/>
               </a:rPr>
-              <a:t>age</a:t>
+              <a:t>ag</a:t>
             </a:r>
             <a:endParaRPr lang="en-US" sz="1400" dirty="0"/>
           </a:p>
@@ -36217,7 +36514,7 @@
       </p:sp>
       <p:sp>
         <p:nvSpPr>
-          <p:cNvPr id="36" name="Text 34"/>
+          <p:cNvPr id="37" name="Text 35"/>
           <p:cNvSpPr/>
           <p:nvPr/>
         </p:nvSpPr>
@@ -36256,7 +36553,7 @@
       </p:sp>
       <p:sp>
         <p:nvSpPr>
-          <p:cNvPr id="37" name="Shape 35"/>
+          <p:cNvPr id="38" name="Shape 36"/>
           <p:cNvSpPr/>
           <p:nvPr/>
         </p:nvSpPr>
@@ -36283,7 +36580,7 @@
       </p:sp>
       <p:sp>
         <p:nvSpPr>
-          <p:cNvPr id="38" name="Text 36"/>
+          <p:cNvPr id="39" name="Text 37"/>
           <p:cNvSpPr/>
           <p:nvPr/>
         </p:nvSpPr>
@@ -36314,7 +36611,7 @@
                 <a:ea typeface="Trebuchet MS" pitchFamily="34" charset="-122"/>
                 <a:cs typeface="Trebuchet MS" pitchFamily="34" charset="-120"/>
               </a:rPr>
-              <a:t>ment</a:t>
+              <a:t>er</a:t>
             </a:r>
             <a:endParaRPr lang="en-US" sz="1400" dirty="0"/>
           </a:p>
@@ -36322,7 +36619,7 @@
       </p:sp>
       <p:sp>
         <p:nvSpPr>
-          <p:cNvPr id="39" name="Shape 37"/>
+          <p:cNvPr id="40" name="Shape 38"/>
           <p:cNvSpPr/>
           <p:nvPr/>
         </p:nvSpPr>
@@ -36349,7 +36646,7 @@
       </p:sp>
       <p:sp>
         <p:nvSpPr>
-          <p:cNvPr id="40" name="Text 38"/>
+          <p:cNvPr id="41" name="Text 39"/>
           <p:cNvSpPr/>
           <p:nvPr/>
         </p:nvSpPr>
@@ -36388,7 +36685,7 @@
       </p:sp>
       <p:sp>
         <p:nvSpPr>
-          <p:cNvPr id="41" name="Shape 39"/>
+          <p:cNvPr id="42" name="Shape 40"/>
           <p:cNvSpPr/>
           <p:nvPr/>
         </p:nvSpPr>
@@ -36415,14 +36712,14 @@
       </p:sp>
       <p:sp>
         <p:nvSpPr>
-          <p:cNvPr id="42" name="Shape 40"/>
-          <p:cNvSpPr/>
-          <p:nvPr/>
-        </p:nvSpPr>
-        <p:spPr>
-          <a:xfrm>
-            <a:off x="1952596" y="4169664"/>
-            <a:ext cx="493776" cy="384048"/>
+          <p:cNvPr id="43" name="Shape 41"/>
+          <p:cNvSpPr/>
+          <p:nvPr/>
+        </p:nvSpPr>
+        <p:spPr>
+          <a:xfrm>
+            <a:off x="2023872" y="4169664"/>
+            <a:ext cx="685800" cy="384048"/>
           </a:xfrm>
           <a:prstGeom prst="rect">
             <a:avLst>
@@ -36442,14 +36739,14 @@
       </p:sp>
       <p:sp>
         <p:nvSpPr>
-          <p:cNvPr id="43" name="Text 41"/>
-          <p:cNvSpPr/>
-          <p:nvPr/>
-        </p:nvSpPr>
-        <p:spPr>
-          <a:xfrm>
-            <a:off x="1952596" y="4169664"/>
-            <a:ext cx="493776" cy="384048"/>
+          <p:cNvPr id="44" name="Text 42"/>
+          <p:cNvSpPr/>
+          <p:nvPr/>
+        </p:nvSpPr>
+        <p:spPr>
+          <a:xfrm>
+            <a:off x="2023872" y="4169664"/>
+            <a:ext cx="685800" cy="384048"/>
           </a:xfrm>
           <a:prstGeom prst="rect">
             <a:avLst/>
@@ -36473,7 +36770,7 @@
                 <a:ea typeface="Trebuchet MS" pitchFamily="34" charset="-122"/>
                 <a:cs typeface="Trebuchet MS" pitchFamily="34" charset="-120"/>
               </a:rPr>
-              <a:t>d</a:t>
+              <a:t>e</a:t>
             </a:r>
             <a:endParaRPr lang="en-US" sz="900" dirty="0"/>
           </a:p>
@@ -36481,14 +36778,14 @@
       </p:sp>
       <p:sp>
         <p:nvSpPr>
-          <p:cNvPr id="44" name="Shape 42"/>
-          <p:cNvSpPr/>
-          <p:nvPr/>
-        </p:nvSpPr>
-        <p:spPr>
-          <a:xfrm>
-            <a:off x="2497015" y="4169664"/>
-            <a:ext cx="493776" cy="384048"/>
+          <p:cNvPr id="45" name="Shape 43"/>
+          <p:cNvSpPr/>
+          <p:nvPr/>
+        </p:nvSpPr>
+        <p:spPr>
+          <a:xfrm>
+            <a:off x="2831592" y="4169664"/>
+            <a:ext cx="685800" cy="384048"/>
           </a:xfrm>
           <a:prstGeom prst="rect">
             <a:avLst>
@@ -36508,14 +36805,14 @@
       </p:sp>
       <p:sp>
         <p:nvSpPr>
-          <p:cNvPr id="45" name="Text 43"/>
-          <p:cNvSpPr/>
-          <p:nvPr/>
-        </p:nvSpPr>
-        <p:spPr>
-          <a:xfrm>
-            <a:off x="2497015" y="4169664"/>
-            <a:ext cx="493776" cy="384048"/>
+          <p:cNvPr id="46" name="Text 44"/>
+          <p:cNvSpPr/>
+          <p:nvPr/>
+        </p:nvSpPr>
+        <p:spPr>
+          <a:xfrm>
+            <a:off x="2831592" y="4169664"/>
+            <a:ext cx="685800" cy="384048"/>
           </a:xfrm>
           <a:prstGeom prst="rect">
             <a:avLst/>
@@ -36539,7 +36836,7 @@
                 <a:ea typeface="Trebuchet MS" pitchFamily="34" charset="-122"/>
                 <a:cs typeface="Trebuchet MS" pitchFamily="34" charset="-120"/>
               </a:rPr>
-              <a:t>i</a:t>
+              <a:t>n</a:t>
             </a:r>
             <a:endParaRPr lang="en-US" sz="900" dirty="0"/>
           </a:p>
@@ -36547,14 +36844,14 @@
       </p:sp>
       <p:sp>
         <p:nvSpPr>
-          <p:cNvPr id="46" name="Shape 44"/>
-          <p:cNvSpPr/>
-          <p:nvPr/>
-        </p:nvSpPr>
-        <p:spPr>
-          <a:xfrm>
-            <a:off x="3041435" y="4169664"/>
-            <a:ext cx="493776" cy="384048"/>
+          <p:cNvPr id="47" name="Shape 45"/>
+          <p:cNvSpPr/>
+          <p:nvPr/>
+        </p:nvSpPr>
+        <p:spPr>
+          <a:xfrm>
+            <a:off x="3639312" y="4169664"/>
+            <a:ext cx="685800" cy="384048"/>
           </a:xfrm>
           <a:prstGeom prst="rect">
             <a:avLst>
@@ -36574,14 +36871,14 @@
       </p:sp>
       <p:sp>
         <p:nvSpPr>
-          <p:cNvPr id="47" name="Text 45"/>
-          <p:cNvSpPr/>
-          <p:nvPr/>
-        </p:nvSpPr>
-        <p:spPr>
-          <a:xfrm>
-            <a:off x="3041435" y="4169664"/>
-            <a:ext cx="493776" cy="384048"/>
+          <p:cNvPr id="48" name="Text 46"/>
+          <p:cNvSpPr/>
+          <p:nvPr/>
+        </p:nvSpPr>
+        <p:spPr>
+          <a:xfrm>
+            <a:off x="3639312" y="4169664"/>
+            <a:ext cx="685800" cy="384048"/>
           </a:xfrm>
           <a:prstGeom prst="rect">
             <a:avLst/>
@@ -36605,7 +36902,7 @@
                 <a:ea typeface="Trebuchet MS" pitchFamily="34" charset="-122"/>
                 <a:cs typeface="Trebuchet MS" pitchFamily="34" charset="-120"/>
               </a:rPr>
-              <a:t>s</a:t>
+              <a:t>c</a:t>
             </a:r>
             <a:endParaRPr lang="en-US" sz="900" dirty="0"/>
           </a:p>
@@ -36613,14 +36910,53 @@
       </p:sp>
       <p:sp>
         <p:nvSpPr>
-          <p:cNvPr id="48" name="Shape 46"/>
-          <p:cNvSpPr/>
-          <p:nvPr/>
-        </p:nvSpPr>
-        <p:spPr>
-          <a:xfrm>
-            <a:off x="3585855" y="4169664"/>
-            <a:ext cx="493776" cy="384048"/>
+          <p:cNvPr id="49" name="Text 47"/>
+          <p:cNvSpPr/>
+          <p:nvPr/>
+        </p:nvSpPr>
+        <p:spPr>
+          <a:xfrm>
+            <a:off x="3639312" y="4572000"/>
+            <a:ext cx="685800" cy="219456"/>
+          </a:xfrm>
+          <a:prstGeom prst="rect">
+            <a:avLst/>
+          </a:prstGeom>
+          <a:noFill/>
+          <a:ln/>
+        </p:spPr>
+        <p:txBody>
+          <a:bodyPr wrap="square" lIns="0" tIns="0" rIns="0" bIns="0" rtlCol="0" anchor="t"/>
+          <a:lstStyle/>
+          <a:p>
+            <a:pPr algn="ctr" indent="0" marL="0">
+              <a:buNone/>
+            </a:pPr>
+            <a:r>
+              <a:rPr lang="en-US" sz="750" i="1" dirty="0">
+                <a:solidFill>
+                  <a:srgbClr val="94A3B8"/>
+                </a:solidFill>
+                <a:latin typeface="Calibri" pitchFamily="34" charset="0"/>
+                <a:ea typeface="Calibri" pitchFamily="34" charset="-122"/>
+                <a:cs typeface="Calibri" pitchFamily="34" charset="-120"/>
+              </a:rPr>
+              <a:t>/k/</a:t>
+            </a:r>
+            <a:endParaRPr lang="en-US" sz="750" dirty="0"/>
+          </a:p>
+        </p:txBody>
+      </p:sp>
+      <p:sp>
+        <p:nvSpPr>
+          <p:cNvPr id="50" name="Shape 48"/>
+          <p:cNvSpPr/>
+          <p:nvPr/>
+        </p:nvSpPr>
+        <p:spPr>
+          <a:xfrm>
+            <a:off x="4447032" y="4169664"/>
+            <a:ext cx="685800" cy="384048"/>
           </a:xfrm>
           <a:prstGeom prst="rect">
             <a:avLst>
@@ -36640,14 +36976,14 @@
       </p:sp>
       <p:sp>
         <p:nvSpPr>
-          <p:cNvPr id="49" name="Text 47"/>
-          <p:cNvSpPr/>
-          <p:nvPr/>
-        </p:nvSpPr>
-        <p:spPr>
-          <a:xfrm>
-            <a:off x="3585855" y="4169664"/>
-            <a:ext cx="493776" cy="384048"/>
+          <p:cNvPr id="51" name="Text 49"/>
+          <p:cNvSpPr/>
+          <p:nvPr/>
+        </p:nvSpPr>
+        <p:spPr>
+          <a:xfrm>
+            <a:off x="4447032" y="4169664"/>
+            <a:ext cx="685800" cy="384048"/>
           </a:xfrm>
           <a:prstGeom prst="rect">
             <a:avLst/>
@@ -36671,7 +37007,7 @@
                 <a:ea typeface="Trebuchet MS" pitchFamily="34" charset="-122"/>
                 <a:cs typeface="Trebuchet MS" pitchFamily="34" charset="-120"/>
               </a:rPr>
-              <a:t>c</a:t>
+              <a:t>ou</a:t>
             </a:r>
             <a:endParaRPr lang="en-US" sz="900" dirty="0"/>
           </a:p>
@@ -36679,53 +37015,14 @@
       </p:sp>
       <p:sp>
         <p:nvSpPr>
-          <p:cNvPr id="50" name="Text 48"/>
-          <p:cNvSpPr/>
-          <p:nvPr/>
-        </p:nvSpPr>
-        <p:spPr>
-          <a:xfrm>
-            <a:off x="3585855" y="4572000"/>
-            <a:ext cx="493776" cy="219456"/>
-          </a:xfrm>
-          <a:prstGeom prst="rect">
-            <a:avLst/>
-          </a:prstGeom>
-          <a:noFill/>
-          <a:ln/>
-        </p:spPr>
-        <p:txBody>
-          <a:bodyPr wrap="square" lIns="0" tIns="0" rIns="0" bIns="0" rtlCol="0" anchor="t"/>
-          <a:lstStyle/>
-          <a:p>
-            <a:pPr algn="ctr" indent="0" marL="0">
-              <a:buNone/>
-            </a:pPr>
-            <a:r>
-              <a:rPr lang="en-US" sz="750" i="1" dirty="0">
-                <a:solidFill>
-                  <a:srgbClr val="94A3B8"/>
-                </a:solidFill>
-                <a:latin typeface="Calibri" pitchFamily="34" charset="0"/>
-                <a:ea typeface="Calibri" pitchFamily="34" charset="-122"/>
-                <a:cs typeface="Calibri" pitchFamily="34" charset="-120"/>
-              </a:rPr>
-              <a:t>/k/</a:t>
-            </a:r>
-            <a:endParaRPr lang="en-US" sz="750" dirty="0"/>
-          </a:p>
-        </p:txBody>
-      </p:sp>
-      <p:sp>
-        <p:nvSpPr>
-          <p:cNvPr id="51" name="Shape 49"/>
-          <p:cNvSpPr/>
-          <p:nvPr/>
-        </p:nvSpPr>
-        <p:spPr>
-          <a:xfrm>
-            <a:off x="4130274" y="4169664"/>
-            <a:ext cx="493776" cy="384048"/>
+          <p:cNvPr id="52" name="Shape 50"/>
+          <p:cNvSpPr/>
+          <p:nvPr/>
+        </p:nvSpPr>
+        <p:spPr>
+          <a:xfrm>
+            <a:off x="5254752" y="4169664"/>
+            <a:ext cx="685800" cy="384048"/>
           </a:xfrm>
           <a:prstGeom prst="rect">
             <a:avLst>
@@ -36745,14 +37042,14 @@
       </p:sp>
       <p:sp>
         <p:nvSpPr>
-          <p:cNvPr id="52" name="Text 50"/>
-          <p:cNvSpPr/>
-          <p:nvPr/>
-        </p:nvSpPr>
-        <p:spPr>
-          <a:xfrm>
-            <a:off x="4130274" y="4169664"/>
-            <a:ext cx="493776" cy="384048"/>
+          <p:cNvPr id="53" name="Text 51"/>
+          <p:cNvSpPr/>
+          <p:nvPr/>
+        </p:nvSpPr>
+        <p:spPr>
+          <a:xfrm>
+            <a:off x="5254752" y="4169664"/>
+            <a:ext cx="685800" cy="384048"/>
           </a:xfrm>
           <a:prstGeom prst="rect">
             <a:avLst/>
@@ -36776,7 +37073,7 @@
                 <a:ea typeface="Trebuchet MS" pitchFamily="34" charset="-122"/>
                 <a:cs typeface="Trebuchet MS" pitchFamily="34" charset="-120"/>
               </a:rPr>
-              <a:t>ou</a:t>
+              <a:t>r</a:t>
             </a:r>
             <a:endParaRPr lang="en-US" sz="900" dirty="0"/>
           </a:p>
@@ -36784,14 +37081,14 @@
       </p:sp>
       <p:sp>
         <p:nvSpPr>
-          <p:cNvPr id="53" name="Shape 51"/>
-          <p:cNvSpPr/>
-          <p:nvPr/>
-        </p:nvSpPr>
-        <p:spPr>
-          <a:xfrm>
-            <a:off x="4674694" y="4169664"/>
-            <a:ext cx="493776" cy="384048"/>
+          <p:cNvPr id="54" name="Shape 52"/>
+          <p:cNvSpPr/>
+          <p:nvPr/>
+        </p:nvSpPr>
+        <p:spPr>
+          <a:xfrm>
+            <a:off x="6062472" y="4169664"/>
+            <a:ext cx="685800" cy="384048"/>
           </a:xfrm>
           <a:prstGeom prst="rect">
             <a:avLst>
@@ -36811,14 +37108,14 @@
       </p:sp>
       <p:sp>
         <p:nvSpPr>
-          <p:cNvPr id="54" name="Text 52"/>
-          <p:cNvSpPr/>
-          <p:nvPr/>
-        </p:nvSpPr>
-        <p:spPr>
-          <a:xfrm>
-            <a:off x="4674694" y="4169664"/>
-            <a:ext cx="493776" cy="384048"/>
+          <p:cNvPr id="55" name="Text 53"/>
+          <p:cNvSpPr/>
+          <p:nvPr/>
+        </p:nvSpPr>
+        <p:spPr>
+          <a:xfrm>
+            <a:off x="6062472" y="4169664"/>
+            <a:ext cx="685800" cy="384048"/>
           </a:xfrm>
           <a:prstGeom prst="rect">
             <a:avLst/>
@@ -36842,7 +37139,7 @@
                 <a:ea typeface="Trebuchet MS" pitchFamily="34" charset="-122"/>
                 <a:cs typeface="Trebuchet MS" pitchFamily="34" charset="-120"/>
               </a:rPr>
-              <a:t>r</a:t>
+              <a:t>a</a:t>
             </a:r>
             <a:endParaRPr lang="en-US" sz="900" dirty="0"/>
           </a:p>
@@ -36850,14 +37147,14 @@
       </p:sp>
       <p:sp>
         <p:nvSpPr>
-          <p:cNvPr id="55" name="Shape 53"/>
-          <p:cNvSpPr/>
-          <p:nvPr/>
-        </p:nvSpPr>
-        <p:spPr>
-          <a:xfrm>
-            <a:off x="5219114" y="4169664"/>
-            <a:ext cx="493776" cy="384048"/>
+          <p:cNvPr id="56" name="Shape 54"/>
+          <p:cNvSpPr/>
+          <p:nvPr/>
+        </p:nvSpPr>
+        <p:spPr>
+          <a:xfrm>
+            <a:off x="6870192" y="4169664"/>
+            <a:ext cx="685800" cy="384048"/>
           </a:xfrm>
           <a:prstGeom prst="rect">
             <a:avLst>
@@ -36877,14 +37174,14 @@
       </p:sp>
       <p:sp>
         <p:nvSpPr>
-          <p:cNvPr id="56" name="Text 54"/>
-          <p:cNvSpPr/>
-          <p:nvPr/>
-        </p:nvSpPr>
-        <p:spPr>
-          <a:xfrm>
-            <a:off x="5219114" y="4169664"/>
-            <a:ext cx="493776" cy="384048"/>
+          <p:cNvPr id="57" name="Text 55"/>
+          <p:cNvSpPr/>
+          <p:nvPr/>
+        </p:nvSpPr>
+        <p:spPr>
+          <a:xfrm>
+            <a:off x="6870192" y="4169664"/>
+            <a:ext cx="685800" cy="384048"/>
           </a:xfrm>
           <a:prstGeom prst="rect">
             <a:avLst/>
@@ -36908,7 +37205,7 @@
                 <a:ea typeface="Trebuchet MS" pitchFamily="34" charset="-122"/>
                 <a:cs typeface="Trebuchet MS" pitchFamily="34" charset="-120"/>
               </a:rPr>
-              <a:t>a</a:t>
+              <a:t>g</a:t>
             </a:r>
             <a:endParaRPr lang="en-US" sz="900" dirty="0"/>
           </a:p>
@@ -36916,14 +37213,14 @@
       </p:sp>
       <p:sp>
         <p:nvSpPr>
-          <p:cNvPr id="57" name="Shape 55"/>
-          <p:cNvSpPr/>
-          <p:nvPr/>
-        </p:nvSpPr>
-        <p:spPr>
-          <a:xfrm>
-            <a:off x="5763534" y="4169664"/>
-            <a:ext cx="493776" cy="384048"/>
+          <p:cNvPr id="58" name="Shape 56"/>
+          <p:cNvSpPr/>
+          <p:nvPr/>
+        </p:nvSpPr>
+        <p:spPr>
+          <a:xfrm>
+            <a:off x="7677912" y="4169664"/>
+            <a:ext cx="685800" cy="384048"/>
           </a:xfrm>
           <a:prstGeom prst="rect">
             <a:avLst>
@@ -36943,14 +37240,14 @@
       </p:sp>
       <p:sp>
         <p:nvSpPr>
-          <p:cNvPr id="58" name="Text 56"/>
-          <p:cNvSpPr/>
-          <p:nvPr/>
-        </p:nvSpPr>
-        <p:spPr>
-          <a:xfrm>
-            <a:off x="5763534" y="4169664"/>
-            <a:ext cx="493776" cy="384048"/>
+          <p:cNvPr id="59" name="Text 57"/>
+          <p:cNvSpPr/>
+          <p:nvPr/>
+        </p:nvSpPr>
+        <p:spPr>
+          <a:xfrm>
+            <a:off x="7677912" y="4169664"/>
+            <a:ext cx="685800" cy="384048"/>
           </a:xfrm>
           <a:prstGeom prst="rect">
             <a:avLst/>
@@ -36974,310 +37271,7 @@
                 <a:ea typeface="Trebuchet MS" pitchFamily="34" charset="-122"/>
                 <a:cs typeface="Trebuchet MS" pitchFamily="34" charset="-120"/>
               </a:rPr>
-              <a:t>ge</a:t>
-            </a:r>
-            <a:endParaRPr lang="en-US" sz="900" dirty="0"/>
-          </a:p>
-        </p:txBody>
-      </p:sp>
-      <p:sp>
-        <p:nvSpPr>
-          <p:cNvPr id="59" name="Text 57"/>
-          <p:cNvSpPr/>
-          <p:nvPr/>
-        </p:nvSpPr>
-        <p:spPr>
-          <a:xfrm>
-            <a:off x="5763534" y="4572000"/>
-            <a:ext cx="493776" cy="219456"/>
-          </a:xfrm>
-          <a:prstGeom prst="rect">
-            <a:avLst/>
-          </a:prstGeom>
-          <a:noFill/>
-          <a:ln/>
-        </p:spPr>
-        <p:txBody>
-          <a:bodyPr wrap="square" lIns="0" tIns="0" rIns="0" bIns="0" rtlCol="0" anchor="t"/>
-          <a:lstStyle/>
-          <a:p>
-            <a:pPr algn="ctr" indent="0" marL="0">
-              <a:buNone/>
-            </a:pPr>
-            <a:r>
-              <a:rPr lang="en-US" sz="750" i="1" dirty="0">
-                <a:solidFill>
-                  <a:srgbClr val="94A3B8"/>
-                </a:solidFill>
-                <a:latin typeface="Calibri" pitchFamily="34" charset="0"/>
-                <a:ea typeface="Calibri" pitchFamily="34" charset="-122"/>
-                <a:cs typeface="Calibri" pitchFamily="34" charset="-120"/>
-              </a:rPr>
-              <a:t>/j/</a:t>
-            </a:r>
-            <a:endParaRPr lang="en-US" sz="750" dirty="0"/>
-          </a:p>
-        </p:txBody>
-      </p:sp>
-      <p:sp>
-        <p:nvSpPr>
-          <p:cNvPr id="60" name="Shape 58"/>
-          <p:cNvSpPr/>
-          <p:nvPr/>
-        </p:nvSpPr>
-        <p:spPr>
-          <a:xfrm>
-            <a:off x="6307953" y="4169664"/>
-            <a:ext cx="493776" cy="384048"/>
-          </a:xfrm>
-          <a:prstGeom prst="rect">
-            <a:avLst>
-              <a:gd name="adj" fmla="val 9524"/>
-            </a:avLst>
-          </a:prstGeom>
-          <a:solidFill>
-            <a:srgbClr val="FFFFFF"/>
-          </a:solidFill>
-          <a:ln w="12700">
-            <a:solidFill>
-              <a:srgbClr val="DB2777"/>
-            </a:solidFill>
-            <a:prstDash val="solid"/>
-          </a:ln>
-        </p:spPr>
-      </p:sp>
-      <p:sp>
-        <p:nvSpPr>
-          <p:cNvPr id="61" name="Text 59"/>
-          <p:cNvSpPr/>
-          <p:nvPr/>
-        </p:nvSpPr>
-        <p:spPr>
-          <a:xfrm>
-            <a:off x="6307953" y="4169664"/>
-            <a:ext cx="493776" cy="384048"/>
-          </a:xfrm>
-          <a:prstGeom prst="rect">
-            <a:avLst/>
-          </a:prstGeom>
-          <a:noFill/>
-          <a:ln/>
-        </p:spPr>
-        <p:txBody>
-          <a:bodyPr wrap="square" lIns="0" tIns="0" rIns="0" bIns="0" rtlCol="0" anchor="ctr"/>
-          <a:lstStyle/>
-          <a:p>
-            <a:pPr algn="ctr" indent="0" marL="0">
-              <a:buNone/>
-            </a:pPr>
-            <a:r>
-              <a:rPr lang="en-US" sz="900" b="1" dirty="0">
-                <a:solidFill>
-                  <a:srgbClr val="9D174D"/>
-                </a:solidFill>
-                <a:latin typeface="Trebuchet MS" pitchFamily="34" charset="0"/>
-                <a:ea typeface="Trebuchet MS" pitchFamily="34" charset="-122"/>
-                <a:cs typeface="Trebuchet MS" pitchFamily="34" charset="-120"/>
-              </a:rPr>
-              <a:t>m</a:t>
-            </a:r>
-            <a:endParaRPr lang="en-US" sz="900" dirty="0"/>
-          </a:p>
-        </p:txBody>
-      </p:sp>
-      <p:sp>
-        <p:nvSpPr>
-          <p:cNvPr id="62" name="Shape 60"/>
-          <p:cNvSpPr/>
-          <p:nvPr/>
-        </p:nvSpPr>
-        <p:spPr>
-          <a:xfrm>
-            <a:off x="6852373" y="4169664"/>
-            <a:ext cx="493776" cy="384048"/>
-          </a:xfrm>
-          <a:prstGeom prst="rect">
-            <a:avLst>
-              <a:gd name="adj" fmla="val 9524"/>
-            </a:avLst>
-          </a:prstGeom>
-          <a:solidFill>
-            <a:srgbClr val="FFFFFF"/>
-          </a:solidFill>
-          <a:ln w="12700">
-            <a:solidFill>
-              <a:srgbClr val="DB2777"/>
-            </a:solidFill>
-            <a:prstDash val="solid"/>
-          </a:ln>
-        </p:spPr>
-      </p:sp>
-      <p:sp>
-        <p:nvSpPr>
-          <p:cNvPr id="63" name="Text 61"/>
-          <p:cNvSpPr/>
-          <p:nvPr/>
-        </p:nvSpPr>
-        <p:spPr>
-          <a:xfrm>
-            <a:off x="6852373" y="4169664"/>
-            <a:ext cx="493776" cy="384048"/>
-          </a:xfrm>
-          <a:prstGeom prst="rect">
-            <a:avLst/>
-          </a:prstGeom>
-          <a:noFill/>
-          <a:ln/>
-        </p:spPr>
-        <p:txBody>
-          <a:bodyPr wrap="square" lIns="0" tIns="0" rIns="0" bIns="0" rtlCol="0" anchor="ctr"/>
-          <a:lstStyle/>
-          <a:p>
-            <a:pPr algn="ctr" indent="0" marL="0">
-              <a:buNone/>
-            </a:pPr>
-            <a:r>
-              <a:rPr lang="en-US" sz="900" b="1" dirty="0">
-                <a:solidFill>
-                  <a:srgbClr val="9D174D"/>
-                </a:solidFill>
-                <a:latin typeface="Trebuchet MS" pitchFamily="34" charset="0"/>
-                <a:ea typeface="Trebuchet MS" pitchFamily="34" charset="-122"/>
-                <a:cs typeface="Trebuchet MS" pitchFamily="34" charset="-120"/>
-              </a:rPr>
-              <a:t>e</a:t>
-            </a:r>
-            <a:endParaRPr lang="en-US" sz="900" dirty="0"/>
-          </a:p>
-        </p:txBody>
-      </p:sp>
-      <p:sp>
-        <p:nvSpPr>
-          <p:cNvPr id="64" name="Shape 62"/>
-          <p:cNvSpPr/>
-          <p:nvPr/>
-        </p:nvSpPr>
-        <p:spPr>
-          <a:xfrm>
-            <a:off x="7396793" y="4169664"/>
-            <a:ext cx="493776" cy="384048"/>
-          </a:xfrm>
-          <a:prstGeom prst="rect">
-            <a:avLst>
-              <a:gd name="adj" fmla="val 9524"/>
-            </a:avLst>
-          </a:prstGeom>
-          <a:solidFill>
-            <a:srgbClr val="FFFFFF"/>
-          </a:solidFill>
-          <a:ln w="12700">
-            <a:solidFill>
-              <a:srgbClr val="DB2777"/>
-            </a:solidFill>
-            <a:prstDash val="solid"/>
-          </a:ln>
-        </p:spPr>
-      </p:sp>
-      <p:sp>
-        <p:nvSpPr>
-          <p:cNvPr id="65" name="Text 63"/>
-          <p:cNvSpPr/>
-          <p:nvPr/>
-        </p:nvSpPr>
-        <p:spPr>
-          <a:xfrm>
-            <a:off x="7396793" y="4169664"/>
-            <a:ext cx="493776" cy="384048"/>
-          </a:xfrm>
-          <a:prstGeom prst="rect">
-            <a:avLst/>
-          </a:prstGeom>
-          <a:noFill/>
-          <a:ln/>
-        </p:spPr>
-        <p:txBody>
-          <a:bodyPr wrap="square" lIns="0" tIns="0" rIns="0" bIns="0" rtlCol="0" anchor="ctr"/>
-          <a:lstStyle/>
-          <a:p>
-            <a:pPr algn="ctr" indent="0" marL="0">
-              <a:buNone/>
-            </a:pPr>
-            <a:r>
-              <a:rPr lang="en-US" sz="900" b="1" dirty="0">
-                <a:solidFill>
-                  <a:srgbClr val="9D174D"/>
-                </a:solidFill>
-                <a:latin typeface="Trebuchet MS" pitchFamily="34" charset="0"/>
-                <a:ea typeface="Trebuchet MS" pitchFamily="34" charset="-122"/>
-                <a:cs typeface="Trebuchet MS" pitchFamily="34" charset="-120"/>
-              </a:rPr>
-              <a:t>n</a:t>
-            </a:r>
-            <a:endParaRPr lang="en-US" sz="900" dirty="0"/>
-          </a:p>
-        </p:txBody>
-      </p:sp>
-      <p:sp>
-        <p:nvSpPr>
-          <p:cNvPr id="66" name="Shape 64"/>
-          <p:cNvSpPr/>
-          <p:nvPr/>
-        </p:nvSpPr>
-        <p:spPr>
-          <a:xfrm>
-            <a:off x="7941212" y="4169664"/>
-            <a:ext cx="493776" cy="384048"/>
-          </a:xfrm>
-          <a:prstGeom prst="rect">
-            <a:avLst>
-              <a:gd name="adj" fmla="val 9524"/>
-            </a:avLst>
-          </a:prstGeom>
-          <a:solidFill>
-            <a:srgbClr val="FFFFFF"/>
-          </a:solidFill>
-          <a:ln w="12700">
-            <a:solidFill>
-              <a:srgbClr val="DB2777"/>
-            </a:solidFill>
-            <a:prstDash val="solid"/>
-          </a:ln>
-        </p:spPr>
-      </p:sp>
-      <p:sp>
-        <p:nvSpPr>
-          <p:cNvPr id="67" name="Text 65"/>
-          <p:cNvSpPr/>
-          <p:nvPr/>
-        </p:nvSpPr>
-        <p:spPr>
-          <a:xfrm>
-            <a:off x="7941212" y="4169664"/>
-            <a:ext cx="493776" cy="384048"/>
-          </a:xfrm>
-          <a:prstGeom prst="rect">
-            <a:avLst/>
-          </a:prstGeom>
-          <a:noFill/>
-          <a:ln/>
-        </p:spPr>
-        <p:txBody>
-          <a:bodyPr wrap="square" lIns="0" tIns="0" rIns="0" bIns="0" rtlCol="0" anchor="ctr"/>
-          <a:lstStyle/>
-          <a:p>
-            <a:pPr algn="ctr" indent="0" marL="0">
-              <a:buNone/>
-            </a:pPr>
-            <a:r>
-              <a:rPr lang="en-US" sz="900" b="1" dirty="0">
-                <a:solidFill>
-                  <a:srgbClr val="9D174D"/>
-                </a:solidFill>
-                <a:latin typeface="Trebuchet MS" pitchFamily="34" charset="0"/>
-                <a:ea typeface="Trebuchet MS" pitchFamily="34" charset="-122"/>
-                <a:cs typeface="Trebuchet MS" pitchFamily="34" charset="-120"/>
-              </a:rPr>
-              <a:t>t</a:t>
+              <a:t>er</a:t>
             </a:r>
             <a:endParaRPr lang="en-US" sz="900" dirty="0"/>
           </a:p>
@@ -39537,7 +39531,7 @@
                 <a:ea typeface="Trebuchet MS" pitchFamily="34" charset="-122"/>
                 <a:cs typeface="Trebuchet MS" pitchFamily="34" charset="-120"/>
               </a:rPr>
-              <a:t>over-</a:t>
+              <a:t>self-</a:t>
             </a:r>
             <a:endParaRPr lang="en-US" sz="1300" dirty="0"/>
           </a:p>
@@ -39690,7 +39684,7 @@
                 <a:ea typeface="Trebuchet MS" pitchFamily="34" charset="-122"/>
                 <a:cs typeface="Trebuchet MS" pitchFamily="34" charset="-120"/>
               </a:rPr>
-              <a:t>self-</a:t>
+              <a:t>over-</a:t>
             </a:r>
             <a:endParaRPr lang="en-US" sz="1300" dirty="0"/>
           </a:p>
@@ -39950,7 +39944,7 @@
                 <a:ea typeface="Trebuchet MS" pitchFamily="34" charset="-122"/>
                 <a:cs typeface="Trebuchet MS" pitchFamily="34" charset="-120"/>
               </a:rPr>
-              <a:t>encouragement</a:t>
+              <a:t>encouraged</a:t>
             </a:r>
             <a:endParaRPr lang="en-US" sz="1200" dirty="0"/>
           </a:p>
@@ -40082,7 +40076,7 @@
                 <a:ea typeface="Trebuchet MS" pitchFamily="34" charset="-122"/>
                 <a:cs typeface="Trebuchet MS" pitchFamily="34" charset="-120"/>
               </a:rPr>
-              <a:t>encouraged</a:t>
+              <a:t>encouragement</a:t>
             </a:r>
             <a:endParaRPr lang="en-US" sz="1200" dirty="0"/>
           </a:p>
@@ -40148,7 +40142,7 @@
                 <a:ea typeface="Trebuchet MS" pitchFamily="34" charset="-122"/>
                 <a:cs typeface="Trebuchet MS" pitchFamily="34" charset="-120"/>
               </a:rPr>
-              <a:t>encourager</a:t>
+              <a:t>encouragingly</a:t>
             </a:r>
             <a:endParaRPr lang="en-US" sz="1200" dirty="0"/>
           </a:p>
@@ -40214,7 +40208,7 @@
                 <a:ea typeface="Trebuchet MS" pitchFamily="34" charset="-122"/>
                 <a:cs typeface="Trebuchet MS" pitchFamily="34" charset="-120"/>
               </a:rPr>
-              <a:t>encouragingly</a:t>
+              <a:t>discouragement</a:t>
             </a:r>
             <a:endParaRPr lang="en-US" sz="1200" dirty="0"/>
           </a:p>
@@ -40280,7 +40274,7 @@
                 <a:ea typeface="Trebuchet MS" pitchFamily="34" charset="-122"/>
                 <a:cs typeface="Trebuchet MS" pitchFamily="34" charset="-120"/>
               </a:rPr>
-              <a:t>discourage</a:t>
+              <a:t>re-encourage</a:t>
             </a:r>
             <a:endParaRPr lang="en-US" sz="1200" dirty="0"/>
           </a:p>
@@ -40346,7 +40340,7 @@
                 <a:ea typeface="Trebuchet MS" pitchFamily="34" charset="-122"/>
                 <a:cs typeface="Trebuchet MS" pitchFamily="34" charset="-120"/>
               </a:rPr>
-              <a:t>discouragement</a:t>
+              <a:t>encourager</a:t>
             </a:r>
             <a:endParaRPr lang="en-US" sz="1200" dirty="0"/>
           </a:p>
@@ -41534,7 +41528,7 @@
                 <a:ea typeface="Calibri" pitchFamily="34" charset="-122"/>
                 <a:cs typeface="Calibri" pitchFamily="34" charset="-120"/>
               </a:rPr>
-              <a:t>1.  The word 'encourage' comes from a Latin root related to the heart.</a:t>
+              <a:t>1.  'Encouragingly' is an adverb made by adding '-ly' to 'encouraging'.</a:t>
             </a:r>
             <a:endParaRPr lang="en-US" sz="1300" dirty="0"/>
           </a:p>
@@ -41673,7 +41667,7 @@
                 <a:ea typeface="Calibri" pitchFamily="34" charset="-122"/>
                 <a:cs typeface="Calibri" pitchFamily="34" charset="-120"/>
               </a:rPr>
-              <a:t>2.  The word 'discourage' means the same thing as 'encourage'.</a:t>
+              <a:t>2.  The word 'encouragement' contains the root 'encourage'.</a:t>
             </a:r>
             <a:endParaRPr lang="en-US" sz="1300" dirty="0"/>
           </a:p>
@@ -41696,11 +41690,11 @@
             </a:avLst>
           </a:prstGeom>
           <a:solidFill>
-            <a:srgbClr val="FEE2E2"/>
-          </a:solidFill>
-          <a:ln w="12700">
-            <a:solidFill>
-              <a:srgbClr val="DC2626"/>
+            <a:srgbClr val="DCFCE7"/>
+          </a:solidFill>
+          <a:ln w="12700">
+            <a:solidFill>
+              <a:srgbClr val="16A34A"/>
             </a:solidFill>
             <a:prstDash val="solid"/>
           </a:ln>
@@ -41733,13 +41727,13 @@
             <a:r>
               <a:rPr lang="en-US" sz="1100" b="1" dirty="0">
                 <a:solidFill>
-                  <a:srgbClr val="DC2626"/>
+                  <a:srgbClr val="16A34A"/>
                 </a:solidFill>
                 <a:latin typeface="Trebuchet MS" pitchFamily="34" charset="0"/>
                 <a:ea typeface="Trebuchet MS" pitchFamily="34" charset="-122"/>
                 <a:cs typeface="Trebuchet MS" pitchFamily="34" charset="-120"/>
               </a:rPr>
-              <a:t>FALSE</a:t>
+              <a:t>TRUE</a:t>
             </a:r>
             <a:endParaRPr lang="en-US" sz="1100" dirty="0"/>
           </a:p>
@@ -41812,7 +41806,7 @@
                 <a:ea typeface="Calibri" pitchFamily="34" charset="-122"/>
                 <a:cs typeface="Calibri" pitchFamily="34" charset="-120"/>
               </a:rPr>
-              <a:t>3.  Adding '-ment' to 'encourage' makes the noun 'encouragement'.</a:t>
+              <a:t>3.  'Encouraged' is used to describe something that will happen in the future.</a:t>
             </a:r>
             <a:endParaRPr lang="en-US" sz="1300" dirty="0"/>
           </a:p>
@@ -41835,11 +41829,11 @@
             </a:avLst>
           </a:prstGeom>
           <a:solidFill>
-            <a:srgbClr val="DCFCE7"/>
-          </a:solidFill>
-          <a:ln w="12700">
-            <a:solidFill>
-              <a:srgbClr val="16A34A"/>
+            <a:srgbClr val="FEE2E2"/>
+          </a:solidFill>
+          <a:ln w="12700">
+            <a:solidFill>
+              <a:srgbClr val="DC2626"/>
             </a:solidFill>
             <a:prstDash val="solid"/>
           </a:ln>
@@ -41872,13 +41866,13 @@
             <a:r>
               <a:rPr lang="en-US" sz="1100" b="1" dirty="0">
                 <a:solidFill>
-                  <a:srgbClr val="16A34A"/>
+                  <a:srgbClr val="DC2626"/>
                 </a:solidFill>
                 <a:latin typeface="Trebuchet MS" pitchFamily="34" charset="0"/>
                 <a:ea typeface="Trebuchet MS" pitchFamily="34" charset="-122"/>
                 <a:cs typeface="Trebuchet MS" pitchFamily="34" charset="-120"/>
               </a:rPr>
-              <a:t>TRUE</a:t>
+              <a:t>FALSE</a:t>
             </a:r>
             <a:endParaRPr lang="en-US" sz="1100" dirty="0"/>
           </a:p>
@@ -41951,7 +41945,7 @@
                 <a:ea typeface="Calibri" pitchFamily="34" charset="-122"/>
                 <a:cs typeface="Calibri" pitchFamily="34" charset="-120"/>
               </a:rPr>
-              <a:t>4.  An 'encourager' is a person who supports and cheers others on.</a:t>
+              <a:t>4.  The suffix '-ment' turns the verb 'encourage' into a noun.</a:t>
             </a:r>
             <a:endParaRPr lang="en-US" sz="1300" dirty="0"/>
           </a:p>
@@ -42090,7 +42084,7 @@
                 <a:ea typeface="Calibri" pitchFamily="34" charset="-122"/>
                 <a:cs typeface="Calibri" pitchFamily="34" charset="-120"/>
               </a:rPr>
-              <a:t>5.  The prefix 'dis-' in 'discourage' means 'again'.</a:t>
+              <a:t>5.  The prefix 'dis' in 'discouragement' means 'again'.</a:t>
             </a:r>
             <a:endParaRPr lang="en-US" sz="1300" dirty="0"/>
           </a:p>
@@ -42795,7 +42789,7 @@
                 <a:ea typeface="Trebuchet MS" pitchFamily="34" charset="-122"/>
                 <a:cs typeface="Trebuchet MS" pitchFamily="34" charset="-120"/>
               </a:rPr>
-              <a:t>encouragement</a:t>
+              <a:t>encouraged</a:t>
             </a:r>
             <a:endParaRPr lang="en-US" sz="1300" dirty="0"/>
           </a:p>
@@ -42927,7 +42921,7 @@
                 <a:ea typeface="Trebuchet MS" pitchFamily="34" charset="-122"/>
                 <a:cs typeface="Trebuchet MS" pitchFamily="34" charset="-120"/>
               </a:rPr>
-              <a:t>encouraged</a:t>
+              <a:t>encouragement</a:t>
             </a:r>
             <a:endParaRPr lang="en-US" sz="1300" dirty="0"/>
           </a:p>
@@ -42993,7 +42987,7 @@
                 <a:ea typeface="Trebuchet MS" pitchFamily="34" charset="-122"/>
                 <a:cs typeface="Trebuchet MS" pitchFamily="34" charset="-120"/>
               </a:rPr>
-              <a:t>encourager</a:t>
+              <a:t>encouragingly</a:t>
             </a:r>
             <a:endParaRPr lang="en-US" sz="1300" dirty="0"/>
           </a:p>
@@ -43059,7 +43053,7 @@
                 <a:ea typeface="Trebuchet MS" pitchFamily="34" charset="-122"/>
                 <a:cs typeface="Trebuchet MS" pitchFamily="34" charset="-120"/>
               </a:rPr>
-              <a:t>encouragingly</a:t>
+              <a:t>discouragement</a:t>
             </a:r>
             <a:endParaRPr lang="en-US" sz="1300" dirty="0"/>
           </a:p>
@@ -43125,7 +43119,7 @@
                 <a:ea typeface="Trebuchet MS" pitchFamily="34" charset="-122"/>
                 <a:cs typeface="Trebuchet MS" pitchFamily="34" charset="-120"/>
               </a:rPr>
-              <a:t>discourage</a:t>
+              <a:t>re-encourage</a:t>
             </a:r>
             <a:endParaRPr lang="en-US" sz="1300" dirty="0"/>
           </a:p>
@@ -44216,7 +44210,7 @@
                 <a:ea typeface="Trebuchet MS" pitchFamily="34" charset="-122"/>
                 <a:cs typeface="Trebuchet MS" pitchFamily="34" charset="-120"/>
               </a:rPr>
-              <a:t>over-</a:t>
+              <a:t>self-</a:t>
             </a:r>
             <a:endParaRPr lang="en-US" sz="1300" dirty="0"/>
           </a:p>
@@ -44369,7 +44363,7 @@
                 <a:ea typeface="Trebuchet MS" pitchFamily="34" charset="-122"/>
                 <a:cs typeface="Trebuchet MS" pitchFamily="34" charset="-120"/>
               </a:rPr>
-              <a:t>self-</a:t>
+              <a:t>over-</a:t>
             </a:r>
             <a:endParaRPr lang="en-US" sz="1300" dirty="0"/>
           </a:p>
@@ -45369,7 +45363,7 @@
                 <a:ea typeface="Calibri" pitchFamily="34" charset="-122"/>
                 <a:cs typeface="Calibri" pitchFamily="34" charset="-120"/>
               </a:rPr>
-              <a:t>Feeling supported and more confident after someone helped you.</a:t>
+              <a:t>Words or actions that help someone feel confident to keep going.</a:t>
             </a:r>
             <a:endParaRPr lang="en-US" sz="1200" dirty="0"/>
           </a:p>
@@ -45442,7 +45436,7 @@
                 <a:ea typeface="Trebuchet MS" pitchFamily="34" charset="-122"/>
                 <a:cs typeface="Trebuchet MS" pitchFamily="34" charset="-120"/>
               </a:rPr>
-              <a:t>encouragement</a:t>
+              <a:t>encouraged</a:t>
             </a:r>
             <a:endParaRPr lang="en-US" sz="1200" dirty="0"/>
           </a:p>
@@ -45647,7 +45641,7 @@
                 <a:ea typeface="Calibri" pitchFamily="34" charset="-122"/>
                 <a:cs typeface="Calibri" pitchFamily="34" charset="-120"/>
               </a:rPr>
-              <a:t>To make someone feel less confident or less likely to try something.</a:t>
+              <a:t>To give someone support and confidence again after they have struggled.</a:t>
             </a:r>
             <a:endParaRPr lang="en-US" sz="1200" dirty="0"/>
           </a:p>
@@ -45720,7 +45714,7 @@
                 <a:ea typeface="Trebuchet MS" pitchFamily="34" charset="-122"/>
                 <a:cs typeface="Trebuchet MS" pitchFamily="34" charset="-120"/>
               </a:rPr>
-              <a:t>encouraged</a:t>
+              <a:t>encouragement</a:t>
             </a:r>
             <a:endParaRPr lang="en-US" sz="1200" dirty="0"/>
           </a:p>
@@ -45786,7 +45780,7 @@
                 <a:ea typeface="Calibri" pitchFamily="34" charset="-122"/>
                 <a:cs typeface="Calibri" pitchFamily="34" charset="-120"/>
               </a:rPr>
-              <a:t>Making someone feel supported and confident to keep going.</a:t>
+              <a:t>Making someone feel hopeful and supported.</a:t>
             </a:r>
             <a:endParaRPr lang="en-US" sz="1200" dirty="0"/>
           </a:p>
@@ -45859,7 +45853,7 @@
                 <a:ea typeface="Trebuchet MS" pitchFamily="34" charset="-122"/>
                 <a:cs typeface="Trebuchet MS" pitchFamily="34" charset="-120"/>
               </a:rPr>
-              <a:t>encourager</a:t>
+              <a:t>encouragingly</a:t>
             </a:r>
             <a:endParaRPr lang="en-US" sz="1200" dirty="0"/>
           </a:p>
@@ -45925,7 +45919,7 @@
                 <a:ea typeface="Calibri" pitchFamily="34" charset="-122"/>
                 <a:cs typeface="Calibri" pitchFamily="34" charset="-120"/>
               </a:rPr>
-              <a:t>In a way that gives someone confidence and support.</a:t>
+              <a:t>A feeling that makes someone want to give up or stop trying.</a:t>
             </a:r>
             <a:endParaRPr lang="en-US" sz="1200" dirty="0"/>
           </a:p>
@@ -45998,7 +45992,7 @@
                 <a:ea typeface="Trebuchet MS" pitchFamily="34" charset="-122"/>
                 <a:cs typeface="Trebuchet MS" pitchFamily="34" charset="-120"/>
               </a:rPr>
-              <a:t>encouragingly</a:t>
+              <a:t>discouragement</a:t>
             </a:r>
             <a:endParaRPr lang="en-US" sz="1200" dirty="0"/>
           </a:p>
@@ -46064,7 +46058,7 @@
                 <a:ea typeface="Calibri" pitchFamily="34" charset="-122"/>
                 <a:cs typeface="Calibri" pitchFamily="34" charset="-120"/>
               </a:rPr>
-              <a:t>A person who supports and cheers others on.</a:t>
+              <a:t>In a way that makes someone feel supported and hopeful.</a:t>
             </a:r>
             <a:endParaRPr lang="en-US" sz="1200" dirty="0"/>
           </a:p>
@@ -46137,7 +46131,7 @@
                 <a:ea typeface="Trebuchet MS" pitchFamily="34" charset="-122"/>
                 <a:cs typeface="Trebuchet MS" pitchFamily="34" charset="-120"/>
               </a:rPr>
-              <a:t>discourage</a:t>
+              <a:t>re-encourage</a:t>
             </a:r>
             <a:endParaRPr lang="en-US" sz="1200" dirty="0"/>
           </a:p>
@@ -46203,7 +46197,7 @@
                 <a:ea typeface="Calibri" pitchFamily="34" charset="-122"/>
                 <a:cs typeface="Calibri" pitchFamily="34" charset="-120"/>
               </a:rPr>
-              <a:t>Words or actions that help someone feel brave enough to try.</a:t>
+              <a:t>Felt supported or motivated to try something.</a:t>
             </a:r>
             <a:endParaRPr lang="en-US" sz="1200" dirty="0"/>
           </a:p>
@@ -46698,7 +46692,7 @@
                 <a:ea typeface="Calibri" pitchFamily="34" charset="-122"/>
                 <a:cs typeface="Calibri" pitchFamily="34" charset="-120"/>
               </a:rPr>
-              <a:t>The coach gave the team a lot of encouragement before the big game.</a:t>
+              <a:t>The coach gave the team lots of encouragement before the big game.</a:t>
             </a:r>
             <a:endParaRPr lang="en-US" sz="1500" dirty="0"/>
           </a:p>
@@ -46862,7 +46856,7 @@
                 <a:ea typeface="Calibri" pitchFamily="34" charset="-122"/>
                 <a:cs typeface="Calibri" pitchFamily="34" charset="-120"/>
               </a:rPr>
-              <a:t>Mia's teacher encouraged her to keep practising her reading every night.</a:t>
+              <a:t>Her teacher's encouraging smile helped her feel brave enough to read aloud.</a:t>
             </a:r>
             <a:endParaRPr lang="en-US" sz="1500" dirty="0"/>
           </a:p>
@@ -47026,7 +47020,7 @@
                 <a:ea typeface="Calibri" pitchFamily="34" charset="-122"/>
                 <a:cs typeface="Calibri" pitchFamily="34" charset="-120"/>
               </a:rPr>
-              <a:t>It is important to be an encourager for your friends when they are feeling nervous.</a:t>
+              <a:t>It is important to encourage your friends when they are finding something difficult.</a:t>
             </a:r>
             <a:endParaRPr lang="en-US" sz="1500" dirty="0"/>
           </a:p>
